--- a/docs/Thesis-FoxGo-BaoCao.pptx
+++ b/docs/Thesis-FoxGo-BaoCao.pptx
@@ -5,47 +5,47 @@
     <p:sldMasterId id="2147483648" r:id="rId1"/>
   </p:sldMasterIdLst>
   <p:sldIdLst>
-    <p:sldId id="256" r:id="rId7"/>
-    <p:sldId id="257" r:id="rId8"/>
-    <p:sldId id="258" r:id="rId9"/>
-    <p:sldId id="259" r:id="rId10"/>
-    <p:sldId id="260" r:id="rId11"/>
-    <p:sldId id="261" r:id="rId12"/>
-    <p:sldId id="262" r:id="rId13"/>
-    <p:sldId id="263" r:id="rId14"/>
-    <p:sldId id="264" r:id="rId15"/>
-    <p:sldId id="265" r:id="rId16"/>
-    <p:sldId id="266" r:id="rId17"/>
-    <p:sldId id="267" r:id="rId18"/>
-    <p:sldId id="268" r:id="rId19"/>
-    <p:sldId id="269" r:id="rId20"/>
-    <p:sldId id="270" r:id="rId21"/>
-    <p:sldId id="271" r:id="rId22"/>
-    <p:sldId id="272" r:id="rId23"/>
-    <p:sldId id="273" r:id="rId24"/>
-    <p:sldId id="274" r:id="rId25"/>
-    <p:sldId id="275" r:id="rId26"/>
-    <p:sldId id="276" r:id="rId27"/>
-    <p:sldId id="277" r:id="rId28"/>
-    <p:sldId id="278" r:id="rId29"/>
-    <p:sldId id="279" r:id="rId30"/>
-    <p:sldId id="280" r:id="rId31"/>
-    <p:sldId id="281" r:id="rId32"/>
-    <p:sldId id="282" r:id="rId33"/>
-    <p:sldId id="283" r:id="rId34"/>
-    <p:sldId id="284" r:id="rId35"/>
-    <p:sldId id="285" r:id="rId36"/>
-    <p:sldId id="286" r:id="rId37"/>
-    <p:sldId id="287" r:id="rId38"/>
-    <p:sldId id="288" r:id="rId39"/>
-    <p:sldId id="289" r:id="rId40"/>
-    <p:sldId id="290" r:id="rId41"/>
-    <p:sldId id="291" r:id="rId42"/>
-    <p:sldId id="292" r:id="rId43"/>
-    <p:sldId id="293" r:id="rId44"/>
-    <p:sldId id="294" r:id="rId45"/>
-    <p:sldId id="295" r:id="rId46"/>
-    <p:sldId id="296" r:id="rId47"/>
+    <p:sldId id="256" r:id="rId2"/>
+    <p:sldId id="257" r:id="rId3"/>
+    <p:sldId id="258" r:id="rId4"/>
+    <p:sldId id="260" r:id="rId5"/>
+    <p:sldId id="297" r:id="rId6"/>
+    <p:sldId id="259" r:id="rId7"/>
+    <p:sldId id="261" r:id="rId8"/>
+    <p:sldId id="262" r:id="rId9"/>
+    <p:sldId id="263" r:id="rId10"/>
+    <p:sldId id="264" r:id="rId11"/>
+    <p:sldId id="265" r:id="rId12"/>
+    <p:sldId id="266" r:id="rId13"/>
+    <p:sldId id="267" r:id="rId14"/>
+    <p:sldId id="268" r:id="rId15"/>
+    <p:sldId id="269" r:id="rId16"/>
+    <p:sldId id="270" r:id="rId17"/>
+    <p:sldId id="271" r:id="rId18"/>
+    <p:sldId id="272" r:id="rId19"/>
+    <p:sldId id="273" r:id="rId20"/>
+    <p:sldId id="274" r:id="rId21"/>
+    <p:sldId id="275" r:id="rId22"/>
+    <p:sldId id="276" r:id="rId23"/>
+    <p:sldId id="277" r:id="rId24"/>
+    <p:sldId id="278" r:id="rId25"/>
+    <p:sldId id="279" r:id="rId26"/>
+    <p:sldId id="280" r:id="rId27"/>
+    <p:sldId id="281" r:id="rId28"/>
+    <p:sldId id="282" r:id="rId29"/>
+    <p:sldId id="283" r:id="rId30"/>
+    <p:sldId id="284" r:id="rId31"/>
+    <p:sldId id="285" r:id="rId32"/>
+    <p:sldId id="286" r:id="rId33"/>
+    <p:sldId id="287" r:id="rId34"/>
+    <p:sldId id="288" r:id="rId35"/>
+    <p:sldId id="289" r:id="rId36"/>
+    <p:sldId id="290" r:id="rId37"/>
+    <p:sldId id="291" r:id="rId38"/>
+    <p:sldId id="292" r:id="rId39"/>
+    <p:sldId id="293" r:id="rId40"/>
+    <p:sldId id="294" r:id="rId41"/>
+    <p:sldId id="296" r:id="rId42"/>
   </p:sldIdLst>
   <p:sldSz cx="9144000" cy="6858000" type="screen4x3"/>
   <p:notesSz cx="6858000" cy="9144000"/>
@@ -144,6 +144,22 @@
       </a:defRPr>
     </a:lvl9pPr>
   </p:defaultTextStyle>
+  <p:extLst>
+    <p:ext uri="{EFAFB233-063F-42B5-8137-9DF3F51BA10A}">
+      <p15:sldGuideLst xmlns:p15="http://schemas.microsoft.com/office/powerpoint/2012/main">
+        <p15:guide id="1" orient="horz" pos="2160">
+          <p15:clr>
+            <a:srgbClr val="A4A3A4"/>
+          </p15:clr>
+        </p15:guide>
+        <p15:guide id="2" pos="2880">
+          <p15:clr>
+            <a:srgbClr val="A4A3A4"/>
+          </p15:clr>
+        </p15:guide>
+      </p15:sldGuideLst>
+    </p:ext>
+  </p:extLst>
 </p:presentation>
 </file>
 
@@ -185,10 +201,9 @@
           <a:lstStyle/>
           <a:p>
             <a:r>
-              <a:rPr lang="en-US" smtClean="0"/>
+              <a:rPr lang="en-US"/>
               <a:t>Click to edit Master title style</a:t>
             </a:r>
-            <a:endParaRPr lang="en-US"/>
           </a:p>
         </p:txBody>
       </p:sp>
@@ -304,10 +319,9 @@
           </a:lstStyle>
           <a:p>
             <a:r>
-              <a:rPr lang="en-US" smtClean="0"/>
+              <a:rPr lang="en-US"/>
               <a:t>Click to edit Master subtitle style</a:t>
             </a:r>
-            <a:endParaRPr lang="en-US"/>
           </a:p>
         </p:txBody>
       </p:sp>
@@ -328,7 +342,7 @@
           <a:p>
             <a:fld id="{5BCAD085-E8A6-8845-BD4E-CB4CCA059FC4}" type="datetimeFigureOut">
               <a:rPr lang="en-US" smtClean="0"/>
-              <a:t>1/27/13</a:t>
+              <a:t>5/9/2026</a:t>
             </a:fld>
             <a:endParaRPr lang="en-US"/>
           </a:p>
@@ -422,10 +436,9 @@
           <a:lstStyle/>
           <a:p>
             <a:r>
-              <a:rPr lang="en-US" smtClean="0"/>
+              <a:rPr lang="en-US"/>
               <a:t>Click to edit Master title style</a:t>
             </a:r>
-            <a:endParaRPr lang="en-US"/>
           </a:p>
         </p:txBody>
       </p:sp>
@@ -446,38 +459,37 @@
           <a:p>
             <a:pPr lvl="0"/>
             <a:r>
-              <a:rPr lang="en-US" smtClean="0"/>
+              <a:rPr lang="en-US"/>
               <a:t>Click to edit Master text styles</a:t>
             </a:r>
           </a:p>
           <a:p>
             <a:pPr lvl="1"/>
             <a:r>
-              <a:rPr lang="en-US" smtClean="0"/>
+              <a:rPr lang="en-US"/>
               <a:t>Second level</a:t>
             </a:r>
           </a:p>
           <a:p>
             <a:pPr lvl="2"/>
             <a:r>
-              <a:rPr lang="en-US" smtClean="0"/>
+              <a:rPr lang="en-US"/>
               <a:t>Third level</a:t>
             </a:r>
           </a:p>
           <a:p>
             <a:pPr lvl="3"/>
             <a:r>
-              <a:rPr lang="en-US" smtClean="0"/>
+              <a:rPr lang="en-US"/>
               <a:t>Fourth level</a:t>
             </a:r>
           </a:p>
           <a:p>
             <a:pPr lvl="4"/>
             <a:r>
-              <a:rPr lang="en-US" smtClean="0"/>
+              <a:rPr lang="en-US"/>
               <a:t>Fifth level</a:t>
             </a:r>
-            <a:endParaRPr lang="en-US"/>
           </a:p>
         </p:txBody>
       </p:sp>
@@ -498,7 +510,7 @@
           <a:p>
             <a:fld id="{5BCAD085-E8A6-8845-BD4E-CB4CCA059FC4}" type="datetimeFigureOut">
               <a:rPr lang="en-US" smtClean="0"/>
-              <a:t>1/27/13</a:t>
+              <a:t>5/9/2026</a:t>
             </a:fld>
             <a:endParaRPr lang="en-US"/>
           </a:p>
@@ -597,10 +609,9 @@
           <a:lstStyle/>
           <a:p>
             <a:r>
-              <a:rPr lang="en-US" smtClean="0"/>
+              <a:rPr lang="en-US"/>
               <a:t>Click to edit Master title style</a:t>
             </a:r>
-            <a:endParaRPr lang="en-US"/>
           </a:p>
         </p:txBody>
       </p:sp>
@@ -626,38 +637,37 @@
           <a:p>
             <a:pPr lvl="0"/>
             <a:r>
-              <a:rPr lang="en-US" smtClean="0"/>
+              <a:rPr lang="en-US"/>
               <a:t>Click to edit Master text styles</a:t>
             </a:r>
           </a:p>
           <a:p>
             <a:pPr lvl="1"/>
             <a:r>
-              <a:rPr lang="en-US" smtClean="0"/>
+              <a:rPr lang="en-US"/>
               <a:t>Second level</a:t>
             </a:r>
           </a:p>
           <a:p>
             <a:pPr lvl="2"/>
             <a:r>
-              <a:rPr lang="en-US" smtClean="0"/>
+              <a:rPr lang="en-US"/>
               <a:t>Third level</a:t>
             </a:r>
           </a:p>
           <a:p>
             <a:pPr lvl="3"/>
             <a:r>
-              <a:rPr lang="en-US" smtClean="0"/>
+              <a:rPr lang="en-US"/>
               <a:t>Fourth level</a:t>
             </a:r>
           </a:p>
           <a:p>
             <a:pPr lvl="4"/>
             <a:r>
-              <a:rPr lang="en-US" smtClean="0"/>
+              <a:rPr lang="en-US"/>
               <a:t>Fifth level</a:t>
             </a:r>
-            <a:endParaRPr lang="en-US"/>
           </a:p>
         </p:txBody>
       </p:sp>
@@ -678,7 +688,7 @@
           <a:p>
             <a:fld id="{5BCAD085-E8A6-8845-BD4E-CB4CCA059FC4}" type="datetimeFigureOut">
               <a:rPr lang="en-US" smtClean="0"/>
-              <a:t>1/27/13</a:t>
+              <a:t>5/9/2026</a:t>
             </a:fld>
             <a:endParaRPr lang="en-US"/>
           </a:p>
@@ -772,10 +782,9 @@
           <a:lstStyle/>
           <a:p>
             <a:r>
-              <a:rPr lang="en-US" smtClean="0"/>
+              <a:rPr lang="en-US"/>
               <a:t>Click to edit Master title style</a:t>
             </a:r>
-            <a:endParaRPr lang="en-US"/>
           </a:p>
         </p:txBody>
       </p:sp>
@@ -796,38 +805,37 @@
           <a:p>
             <a:pPr lvl="0"/>
             <a:r>
-              <a:rPr lang="en-US" smtClean="0"/>
+              <a:rPr lang="en-US"/>
               <a:t>Click to edit Master text styles</a:t>
             </a:r>
           </a:p>
           <a:p>
             <a:pPr lvl="1"/>
             <a:r>
-              <a:rPr lang="en-US" smtClean="0"/>
+              <a:rPr lang="en-US"/>
               <a:t>Second level</a:t>
             </a:r>
           </a:p>
           <a:p>
             <a:pPr lvl="2"/>
             <a:r>
-              <a:rPr lang="en-US" smtClean="0"/>
+              <a:rPr lang="en-US"/>
               <a:t>Third level</a:t>
             </a:r>
           </a:p>
           <a:p>
             <a:pPr lvl="3"/>
             <a:r>
-              <a:rPr lang="en-US" smtClean="0"/>
+              <a:rPr lang="en-US"/>
               <a:t>Fourth level</a:t>
             </a:r>
           </a:p>
           <a:p>
             <a:pPr lvl="4"/>
             <a:r>
-              <a:rPr lang="en-US" smtClean="0"/>
+              <a:rPr lang="en-US"/>
               <a:t>Fifth level</a:t>
             </a:r>
-            <a:endParaRPr lang="en-US"/>
           </a:p>
         </p:txBody>
       </p:sp>
@@ -848,7 +856,7 @@
           <a:p>
             <a:fld id="{5BCAD085-E8A6-8845-BD4E-CB4CCA059FC4}" type="datetimeFigureOut">
               <a:rPr lang="en-US" smtClean="0"/>
-              <a:t>1/27/13</a:t>
+              <a:t>5/9/2026</a:t>
             </a:fld>
             <a:endParaRPr lang="en-US"/>
           </a:p>
@@ -951,10 +959,9 @@
           </a:lstStyle>
           <a:p>
             <a:r>
-              <a:rPr lang="en-US" smtClean="0"/>
+              <a:rPr lang="en-US"/>
               <a:t>Click to edit Master title style</a:t>
             </a:r>
-            <a:endParaRPr lang="en-US"/>
           </a:p>
         </p:txBody>
       </p:sp>
@@ -1071,7 +1078,7 @@
           <a:p>
             <a:pPr lvl="0"/>
             <a:r>
-              <a:rPr lang="en-US" smtClean="0"/>
+              <a:rPr lang="en-US"/>
               <a:t>Click to edit Master text styles</a:t>
             </a:r>
           </a:p>
@@ -1094,7 +1101,7 @@
           <a:p>
             <a:fld id="{5BCAD085-E8A6-8845-BD4E-CB4CCA059FC4}" type="datetimeFigureOut">
               <a:rPr lang="en-US" smtClean="0"/>
-              <a:t>1/27/13</a:t>
+              <a:t>5/9/2026</a:t>
             </a:fld>
             <a:endParaRPr lang="en-US"/>
           </a:p>
@@ -1188,10 +1195,9 @@
           <a:lstStyle/>
           <a:p>
             <a:r>
-              <a:rPr lang="en-US" smtClean="0"/>
+              <a:rPr lang="en-US"/>
               <a:t>Click to edit Master title style</a:t>
             </a:r>
-            <a:endParaRPr lang="en-US"/>
           </a:p>
         </p:txBody>
       </p:sp>
@@ -1245,38 +1251,37 @@
           <a:p>
             <a:pPr lvl="0"/>
             <a:r>
-              <a:rPr lang="en-US" smtClean="0"/>
+              <a:rPr lang="en-US"/>
               <a:t>Click to edit Master text styles</a:t>
             </a:r>
           </a:p>
           <a:p>
             <a:pPr lvl="1"/>
             <a:r>
-              <a:rPr lang="en-US" smtClean="0"/>
+              <a:rPr lang="en-US"/>
               <a:t>Second level</a:t>
             </a:r>
           </a:p>
           <a:p>
             <a:pPr lvl="2"/>
             <a:r>
-              <a:rPr lang="en-US" smtClean="0"/>
+              <a:rPr lang="en-US"/>
               <a:t>Third level</a:t>
             </a:r>
           </a:p>
           <a:p>
             <a:pPr lvl="3"/>
             <a:r>
-              <a:rPr lang="en-US" smtClean="0"/>
+              <a:rPr lang="en-US"/>
               <a:t>Fourth level</a:t>
             </a:r>
           </a:p>
           <a:p>
             <a:pPr lvl="4"/>
             <a:r>
-              <a:rPr lang="en-US" smtClean="0"/>
+              <a:rPr lang="en-US"/>
               <a:t>Fifth level</a:t>
             </a:r>
-            <a:endParaRPr lang="en-US"/>
           </a:p>
         </p:txBody>
       </p:sp>
@@ -1330,38 +1335,37 @@
           <a:p>
             <a:pPr lvl="0"/>
             <a:r>
-              <a:rPr lang="en-US" smtClean="0"/>
+              <a:rPr lang="en-US"/>
               <a:t>Click to edit Master text styles</a:t>
             </a:r>
           </a:p>
           <a:p>
             <a:pPr lvl="1"/>
             <a:r>
-              <a:rPr lang="en-US" smtClean="0"/>
+              <a:rPr lang="en-US"/>
               <a:t>Second level</a:t>
             </a:r>
           </a:p>
           <a:p>
             <a:pPr lvl="2"/>
             <a:r>
-              <a:rPr lang="en-US" smtClean="0"/>
+              <a:rPr lang="en-US"/>
               <a:t>Third level</a:t>
             </a:r>
           </a:p>
           <a:p>
             <a:pPr lvl="3"/>
             <a:r>
-              <a:rPr lang="en-US" smtClean="0"/>
+              <a:rPr lang="en-US"/>
               <a:t>Fourth level</a:t>
             </a:r>
           </a:p>
           <a:p>
             <a:pPr lvl="4"/>
             <a:r>
-              <a:rPr lang="en-US" smtClean="0"/>
+              <a:rPr lang="en-US"/>
               <a:t>Fifth level</a:t>
             </a:r>
-            <a:endParaRPr lang="en-US"/>
           </a:p>
         </p:txBody>
       </p:sp>
@@ -1382,7 +1386,7 @@
           <a:p>
             <a:fld id="{5BCAD085-E8A6-8845-BD4E-CB4CCA059FC4}" type="datetimeFigureOut">
               <a:rPr lang="en-US" smtClean="0"/>
-              <a:t>1/27/13</a:t>
+              <a:t>5/9/2026</a:t>
             </a:fld>
             <a:endParaRPr lang="en-US"/>
           </a:p>
@@ -1480,10 +1484,9 @@
           </a:lstStyle>
           <a:p>
             <a:r>
-              <a:rPr lang="en-US" smtClean="0"/>
+              <a:rPr lang="en-US"/>
               <a:t>Click to edit Master title style</a:t>
             </a:r>
-            <a:endParaRPr lang="en-US"/>
           </a:p>
         </p:txBody>
       </p:sp>
@@ -1546,7 +1549,7 @@
           <a:p>
             <a:pPr lvl="0"/>
             <a:r>
-              <a:rPr lang="en-US" smtClean="0"/>
+              <a:rPr lang="en-US"/>
               <a:t>Click to edit Master text styles</a:t>
             </a:r>
           </a:p>
@@ -1602,38 +1605,37 @@
           <a:p>
             <a:pPr lvl="0"/>
             <a:r>
-              <a:rPr lang="en-US" smtClean="0"/>
+              <a:rPr lang="en-US"/>
               <a:t>Click to edit Master text styles</a:t>
             </a:r>
           </a:p>
           <a:p>
             <a:pPr lvl="1"/>
             <a:r>
-              <a:rPr lang="en-US" smtClean="0"/>
+              <a:rPr lang="en-US"/>
               <a:t>Second level</a:t>
             </a:r>
           </a:p>
           <a:p>
             <a:pPr lvl="2"/>
             <a:r>
-              <a:rPr lang="en-US" smtClean="0"/>
+              <a:rPr lang="en-US"/>
               <a:t>Third level</a:t>
             </a:r>
           </a:p>
           <a:p>
             <a:pPr lvl="3"/>
             <a:r>
-              <a:rPr lang="en-US" smtClean="0"/>
+              <a:rPr lang="en-US"/>
               <a:t>Fourth level</a:t>
             </a:r>
           </a:p>
           <a:p>
             <a:pPr lvl="4"/>
             <a:r>
-              <a:rPr lang="en-US" smtClean="0"/>
+              <a:rPr lang="en-US"/>
               <a:t>Fifth level</a:t>
             </a:r>
-            <a:endParaRPr lang="en-US"/>
           </a:p>
         </p:txBody>
       </p:sp>
@@ -1696,7 +1698,7 @@
           <a:p>
             <a:pPr lvl="0"/>
             <a:r>
-              <a:rPr lang="en-US" smtClean="0"/>
+              <a:rPr lang="en-US"/>
               <a:t>Click to edit Master text styles</a:t>
             </a:r>
           </a:p>
@@ -1752,38 +1754,37 @@
           <a:p>
             <a:pPr lvl="0"/>
             <a:r>
-              <a:rPr lang="en-US" smtClean="0"/>
+              <a:rPr lang="en-US"/>
               <a:t>Click to edit Master text styles</a:t>
             </a:r>
           </a:p>
           <a:p>
             <a:pPr lvl="1"/>
             <a:r>
-              <a:rPr lang="en-US" smtClean="0"/>
+              <a:rPr lang="en-US"/>
               <a:t>Second level</a:t>
             </a:r>
           </a:p>
           <a:p>
             <a:pPr lvl="2"/>
             <a:r>
-              <a:rPr lang="en-US" smtClean="0"/>
+              <a:rPr lang="en-US"/>
               <a:t>Third level</a:t>
             </a:r>
           </a:p>
           <a:p>
             <a:pPr lvl="3"/>
             <a:r>
-              <a:rPr lang="en-US" smtClean="0"/>
+              <a:rPr lang="en-US"/>
               <a:t>Fourth level</a:t>
             </a:r>
           </a:p>
           <a:p>
             <a:pPr lvl="4"/>
             <a:r>
-              <a:rPr lang="en-US" smtClean="0"/>
+              <a:rPr lang="en-US"/>
               <a:t>Fifth level</a:t>
             </a:r>
-            <a:endParaRPr lang="en-US"/>
           </a:p>
         </p:txBody>
       </p:sp>
@@ -1804,7 +1805,7 @@
           <a:p>
             <a:fld id="{5BCAD085-E8A6-8845-BD4E-CB4CCA059FC4}" type="datetimeFigureOut">
               <a:rPr lang="en-US" smtClean="0"/>
-              <a:t>1/27/13</a:t>
+              <a:t>5/9/2026</a:t>
             </a:fld>
             <a:endParaRPr lang="en-US"/>
           </a:p>
@@ -1898,10 +1899,9 @@
           <a:lstStyle/>
           <a:p>
             <a:r>
-              <a:rPr lang="en-US" smtClean="0"/>
+              <a:rPr lang="en-US"/>
               <a:t>Click to edit Master title style</a:t>
             </a:r>
-            <a:endParaRPr lang="en-US"/>
           </a:p>
         </p:txBody>
       </p:sp>
@@ -1922,7 +1922,7 @@
           <a:p>
             <a:fld id="{5BCAD085-E8A6-8845-BD4E-CB4CCA059FC4}" type="datetimeFigureOut">
               <a:rPr lang="en-US" smtClean="0"/>
-              <a:t>1/27/13</a:t>
+              <a:t>5/9/2026</a:t>
             </a:fld>
             <a:endParaRPr lang="en-US"/>
           </a:p>
@@ -2017,7 +2017,7 @@
           <a:p>
             <a:fld id="{5BCAD085-E8A6-8845-BD4E-CB4CCA059FC4}" type="datetimeFigureOut">
               <a:rPr lang="en-US" smtClean="0"/>
-              <a:t>1/27/13</a:t>
+              <a:t>5/9/2026</a:t>
             </a:fld>
             <a:endParaRPr lang="en-US"/>
           </a:p>
@@ -2120,10 +2120,9 @@
           </a:lstStyle>
           <a:p>
             <a:r>
-              <a:rPr lang="en-US" smtClean="0"/>
+              <a:rPr lang="en-US"/>
               <a:t>Click to edit Master title style</a:t>
             </a:r>
-            <a:endParaRPr lang="en-US"/>
           </a:p>
         </p:txBody>
       </p:sp>
@@ -2177,38 +2176,37 @@
           <a:p>
             <a:pPr lvl="0"/>
             <a:r>
-              <a:rPr lang="en-US" smtClean="0"/>
+              <a:rPr lang="en-US"/>
               <a:t>Click to edit Master text styles</a:t>
             </a:r>
           </a:p>
           <a:p>
             <a:pPr lvl="1"/>
             <a:r>
-              <a:rPr lang="en-US" smtClean="0"/>
+              <a:rPr lang="en-US"/>
               <a:t>Second level</a:t>
             </a:r>
           </a:p>
           <a:p>
             <a:pPr lvl="2"/>
             <a:r>
-              <a:rPr lang="en-US" smtClean="0"/>
+              <a:rPr lang="en-US"/>
               <a:t>Third level</a:t>
             </a:r>
           </a:p>
           <a:p>
             <a:pPr lvl="3"/>
             <a:r>
-              <a:rPr lang="en-US" smtClean="0"/>
+              <a:rPr lang="en-US"/>
               <a:t>Fourth level</a:t>
             </a:r>
           </a:p>
           <a:p>
             <a:pPr lvl="4"/>
             <a:r>
-              <a:rPr lang="en-US" smtClean="0"/>
+              <a:rPr lang="en-US"/>
               <a:t>Fifth level</a:t>
             </a:r>
-            <a:endParaRPr lang="en-US"/>
           </a:p>
         </p:txBody>
       </p:sp>
@@ -2271,7 +2269,7 @@
           <a:p>
             <a:pPr lvl="0"/>
             <a:r>
-              <a:rPr lang="en-US" smtClean="0"/>
+              <a:rPr lang="en-US"/>
               <a:t>Click to edit Master text styles</a:t>
             </a:r>
           </a:p>
@@ -2294,7 +2292,7 @@
           <a:p>
             <a:fld id="{5BCAD085-E8A6-8845-BD4E-CB4CCA059FC4}" type="datetimeFigureOut">
               <a:rPr lang="en-US" smtClean="0"/>
-              <a:t>1/27/13</a:t>
+              <a:t>5/9/2026</a:t>
             </a:fld>
             <a:endParaRPr lang="en-US"/>
           </a:p>
@@ -2397,10 +2395,9 @@
           </a:lstStyle>
           <a:p>
             <a:r>
-              <a:rPr lang="en-US" smtClean="0"/>
+              <a:rPr lang="en-US"/>
               <a:t>Click to edit Master title style</a:t>
             </a:r>
-            <a:endParaRPr lang="en-US"/>
           </a:p>
         </p:txBody>
       </p:sp>
@@ -2524,7 +2521,7 @@
           <a:p>
             <a:pPr lvl="0"/>
             <a:r>
-              <a:rPr lang="en-US" smtClean="0"/>
+              <a:rPr lang="en-US"/>
               <a:t>Click to edit Master text styles</a:t>
             </a:r>
           </a:p>
@@ -2547,7 +2544,7 @@
           <a:p>
             <a:fld id="{5BCAD085-E8A6-8845-BD4E-CB4CCA059FC4}" type="datetimeFigureOut">
               <a:rPr lang="en-US" smtClean="0"/>
-              <a:t>1/27/13</a:t>
+              <a:t>5/9/2026</a:t>
             </a:fld>
             <a:endParaRPr lang="en-US"/>
           </a:p>
@@ -2656,10 +2653,9 @@
           <a:lstStyle/>
           <a:p>
             <a:r>
-              <a:rPr lang="en-US" smtClean="0"/>
+              <a:rPr lang="en-US"/>
               <a:t>Click to edit Master title style</a:t>
             </a:r>
-            <a:endParaRPr lang="en-US"/>
           </a:p>
         </p:txBody>
       </p:sp>
@@ -2690,38 +2686,37 @@
           <a:p>
             <a:pPr lvl="0"/>
             <a:r>
-              <a:rPr lang="en-US" smtClean="0"/>
+              <a:rPr lang="en-US"/>
               <a:t>Click to edit Master text styles</a:t>
             </a:r>
           </a:p>
           <a:p>
             <a:pPr lvl="1"/>
             <a:r>
-              <a:rPr lang="en-US" smtClean="0"/>
+              <a:rPr lang="en-US"/>
               <a:t>Second level</a:t>
             </a:r>
           </a:p>
           <a:p>
             <a:pPr lvl="2"/>
             <a:r>
-              <a:rPr lang="en-US" smtClean="0"/>
+              <a:rPr lang="en-US"/>
               <a:t>Third level</a:t>
             </a:r>
           </a:p>
           <a:p>
             <a:pPr lvl="3"/>
             <a:r>
-              <a:rPr lang="en-US" smtClean="0"/>
+              <a:rPr lang="en-US"/>
               <a:t>Fourth level</a:t>
             </a:r>
           </a:p>
           <a:p>
             <a:pPr lvl="4"/>
             <a:r>
-              <a:rPr lang="en-US" smtClean="0"/>
+              <a:rPr lang="en-US"/>
               <a:t>Fifth level</a:t>
             </a:r>
-            <a:endParaRPr lang="en-US"/>
           </a:p>
         </p:txBody>
       </p:sp>
@@ -2760,7 +2755,7 @@
           <a:p>
             <a:fld id="{5BCAD085-E8A6-8845-BD4E-CB4CCA059FC4}" type="datetimeFigureOut">
               <a:rPr lang="en-US" smtClean="0"/>
-              <a:t>1/27/13</a:t>
+              <a:t>5/9/2026</a:t>
             </a:fld>
             <a:endParaRPr lang="en-US"/>
           </a:p>
@@ -3119,7 +3114,7 @@
 </file>
 
 <file path=ppt/slides/slide1.xml><?xml version="1.0" encoding="utf-8"?>
-<p:sld xmlns:a="http://schemas.openxmlformats.org/drawingml/2006/main" xmlns:p="http://schemas.openxmlformats.org/presentationml/2006/main" xmlns:r="http://schemas.openxmlformats.org/officeDocument/2006/relationships">
+<p:sld xmlns:a="http://schemas.openxmlformats.org/drawingml/2006/main" xmlns:r="http://schemas.openxmlformats.org/officeDocument/2006/relationships" xmlns:p="http://schemas.openxmlformats.org/presentationml/2006/main">
   <p:cSld>
     <p:spTree>
       <p:nvGrpSpPr>
@@ -3127,7 +3122,14 @@
         <p:cNvGrpSpPr/>
         <p:nvPr/>
       </p:nvGrpSpPr>
-      <p:grpSpPr/>
+      <p:grpSpPr>
+        <a:xfrm>
+          <a:off x="0" y="0"/>
+          <a:ext cx="0" cy="0"/>
+          <a:chOff x="0" y="0"/>
+          <a:chExt cx="0" cy="0"/>
+        </a:xfrm>
+      </p:grpSpPr>
       <p:sp>
         <p:nvSpPr>
           <p:cNvPr id="2" name="Title 1"/>
@@ -3143,12 +3145,381 @@
           <a:bodyPr wrap="square"/>
           <a:lstStyle/>
           <a:p>
-            <a:pPr>
-              <a:defRPr sz="2800"/>
+            <a:pPr marL="180340" marR="179705" algn="ctr">
+              <a:lnSpc>
+                <a:spcPct val="130000"/>
+              </a:lnSpc>
+              <a:spcBef>
+                <a:spcPts val="600"/>
+              </a:spcBef>
+              <a:spcAft>
+                <a:spcPts val="0"/>
+              </a:spcAft>
             </a:pPr>
             <a:r>
-              <a:t>TIÊU ĐỀ</a:t>
-            </a:r>
+              <a:rPr lang="en-US" sz="1800" b="1" dirty="0">
+                <a:effectLst/>
+                <a:latin typeface="Times New Roman" panose="02020603050405020304" pitchFamily="18" charset="0"/>
+                <a:ea typeface="Times New Roman" panose="02020603050405020304" pitchFamily="18" charset="0"/>
+              </a:rPr>
+              <a:t>BÁO CÁO KHÓA LUẬN TỐT NGHIỆP</a:t>
+            </a:r>
+            <a:br>
+              <a:rPr lang="en-US" sz="1800" dirty="0">
+                <a:effectLst/>
+                <a:latin typeface="Times New Roman" panose="02020603050405020304" pitchFamily="18" charset="0"/>
+                <a:ea typeface="Times New Roman" panose="02020603050405020304" pitchFamily="18" charset="0"/>
+              </a:rPr>
+            </a:br>
+            <a:r>
+              <a:rPr lang="en-US" sz="1800" b="1" dirty="0" err="1">
+                <a:effectLst/>
+                <a:latin typeface="Times New Roman" panose="02020603050405020304" pitchFamily="18" charset="0"/>
+                <a:ea typeface="Times New Roman" panose="02020603050405020304" pitchFamily="18" charset="0"/>
+              </a:rPr>
+              <a:t>Đề</a:t>
+            </a:r>
+            <a:r>
+              <a:rPr lang="en-US" sz="1800" b="1" dirty="0">
+                <a:effectLst/>
+                <a:latin typeface="Times New Roman" panose="02020603050405020304" pitchFamily="18" charset="0"/>
+                <a:ea typeface="Times New Roman" panose="02020603050405020304" pitchFamily="18" charset="0"/>
+              </a:rPr>
+              <a:t> </a:t>
+            </a:r>
+            <a:r>
+              <a:rPr lang="en-US" sz="1800" b="1" dirty="0" err="1">
+                <a:effectLst/>
+                <a:latin typeface="Times New Roman" panose="02020603050405020304" pitchFamily="18" charset="0"/>
+                <a:ea typeface="Times New Roman" panose="02020603050405020304" pitchFamily="18" charset="0"/>
+              </a:rPr>
+              <a:t>tài</a:t>
+            </a:r>
+            <a:r>
+              <a:rPr lang="en-US" sz="1800" b="1" dirty="0">
+                <a:effectLst/>
+                <a:latin typeface="Times New Roman" panose="02020603050405020304" pitchFamily="18" charset="0"/>
+                <a:ea typeface="Times New Roman" panose="02020603050405020304" pitchFamily="18" charset="0"/>
+              </a:rPr>
+              <a:t>: </a:t>
+            </a:r>
+            <a:r>
+              <a:rPr lang="en-US" sz="1800" b="1" dirty="0" err="1">
+                <a:effectLst/>
+                <a:latin typeface="Times New Roman" panose="02020603050405020304" pitchFamily="18" charset="0"/>
+                <a:ea typeface="Times New Roman" panose="02020603050405020304" pitchFamily="18" charset="0"/>
+              </a:rPr>
+              <a:t>Thiết</a:t>
+            </a:r>
+            <a:r>
+              <a:rPr lang="en-US" sz="1800" b="1" dirty="0">
+                <a:effectLst/>
+                <a:latin typeface="Times New Roman" panose="02020603050405020304" pitchFamily="18" charset="0"/>
+                <a:ea typeface="Times New Roman" panose="02020603050405020304" pitchFamily="18" charset="0"/>
+              </a:rPr>
+              <a:t> </a:t>
+            </a:r>
+            <a:r>
+              <a:rPr lang="en-US" sz="1800" b="1" dirty="0" err="1">
+                <a:effectLst/>
+                <a:latin typeface="Times New Roman" panose="02020603050405020304" pitchFamily="18" charset="0"/>
+                <a:ea typeface="Times New Roman" panose="02020603050405020304" pitchFamily="18" charset="0"/>
+              </a:rPr>
+              <a:t>kế</a:t>
+            </a:r>
+            <a:r>
+              <a:rPr lang="en-US" sz="1800" b="1" dirty="0">
+                <a:effectLst/>
+                <a:latin typeface="Times New Roman" panose="02020603050405020304" pitchFamily="18" charset="0"/>
+                <a:ea typeface="Times New Roman" panose="02020603050405020304" pitchFamily="18" charset="0"/>
+              </a:rPr>
+              <a:t> </a:t>
+            </a:r>
+            <a:r>
+              <a:rPr lang="en-US" sz="1800" b="1" dirty="0" err="1">
+                <a:effectLst/>
+                <a:latin typeface="Times New Roman" panose="02020603050405020304" pitchFamily="18" charset="0"/>
+                <a:ea typeface="Times New Roman" panose="02020603050405020304" pitchFamily="18" charset="0"/>
+              </a:rPr>
+              <a:t>và</a:t>
+            </a:r>
+            <a:r>
+              <a:rPr lang="en-US" sz="1800" b="1" dirty="0">
+                <a:effectLst/>
+                <a:latin typeface="Times New Roman" panose="02020603050405020304" pitchFamily="18" charset="0"/>
+                <a:ea typeface="Times New Roman" panose="02020603050405020304" pitchFamily="18" charset="0"/>
+              </a:rPr>
+              <a:t> </a:t>
+            </a:r>
+            <a:r>
+              <a:rPr lang="en-US" sz="1800" b="1" dirty="0" err="1">
+                <a:effectLst/>
+                <a:latin typeface="Times New Roman" panose="02020603050405020304" pitchFamily="18" charset="0"/>
+                <a:ea typeface="Times New Roman" panose="02020603050405020304" pitchFamily="18" charset="0"/>
+              </a:rPr>
+              <a:t>xây</a:t>
+            </a:r>
+            <a:r>
+              <a:rPr lang="en-US" sz="1800" b="1" dirty="0">
+                <a:effectLst/>
+                <a:latin typeface="Times New Roman" panose="02020603050405020304" pitchFamily="18" charset="0"/>
+                <a:ea typeface="Times New Roman" panose="02020603050405020304" pitchFamily="18" charset="0"/>
+              </a:rPr>
+              <a:t> </a:t>
+            </a:r>
+            <a:r>
+              <a:rPr lang="en-US" sz="1800" b="1" dirty="0" err="1">
+                <a:effectLst/>
+                <a:latin typeface="Times New Roman" panose="02020603050405020304" pitchFamily="18" charset="0"/>
+                <a:ea typeface="Times New Roman" panose="02020603050405020304" pitchFamily="18" charset="0"/>
+              </a:rPr>
+              <a:t>dựng</a:t>
+            </a:r>
+            <a:r>
+              <a:rPr lang="en-US" sz="1800" b="1" dirty="0">
+                <a:effectLst/>
+                <a:latin typeface="Times New Roman" panose="02020603050405020304" pitchFamily="18" charset="0"/>
+                <a:ea typeface="Times New Roman" panose="02020603050405020304" pitchFamily="18" charset="0"/>
+              </a:rPr>
+              <a:t> </a:t>
+            </a:r>
+            <a:r>
+              <a:rPr lang="en-US" sz="1800" b="1" dirty="0" err="1">
+                <a:effectLst/>
+                <a:latin typeface="Times New Roman" panose="02020603050405020304" pitchFamily="18" charset="0"/>
+                <a:ea typeface="Times New Roman" panose="02020603050405020304" pitchFamily="18" charset="0"/>
+              </a:rPr>
+              <a:t>hệ</a:t>
+            </a:r>
+            <a:r>
+              <a:rPr lang="en-US" sz="1800" b="1" dirty="0">
+                <a:effectLst/>
+                <a:latin typeface="Times New Roman" panose="02020603050405020304" pitchFamily="18" charset="0"/>
+                <a:ea typeface="Times New Roman" panose="02020603050405020304" pitchFamily="18" charset="0"/>
+              </a:rPr>
+              <a:t> </a:t>
+            </a:r>
+            <a:r>
+              <a:rPr lang="en-US" sz="1800" b="1" dirty="0" err="1">
+                <a:effectLst/>
+                <a:latin typeface="Times New Roman" panose="02020603050405020304" pitchFamily="18" charset="0"/>
+                <a:ea typeface="Times New Roman" panose="02020603050405020304" pitchFamily="18" charset="0"/>
+              </a:rPr>
+              <a:t>thống</a:t>
+            </a:r>
+            <a:r>
+              <a:rPr lang="en-US" sz="1800" b="1" dirty="0">
+                <a:effectLst/>
+                <a:latin typeface="Times New Roman" panose="02020603050405020304" pitchFamily="18" charset="0"/>
+                <a:ea typeface="Times New Roman" panose="02020603050405020304" pitchFamily="18" charset="0"/>
+              </a:rPr>
+              <a:t> </a:t>
+            </a:r>
+            <a:r>
+              <a:rPr lang="en-US" sz="1800" b="1" dirty="0" err="1">
+                <a:effectLst/>
+                <a:latin typeface="Times New Roman" panose="02020603050405020304" pitchFamily="18" charset="0"/>
+                <a:ea typeface="Times New Roman" panose="02020603050405020304" pitchFamily="18" charset="0"/>
+              </a:rPr>
+              <a:t>đặt</a:t>
+            </a:r>
+            <a:r>
+              <a:rPr lang="en-US" sz="1800" b="1" dirty="0">
+                <a:effectLst/>
+                <a:latin typeface="Times New Roman" panose="02020603050405020304" pitchFamily="18" charset="0"/>
+                <a:ea typeface="Times New Roman" panose="02020603050405020304" pitchFamily="18" charset="0"/>
+              </a:rPr>
+              <a:t> </a:t>
+            </a:r>
+            <a:r>
+              <a:rPr lang="en-US" sz="1800" b="1" dirty="0" err="1">
+                <a:effectLst/>
+                <a:latin typeface="Times New Roman" panose="02020603050405020304" pitchFamily="18" charset="0"/>
+                <a:ea typeface="Times New Roman" panose="02020603050405020304" pitchFamily="18" charset="0"/>
+              </a:rPr>
+              <a:t>xe</a:t>
+            </a:r>
+            <a:r>
+              <a:rPr lang="en-US" sz="1800" b="1" dirty="0">
+                <a:effectLst/>
+                <a:latin typeface="Times New Roman" panose="02020603050405020304" pitchFamily="18" charset="0"/>
+                <a:ea typeface="Times New Roman" panose="02020603050405020304" pitchFamily="18" charset="0"/>
+              </a:rPr>
+              <a:t> </a:t>
+            </a:r>
+            <a:r>
+              <a:rPr lang="en-US" sz="1800" b="1" dirty="0" err="1">
+                <a:effectLst/>
+                <a:latin typeface="Times New Roman" panose="02020603050405020304" pitchFamily="18" charset="0"/>
+                <a:ea typeface="Times New Roman" panose="02020603050405020304" pitchFamily="18" charset="0"/>
+              </a:rPr>
+              <a:t>dịch</a:t>
+            </a:r>
+            <a:r>
+              <a:rPr lang="en-US" sz="1800" b="1" dirty="0">
+                <a:effectLst/>
+                <a:latin typeface="Times New Roman" panose="02020603050405020304" pitchFamily="18" charset="0"/>
+                <a:ea typeface="Times New Roman" panose="02020603050405020304" pitchFamily="18" charset="0"/>
+              </a:rPr>
+              <a:t> </a:t>
+            </a:r>
+            <a:r>
+              <a:rPr lang="en-US" sz="1800" b="1" dirty="0" err="1">
+                <a:effectLst/>
+                <a:latin typeface="Times New Roman" panose="02020603050405020304" pitchFamily="18" charset="0"/>
+                <a:ea typeface="Times New Roman" panose="02020603050405020304" pitchFamily="18" charset="0"/>
+              </a:rPr>
+              <a:t>vụ</a:t>
+            </a:r>
+            <a:r>
+              <a:rPr lang="en-US" sz="1800" b="1" dirty="0">
+                <a:effectLst/>
+                <a:latin typeface="Times New Roman" panose="02020603050405020304" pitchFamily="18" charset="0"/>
+                <a:ea typeface="Times New Roman" panose="02020603050405020304" pitchFamily="18" charset="0"/>
+              </a:rPr>
+              <a:t> </a:t>
+            </a:r>
+            <a:r>
+              <a:rPr lang="en-US" sz="1800" b="1" dirty="0" err="1">
+                <a:effectLst/>
+                <a:latin typeface="Times New Roman" panose="02020603050405020304" pitchFamily="18" charset="0"/>
+                <a:ea typeface="Times New Roman" panose="02020603050405020304" pitchFamily="18" charset="0"/>
+              </a:rPr>
+              <a:t>thời</a:t>
+            </a:r>
+            <a:r>
+              <a:rPr lang="en-US" sz="1800" b="1" dirty="0">
+                <a:effectLst/>
+                <a:latin typeface="Times New Roman" panose="02020603050405020304" pitchFamily="18" charset="0"/>
+                <a:ea typeface="Times New Roman" panose="02020603050405020304" pitchFamily="18" charset="0"/>
+              </a:rPr>
+              <a:t> </a:t>
+            </a:r>
+            <a:r>
+              <a:rPr lang="en-US" sz="1800" b="1" dirty="0" err="1">
+                <a:effectLst/>
+                <a:latin typeface="Times New Roman" panose="02020603050405020304" pitchFamily="18" charset="0"/>
+                <a:ea typeface="Times New Roman" panose="02020603050405020304" pitchFamily="18" charset="0"/>
+              </a:rPr>
+              <a:t>gian</a:t>
+            </a:r>
+            <a:r>
+              <a:rPr lang="en-US" sz="1800" b="1" dirty="0">
+                <a:effectLst/>
+                <a:latin typeface="Times New Roman" panose="02020603050405020304" pitchFamily="18" charset="0"/>
+                <a:ea typeface="Times New Roman" panose="02020603050405020304" pitchFamily="18" charset="0"/>
+              </a:rPr>
+              <a:t> </a:t>
+            </a:r>
+            <a:r>
+              <a:rPr lang="en-US" sz="1800" b="1" dirty="0" err="1">
+                <a:effectLst/>
+                <a:latin typeface="Times New Roman" panose="02020603050405020304" pitchFamily="18" charset="0"/>
+                <a:ea typeface="Times New Roman" panose="02020603050405020304" pitchFamily="18" charset="0"/>
+              </a:rPr>
+              <a:t>thực</a:t>
+            </a:r>
+            <a:r>
+              <a:rPr lang="en-US" sz="1800" b="1" dirty="0">
+                <a:effectLst/>
+                <a:latin typeface="Times New Roman" panose="02020603050405020304" pitchFamily="18" charset="0"/>
+                <a:ea typeface="Times New Roman" panose="02020603050405020304" pitchFamily="18" charset="0"/>
+              </a:rPr>
+              <a:t> </a:t>
+            </a:r>
+            <a:r>
+              <a:rPr lang="en-US" sz="1800" b="1" dirty="0" err="1">
+                <a:effectLst/>
+                <a:latin typeface="Times New Roman" panose="02020603050405020304" pitchFamily="18" charset="0"/>
+                <a:ea typeface="Times New Roman" panose="02020603050405020304" pitchFamily="18" charset="0"/>
+              </a:rPr>
+              <a:t>theo</a:t>
+            </a:r>
+            <a:r>
+              <a:rPr lang="en-US" sz="1800" b="1" dirty="0">
+                <a:effectLst/>
+                <a:latin typeface="Times New Roman" panose="02020603050405020304" pitchFamily="18" charset="0"/>
+                <a:ea typeface="Times New Roman" panose="02020603050405020304" pitchFamily="18" charset="0"/>
+              </a:rPr>
+              <a:t> </a:t>
+            </a:r>
+            <a:r>
+              <a:rPr lang="en-US" sz="1800" b="1" dirty="0" err="1">
+                <a:effectLst/>
+                <a:latin typeface="Times New Roman" panose="02020603050405020304" pitchFamily="18" charset="0"/>
+                <a:ea typeface="Times New Roman" panose="02020603050405020304" pitchFamily="18" charset="0"/>
+              </a:rPr>
+              <a:t>hướng</a:t>
+            </a:r>
+            <a:r>
+              <a:rPr lang="en-US" sz="1800" b="1" dirty="0">
+                <a:effectLst/>
+                <a:latin typeface="Times New Roman" panose="02020603050405020304" pitchFamily="18" charset="0"/>
+                <a:ea typeface="Times New Roman" panose="02020603050405020304" pitchFamily="18" charset="0"/>
+              </a:rPr>
+              <a:t> </a:t>
+            </a:r>
+            <a:r>
+              <a:rPr lang="en-US" sz="1800" b="1" dirty="0" err="1">
+                <a:effectLst/>
+                <a:latin typeface="Times New Roman" panose="02020603050405020304" pitchFamily="18" charset="0"/>
+                <a:ea typeface="Times New Roman" panose="02020603050405020304" pitchFamily="18" charset="0"/>
+              </a:rPr>
+              <a:t>kiến</a:t>
+            </a:r>
+            <a:r>
+              <a:rPr lang="en-US" sz="1800" b="1" dirty="0">
+                <a:effectLst/>
+                <a:latin typeface="Times New Roman" panose="02020603050405020304" pitchFamily="18" charset="0"/>
+                <a:ea typeface="Times New Roman" panose="02020603050405020304" pitchFamily="18" charset="0"/>
+              </a:rPr>
+              <a:t> </a:t>
+            </a:r>
+            <a:r>
+              <a:rPr lang="en-US" sz="1800" b="1" dirty="0" err="1">
+                <a:effectLst/>
+                <a:latin typeface="Times New Roman" panose="02020603050405020304" pitchFamily="18" charset="0"/>
+                <a:ea typeface="Times New Roman" panose="02020603050405020304" pitchFamily="18" charset="0"/>
+              </a:rPr>
+              <a:t>trúc</a:t>
+            </a:r>
+            <a:r>
+              <a:rPr lang="en-US" sz="1800" b="1" dirty="0">
+                <a:effectLst/>
+                <a:latin typeface="Times New Roman" panose="02020603050405020304" pitchFamily="18" charset="0"/>
+                <a:ea typeface="Times New Roman" panose="02020603050405020304" pitchFamily="18" charset="0"/>
+              </a:rPr>
+              <a:t> vi </a:t>
+            </a:r>
+            <a:r>
+              <a:rPr lang="en-US" sz="1800" b="1" dirty="0" err="1">
+                <a:effectLst/>
+                <a:latin typeface="Times New Roman" panose="02020603050405020304" pitchFamily="18" charset="0"/>
+                <a:ea typeface="Times New Roman" panose="02020603050405020304" pitchFamily="18" charset="0"/>
+              </a:rPr>
+              <a:t>dịch</a:t>
+            </a:r>
+            <a:r>
+              <a:rPr lang="en-US" sz="1800" b="1" dirty="0">
+                <a:effectLst/>
+                <a:latin typeface="Times New Roman" panose="02020603050405020304" pitchFamily="18" charset="0"/>
+                <a:ea typeface="Times New Roman" panose="02020603050405020304" pitchFamily="18" charset="0"/>
+              </a:rPr>
+              <a:t> </a:t>
+            </a:r>
+            <a:r>
+              <a:rPr lang="en-US" sz="1800" b="1" dirty="0" err="1">
+                <a:effectLst/>
+                <a:latin typeface="Times New Roman" panose="02020603050405020304" pitchFamily="18" charset="0"/>
+                <a:ea typeface="Times New Roman" panose="02020603050405020304" pitchFamily="18" charset="0"/>
+              </a:rPr>
+              <a:t>vụ</a:t>
+            </a:r>
+            <a:endParaRPr lang="en-US" sz="1800" dirty="0">
+              <a:effectLst/>
+              <a:latin typeface="Times New Roman" panose="02020603050405020304" pitchFamily="18" charset="0"/>
+              <a:ea typeface="Times New Roman" panose="02020603050405020304" pitchFamily="18" charset="0"/>
+            </a:endParaRPr>
           </a:p>
         </p:txBody>
       </p:sp>
@@ -3171,7 +3542,28 @@
               <a:defRPr sz="1400"/>
             </a:pPr>
             <a:r>
-              <a:t>Thông tin sinh viên:</a:t>
+              <a:rPr dirty="0" err="1"/>
+              <a:t>Thông</a:t>
+            </a:r>
+            <a:r>
+              <a:rPr dirty="0"/>
+              <a:t> tin </a:t>
+            </a:r>
+            <a:r>
+              <a:rPr dirty="0" err="1"/>
+              <a:t>sinh</a:t>
+            </a:r>
+            <a:r>
+              <a:rPr dirty="0"/>
+              <a:t> </a:t>
+            </a:r>
+            <a:r>
+              <a:rPr dirty="0" err="1"/>
+              <a:t>viên</a:t>
+            </a:r>
+            <a:r>
+              <a:rPr dirty="0"/>
+              <a:t>:</a:t>
             </a:r>
           </a:p>
           <a:p>
@@ -3179,15 +3571,66 @@
               <a:defRPr sz="1400"/>
             </a:pPr>
             <a:r>
-              <a:t>Người nói đầu tiên: …</a:t>
-            </a:r>
+              <a:rPr lang="en-US" dirty="0" err="1"/>
+              <a:t>Sinh</a:t>
+            </a:r>
+            <a:r>
+              <a:rPr lang="en-US" dirty="0"/>
+              <a:t> </a:t>
+            </a:r>
+            <a:r>
+              <a:rPr lang="en-US" dirty="0" err="1"/>
+              <a:t>viên</a:t>
+            </a:r>
+            <a:r>
+              <a:rPr lang="en-US" dirty="0"/>
+              <a:t> 1: Trần Quốc Sáng - 22640841</a:t>
+            </a:r>
+            <a:endParaRPr dirty="0"/>
           </a:p>
           <a:p>
             <a:pPr>
               <a:defRPr sz="1400"/>
             </a:pPr>
             <a:r>
-              <a:t>Người nói cuối cùng: …</a:t>
+              <a:rPr lang="en-US" dirty="0" err="1"/>
+              <a:t>Sinh</a:t>
+            </a:r>
+            <a:r>
+              <a:rPr lang="en-US" dirty="0"/>
+              <a:t> </a:t>
+            </a:r>
+            <a:r>
+              <a:rPr lang="en-US" dirty="0" err="1"/>
+              <a:t>viên</a:t>
+            </a:r>
+            <a:r>
+              <a:rPr lang="en-US" dirty="0"/>
+              <a:t> 1: </a:t>
+            </a:r>
+            <a:r>
+              <a:rPr lang="en-US" dirty="0" err="1"/>
+              <a:t>Dương</a:t>
+            </a:r>
+            <a:r>
+              <a:rPr lang="en-US" dirty="0"/>
+              <a:t> </a:t>
+            </a:r>
+            <a:r>
+              <a:rPr lang="en-US" dirty="0" err="1"/>
+              <a:t>Đức</a:t>
+            </a:r>
+            <a:r>
+              <a:rPr lang="en-US" dirty="0"/>
+              <a:t> </a:t>
+            </a:r>
+            <a:r>
+              <a:rPr lang="en-US" dirty="0" err="1"/>
+              <a:t>Quý</a:t>
+            </a:r>
+            <a:r>
+              <a:rPr lang="en-US" dirty="0"/>
+              <a:t> - 21131061</a:t>
             </a:r>
           </a:p>
           <a:p>
@@ -3195,7 +3638,24 @@
               <a:defRPr sz="1400"/>
             </a:pPr>
             <a:r>
-              <a:t>GVHD: ThS Huỳnh Nam</a:t>
+              <a:rPr dirty="0"/>
+              <a:t>GVHD: </a:t>
+            </a:r>
+            <a:r>
+              <a:rPr dirty="0" err="1"/>
+              <a:t>ThS</a:t>
+            </a:r>
+            <a:r>
+              <a:rPr dirty="0"/>
+              <a:t> </a:t>
+            </a:r>
+            <a:r>
+              <a:rPr dirty="0" err="1"/>
+              <a:t>Huỳnh</a:t>
+            </a:r>
+            <a:r>
+              <a:rPr dirty="0"/>
+              <a:t> Nam</a:t>
             </a:r>
           </a:p>
         </p:txBody>
@@ -3209,7 +3669,7 @@
 </file>
 
 <file path=ppt/slides/slide10.xml><?xml version="1.0" encoding="utf-8"?>
-<p:sld xmlns:a="http://schemas.openxmlformats.org/drawingml/2006/main" xmlns:p="http://schemas.openxmlformats.org/presentationml/2006/main" xmlns:r="http://schemas.openxmlformats.org/officeDocument/2006/relationships">
+<p:sld xmlns:a="http://schemas.openxmlformats.org/drawingml/2006/main" xmlns:r="http://schemas.openxmlformats.org/officeDocument/2006/relationships" xmlns:p="http://schemas.openxmlformats.org/presentationml/2006/main">
   <p:cSld>
     <p:spTree>
       <p:nvGrpSpPr>
@@ -3217,7 +3677,94 @@
         <p:cNvGrpSpPr/>
         <p:nvPr/>
       </p:nvGrpSpPr>
-      <p:grpSpPr/>
+      <p:grpSpPr>
+        <a:xfrm>
+          <a:off x="0" y="0"/>
+          <a:ext cx="0" cy="0"/>
+          <a:chOff x="0" y="0"/>
+          <a:chExt cx="0" cy="0"/>
+        </a:xfrm>
+      </p:grpSpPr>
+      <p:sp>
+        <p:nvSpPr>
+          <p:cNvPr id="2" name="TextBox 1"/>
+          <p:cNvSpPr txBox="1"/>
+          <p:nvPr/>
+        </p:nvSpPr>
+        <p:spPr>
+          <a:xfrm>
+            <a:off x="411480" y="164592"/>
+            <a:ext cx="8321040" cy="530352"/>
+          </a:xfrm>
+          <a:prstGeom prst="rect">
+            <a:avLst/>
+          </a:prstGeom>
+          <a:noFill/>
+        </p:spPr>
+        <p:txBody>
+          <a:bodyPr wrap="square">
+            <a:spAutoFit/>
+          </a:bodyPr>
+          <a:lstStyle/>
+          <a:p>
+            <a:pPr>
+              <a:defRPr sz="1400" b="1"/>
+            </a:pPr>
+            <a:r>
+              <a:t>Minh họa: ddd bc service map</a:t>
+            </a:r>
+          </a:p>
+        </p:txBody>
+      </p:sp>
+      <p:pic>
+        <p:nvPicPr>
+          <p:cNvPr id="3" name="Picture 2" descr="ddd_bc_service_map.png"/>
+          <p:cNvPicPr>
+            <a:picLocks noChangeAspect="1"/>
+          </p:cNvPicPr>
+          <p:nvPr/>
+        </p:nvPicPr>
+        <p:blipFill>
+          <a:blip r:embed="rId2"/>
+          <a:stretch>
+            <a:fillRect/>
+          </a:stretch>
+        </p:blipFill>
+        <p:spPr>
+          <a:xfrm>
+            <a:off x="411480" y="1969681"/>
+            <a:ext cx="8321040" cy="3311829"/>
+          </a:xfrm>
+          <a:prstGeom prst="rect">
+            <a:avLst/>
+          </a:prstGeom>
+        </p:spPr>
+      </p:pic>
+    </p:spTree>
+  </p:cSld>
+  <p:clrMapOvr>
+    <a:masterClrMapping/>
+  </p:clrMapOvr>
+</p:sld>
+</file>
+
+<file path=ppt/slides/slide11.xml><?xml version="1.0" encoding="utf-8"?>
+<p:sld xmlns:a="http://schemas.openxmlformats.org/drawingml/2006/main" xmlns:r="http://schemas.openxmlformats.org/officeDocument/2006/relationships" xmlns:p="http://schemas.openxmlformats.org/presentationml/2006/main">
+  <p:cSld>
+    <p:spTree>
+      <p:nvGrpSpPr>
+        <p:cNvPr id="1" name=""/>
+        <p:cNvGrpSpPr/>
+        <p:nvPr/>
+      </p:nvGrpSpPr>
+      <p:grpSpPr>
+        <a:xfrm>
+          <a:off x="0" y="0"/>
+          <a:ext cx="0" cy="0"/>
+          <a:chOff x="0" y="0"/>
+          <a:chExt cx="0" cy="0"/>
+        </a:xfrm>
+      </p:grpSpPr>
       <p:sp>
         <p:nvSpPr>
           <p:cNvPr id="2" name="TextBox 1"/>
@@ -3281,8 +3828,8 @@
 </p:sld>
 </file>
 
-<file path=ppt/slides/slide11.xml><?xml version="1.0" encoding="utf-8"?>
-<p:sld xmlns:a="http://schemas.openxmlformats.org/drawingml/2006/main" xmlns:p="http://schemas.openxmlformats.org/presentationml/2006/main" xmlns:r="http://schemas.openxmlformats.org/officeDocument/2006/relationships">
+<file path=ppt/slides/slide12.xml><?xml version="1.0" encoding="utf-8"?>
+<p:sld xmlns:a="http://schemas.openxmlformats.org/drawingml/2006/main" xmlns:r="http://schemas.openxmlformats.org/officeDocument/2006/relationships" xmlns:p="http://schemas.openxmlformats.org/presentationml/2006/main">
   <p:cSld>
     <p:spTree>
       <p:nvGrpSpPr>
@@ -3290,7 +3837,14 @@
         <p:cNvGrpSpPr/>
         <p:nvPr/>
       </p:nvGrpSpPr>
-      <p:grpSpPr/>
+      <p:grpSpPr>
+        <a:xfrm>
+          <a:off x="0" y="0"/>
+          <a:ext cx="0" cy="0"/>
+          <a:chOff x="0" y="0"/>
+          <a:chExt cx="0" cy="0"/>
+        </a:xfrm>
+      </p:grpSpPr>
       <p:sp>
         <p:nvSpPr>
           <p:cNvPr id="2" name="Title 1"/>
@@ -3327,28 +3881,159 @@
         </p:nvSpPr>
         <p:spPr/>
         <p:txBody>
-          <a:bodyPr wrap="square" bIns="73152" lIns="45720"/>
+          <a:bodyPr wrap="square" lIns="45720" bIns="73152"/>
           <a:lstStyle/>
           <a:p>
-            <a:pPr>
+            <a:pPr marL="0" indent="0">
               <a:spcAft>
                 <a:spcPts val="300"/>
               </a:spcAft>
+              <a:buNone/>
               <a:defRPr sz="1100"/>
             </a:pPr>
             <a:r>
-              <a:t>(junior level)</a:t>
-            </a:r>
-          </a:p>
-          <a:p>
-            <a:pPr>
-              <a:spcAft>
-                <a:spcPts val="300"/>
-              </a:spcAft>
-              <a:defRPr sz="1100"/>
-            </a:pPr>
-            <a:r>
-              <a:t>Nên dùng hình ảnh tự vẽ theo hệ thống của dự án và tự thuyết minh diễn giải.</a:t>
+              <a:rPr dirty="0" err="1"/>
+              <a:t>Nên</a:t>
+            </a:r>
+            <a:r>
+              <a:rPr dirty="0"/>
+              <a:t> </a:t>
+            </a:r>
+            <a:r>
+              <a:rPr dirty="0" err="1"/>
+              <a:t>dùng</a:t>
+            </a:r>
+            <a:r>
+              <a:rPr dirty="0"/>
+              <a:t> </a:t>
+            </a:r>
+            <a:r>
+              <a:rPr dirty="0" err="1"/>
+              <a:t>hình</a:t>
+            </a:r>
+            <a:r>
+              <a:rPr dirty="0"/>
+              <a:t> </a:t>
+            </a:r>
+            <a:r>
+              <a:rPr dirty="0" err="1"/>
+              <a:t>ảnh</a:t>
+            </a:r>
+            <a:r>
+              <a:rPr dirty="0"/>
+              <a:t> </a:t>
+            </a:r>
+            <a:r>
+              <a:rPr dirty="0" err="1"/>
+              <a:t>tự</a:t>
+            </a:r>
+            <a:r>
+              <a:rPr dirty="0"/>
+              <a:t> </a:t>
+            </a:r>
+            <a:r>
+              <a:rPr dirty="0" err="1"/>
+              <a:t>vẽ</a:t>
+            </a:r>
+            <a:r>
+              <a:rPr dirty="0"/>
+              <a:t> </a:t>
+            </a:r>
+            <a:r>
+              <a:rPr dirty="0" err="1"/>
+              <a:t>theo</a:t>
+            </a:r>
+            <a:r>
+              <a:rPr dirty="0"/>
+              <a:t> </a:t>
+            </a:r>
+            <a:r>
+              <a:rPr dirty="0" err="1"/>
+              <a:t>hệ</a:t>
+            </a:r>
+            <a:r>
+              <a:rPr dirty="0"/>
+              <a:t> </a:t>
+            </a:r>
+            <a:r>
+              <a:rPr dirty="0" err="1"/>
+              <a:t>thống</a:t>
+            </a:r>
+            <a:r>
+              <a:rPr dirty="0"/>
+              <a:t> </a:t>
+            </a:r>
+            <a:r>
+              <a:rPr dirty="0" err="1"/>
+              <a:t>của</a:t>
+            </a:r>
+            <a:r>
+              <a:rPr dirty="0"/>
+              <a:t> </a:t>
+            </a:r>
+            <a:r>
+              <a:rPr dirty="0" err="1"/>
+              <a:t>dự</a:t>
+            </a:r>
+            <a:r>
+              <a:rPr dirty="0"/>
+              <a:t> </a:t>
+            </a:r>
+            <a:r>
+              <a:rPr dirty="0" err="1"/>
+              <a:t>án</a:t>
+            </a:r>
+            <a:r>
+              <a:rPr dirty="0"/>
+              <a:t> </a:t>
+            </a:r>
+            <a:r>
+              <a:rPr dirty="0" err="1"/>
+              <a:t>và</a:t>
+            </a:r>
+            <a:r>
+              <a:rPr dirty="0"/>
+              <a:t> </a:t>
+            </a:r>
+            <a:r>
+              <a:rPr dirty="0" err="1"/>
+              <a:t>tự</a:t>
+            </a:r>
+            <a:r>
+              <a:rPr dirty="0"/>
+              <a:t> </a:t>
+            </a:r>
+            <a:r>
+              <a:rPr dirty="0" err="1"/>
+              <a:t>thuyết</a:t>
+            </a:r>
+            <a:r>
+              <a:rPr dirty="0"/>
+              <a:t> </a:t>
+            </a:r>
+            <a:r>
+              <a:rPr dirty="0" err="1"/>
+              <a:t>minh</a:t>
+            </a:r>
+            <a:r>
+              <a:rPr dirty="0"/>
+              <a:t> </a:t>
+            </a:r>
+            <a:r>
+              <a:rPr dirty="0" err="1"/>
+              <a:t>diễn</a:t>
+            </a:r>
+            <a:r>
+              <a:rPr dirty="0"/>
+              <a:t> </a:t>
+            </a:r>
+            <a:r>
+              <a:rPr dirty="0" err="1"/>
+              <a:t>giải</a:t>
+            </a:r>
+            <a:r>
+              <a:rPr dirty="0"/>
+              <a:t>.</a:t>
             </a:r>
           </a:p>
         </p:txBody>
@@ -3361,8 +4046,8 @@
 </p:sld>
 </file>
 
-<file path=ppt/slides/slide12.xml><?xml version="1.0" encoding="utf-8"?>
-<p:sld xmlns:a="http://schemas.openxmlformats.org/drawingml/2006/main" xmlns:p="http://schemas.openxmlformats.org/presentationml/2006/main" xmlns:r="http://schemas.openxmlformats.org/officeDocument/2006/relationships">
+<file path=ppt/slides/slide13.xml><?xml version="1.0" encoding="utf-8"?>
+<p:sld xmlns:a="http://schemas.openxmlformats.org/drawingml/2006/main" xmlns:r="http://schemas.openxmlformats.org/officeDocument/2006/relationships" xmlns:p="http://schemas.openxmlformats.org/presentationml/2006/main">
   <p:cSld>
     <p:spTree>
       <p:nvGrpSpPr>
@@ -3370,7 +4055,14 @@
         <p:cNvGrpSpPr/>
         <p:nvPr/>
       </p:nvGrpSpPr>
-      <p:grpSpPr/>
+      <p:grpSpPr>
+        <a:xfrm>
+          <a:off x="0" y="0"/>
+          <a:ext cx="0" cy="0"/>
+          <a:chOff x="0" y="0"/>
+          <a:chExt cx="0" cy="0"/>
+        </a:xfrm>
+      </p:grpSpPr>
       <p:sp>
         <p:nvSpPr>
           <p:cNvPr id="2" name="TextBox 1"/>
@@ -3434,8 +4126,8 @@
 </p:sld>
 </file>
 
-<file path=ppt/slides/slide13.xml><?xml version="1.0" encoding="utf-8"?>
-<p:sld xmlns:a="http://schemas.openxmlformats.org/drawingml/2006/main" xmlns:p="http://schemas.openxmlformats.org/presentationml/2006/main" xmlns:r="http://schemas.openxmlformats.org/officeDocument/2006/relationships">
+<file path=ppt/slides/slide14.xml><?xml version="1.0" encoding="utf-8"?>
+<p:sld xmlns:a="http://schemas.openxmlformats.org/drawingml/2006/main" xmlns:r="http://schemas.openxmlformats.org/officeDocument/2006/relationships" xmlns:p="http://schemas.openxmlformats.org/presentationml/2006/main">
   <p:cSld>
     <p:spTree>
       <p:nvGrpSpPr>
@@ -3443,7 +4135,14 @@
         <p:cNvGrpSpPr/>
         <p:nvPr/>
       </p:nvGrpSpPr>
-      <p:grpSpPr/>
+      <p:grpSpPr>
+        <a:xfrm>
+          <a:off x="0" y="0"/>
+          <a:ext cx="0" cy="0"/>
+          <a:chOff x="0" y="0"/>
+          <a:chExt cx="0" cy="0"/>
+        </a:xfrm>
+      </p:grpSpPr>
       <p:sp>
         <p:nvSpPr>
           <p:cNvPr id="2" name="TextBox 1"/>
@@ -3507,8 +4206,8 @@
 </p:sld>
 </file>
 
-<file path=ppt/slides/slide14.xml><?xml version="1.0" encoding="utf-8"?>
-<p:sld xmlns:a="http://schemas.openxmlformats.org/drawingml/2006/main" xmlns:p="http://schemas.openxmlformats.org/presentationml/2006/main" xmlns:r="http://schemas.openxmlformats.org/officeDocument/2006/relationships">
+<file path=ppt/slides/slide15.xml><?xml version="1.0" encoding="utf-8"?>
+<p:sld xmlns:a="http://schemas.openxmlformats.org/drawingml/2006/main" xmlns:r="http://schemas.openxmlformats.org/officeDocument/2006/relationships" xmlns:p="http://schemas.openxmlformats.org/presentationml/2006/main">
   <p:cSld>
     <p:spTree>
       <p:nvGrpSpPr>
@@ -3516,7 +4215,14 @@
         <p:cNvGrpSpPr/>
         <p:nvPr/>
       </p:nvGrpSpPr>
-      <p:grpSpPr/>
+      <p:grpSpPr>
+        <a:xfrm>
+          <a:off x="0" y="0"/>
+          <a:ext cx="0" cy="0"/>
+          <a:chOff x="0" y="0"/>
+          <a:chExt cx="0" cy="0"/>
+        </a:xfrm>
+      </p:grpSpPr>
       <p:sp>
         <p:nvSpPr>
           <p:cNvPr id="2" name="Title 1"/>
@@ -3553,28 +4259,159 @@
         </p:nvSpPr>
         <p:spPr/>
         <p:txBody>
-          <a:bodyPr wrap="square" bIns="73152" lIns="45720"/>
+          <a:bodyPr wrap="square" lIns="45720" bIns="73152"/>
           <a:lstStyle/>
           <a:p>
-            <a:pPr>
+            <a:pPr marL="0" indent="0">
               <a:spcAft>
                 <a:spcPts val="300"/>
               </a:spcAft>
+              <a:buNone/>
               <a:defRPr sz="1100"/>
             </a:pPr>
             <a:r>
-              <a:t>(middle level)</a:t>
-            </a:r>
-          </a:p>
-          <a:p>
-            <a:pPr>
-              <a:spcAft>
-                <a:spcPts val="300"/>
-              </a:spcAft>
-              <a:defRPr sz="1100"/>
-            </a:pPr>
-            <a:r>
-              <a:t>Nên dùng hình ảnh tự vẽ theo hệ thống của dự án và tự thuyết minh diễn giải.</a:t>
+              <a:rPr dirty="0" err="1"/>
+              <a:t>Nên</a:t>
+            </a:r>
+            <a:r>
+              <a:rPr dirty="0"/>
+              <a:t> </a:t>
+            </a:r>
+            <a:r>
+              <a:rPr dirty="0" err="1"/>
+              <a:t>dùng</a:t>
+            </a:r>
+            <a:r>
+              <a:rPr dirty="0"/>
+              <a:t> </a:t>
+            </a:r>
+            <a:r>
+              <a:rPr dirty="0" err="1"/>
+              <a:t>hình</a:t>
+            </a:r>
+            <a:r>
+              <a:rPr dirty="0"/>
+              <a:t> </a:t>
+            </a:r>
+            <a:r>
+              <a:rPr dirty="0" err="1"/>
+              <a:t>ảnh</a:t>
+            </a:r>
+            <a:r>
+              <a:rPr dirty="0"/>
+              <a:t> </a:t>
+            </a:r>
+            <a:r>
+              <a:rPr dirty="0" err="1"/>
+              <a:t>tự</a:t>
+            </a:r>
+            <a:r>
+              <a:rPr dirty="0"/>
+              <a:t> </a:t>
+            </a:r>
+            <a:r>
+              <a:rPr dirty="0" err="1"/>
+              <a:t>vẽ</a:t>
+            </a:r>
+            <a:r>
+              <a:rPr dirty="0"/>
+              <a:t> </a:t>
+            </a:r>
+            <a:r>
+              <a:rPr dirty="0" err="1"/>
+              <a:t>theo</a:t>
+            </a:r>
+            <a:r>
+              <a:rPr dirty="0"/>
+              <a:t> </a:t>
+            </a:r>
+            <a:r>
+              <a:rPr dirty="0" err="1"/>
+              <a:t>hệ</a:t>
+            </a:r>
+            <a:r>
+              <a:rPr dirty="0"/>
+              <a:t> </a:t>
+            </a:r>
+            <a:r>
+              <a:rPr dirty="0" err="1"/>
+              <a:t>thống</a:t>
+            </a:r>
+            <a:r>
+              <a:rPr dirty="0"/>
+              <a:t> </a:t>
+            </a:r>
+            <a:r>
+              <a:rPr dirty="0" err="1"/>
+              <a:t>của</a:t>
+            </a:r>
+            <a:r>
+              <a:rPr dirty="0"/>
+              <a:t> </a:t>
+            </a:r>
+            <a:r>
+              <a:rPr dirty="0" err="1"/>
+              <a:t>dự</a:t>
+            </a:r>
+            <a:r>
+              <a:rPr dirty="0"/>
+              <a:t> </a:t>
+            </a:r>
+            <a:r>
+              <a:rPr dirty="0" err="1"/>
+              <a:t>án</a:t>
+            </a:r>
+            <a:r>
+              <a:rPr dirty="0"/>
+              <a:t> </a:t>
+            </a:r>
+            <a:r>
+              <a:rPr dirty="0" err="1"/>
+              <a:t>và</a:t>
+            </a:r>
+            <a:r>
+              <a:rPr dirty="0"/>
+              <a:t> </a:t>
+            </a:r>
+            <a:r>
+              <a:rPr dirty="0" err="1"/>
+              <a:t>tự</a:t>
+            </a:r>
+            <a:r>
+              <a:rPr dirty="0"/>
+              <a:t> </a:t>
+            </a:r>
+            <a:r>
+              <a:rPr dirty="0" err="1"/>
+              <a:t>thuyết</a:t>
+            </a:r>
+            <a:r>
+              <a:rPr dirty="0"/>
+              <a:t> </a:t>
+            </a:r>
+            <a:r>
+              <a:rPr dirty="0" err="1"/>
+              <a:t>minh</a:t>
+            </a:r>
+            <a:r>
+              <a:rPr dirty="0"/>
+              <a:t> </a:t>
+            </a:r>
+            <a:r>
+              <a:rPr dirty="0" err="1"/>
+              <a:t>diễn</a:t>
+            </a:r>
+            <a:r>
+              <a:rPr dirty="0"/>
+              <a:t> </a:t>
+            </a:r>
+            <a:r>
+              <a:rPr dirty="0" err="1"/>
+              <a:t>giải</a:t>
+            </a:r>
+            <a:r>
+              <a:rPr dirty="0"/>
+              <a:t>.</a:t>
             </a:r>
           </a:p>
         </p:txBody>
@@ -3587,8 +4424,8 @@
 </p:sld>
 </file>
 
-<file path=ppt/slides/slide15.xml><?xml version="1.0" encoding="utf-8"?>
-<p:sld xmlns:a="http://schemas.openxmlformats.org/drawingml/2006/main" xmlns:p="http://schemas.openxmlformats.org/presentationml/2006/main" xmlns:r="http://schemas.openxmlformats.org/officeDocument/2006/relationships">
+<file path=ppt/slides/slide16.xml><?xml version="1.0" encoding="utf-8"?>
+<p:sld xmlns:a="http://schemas.openxmlformats.org/drawingml/2006/main" xmlns:r="http://schemas.openxmlformats.org/officeDocument/2006/relationships" xmlns:p="http://schemas.openxmlformats.org/presentationml/2006/main">
   <p:cSld>
     <p:spTree>
       <p:nvGrpSpPr>
@@ -3596,7 +4433,14 @@
         <p:cNvGrpSpPr/>
         <p:nvPr/>
       </p:nvGrpSpPr>
-      <p:grpSpPr/>
+      <p:grpSpPr>
+        <a:xfrm>
+          <a:off x="0" y="0"/>
+          <a:ext cx="0" cy="0"/>
+          <a:chOff x="0" y="0"/>
+          <a:chExt cx="0" cy="0"/>
+        </a:xfrm>
+      </p:grpSpPr>
       <p:sp>
         <p:nvSpPr>
           <p:cNvPr id="2" name="TextBox 1"/>
@@ -3660,8 +4504,8 @@
 </p:sld>
 </file>
 
-<file path=ppt/slides/slide16.xml><?xml version="1.0" encoding="utf-8"?>
-<p:sld xmlns:a="http://schemas.openxmlformats.org/drawingml/2006/main" xmlns:p="http://schemas.openxmlformats.org/presentationml/2006/main" xmlns:r="http://schemas.openxmlformats.org/officeDocument/2006/relationships">
+<file path=ppt/slides/slide17.xml><?xml version="1.0" encoding="utf-8"?>
+<p:sld xmlns:a="http://schemas.openxmlformats.org/drawingml/2006/main" xmlns:r="http://schemas.openxmlformats.org/officeDocument/2006/relationships" xmlns:p="http://schemas.openxmlformats.org/presentationml/2006/main">
   <p:cSld>
     <p:spTree>
       <p:nvGrpSpPr>
@@ -3669,7 +4513,14 @@
         <p:cNvGrpSpPr/>
         <p:nvPr/>
       </p:nvGrpSpPr>
-      <p:grpSpPr/>
+      <p:grpSpPr>
+        <a:xfrm>
+          <a:off x="0" y="0"/>
+          <a:ext cx="0" cy="0"/>
+          <a:chOff x="0" y="0"/>
+          <a:chExt cx="0" cy="0"/>
+        </a:xfrm>
+      </p:grpSpPr>
       <p:sp>
         <p:nvSpPr>
           <p:cNvPr id="2" name="TextBox 1"/>
@@ -3733,8 +4584,8 @@
 </p:sld>
 </file>
 
-<file path=ppt/slides/slide17.xml><?xml version="1.0" encoding="utf-8"?>
-<p:sld xmlns:a="http://schemas.openxmlformats.org/drawingml/2006/main" xmlns:p="http://schemas.openxmlformats.org/presentationml/2006/main" xmlns:r="http://schemas.openxmlformats.org/officeDocument/2006/relationships">
+<file path=ppt/slides/slide18.xml><?xml version="1.0" encoding="utf-8"?>
+<p:sld xmlns:a="http://schemas.openxmlformats.org/drawingml/2006/main" xmlns:r="http://schemas.openxmlformats.org/officeDocument/2006/relationships" xmlns:p="http://schemas.openxmlformats.org/presentationml/2006/main">
   <p:cSld>
     <p:spTree>
       <p:nvGrpSpPr>
@@ -3742,7 +4593,14 @@
         <p:cNvGrpSpPr/>
         <p:nvPr/>
       </p:nvGrpSpPr>
-      <p:grpSpPr/>
+      <p:grpSpPr>
+        <a:xfrm>
+          <a:off x="0" y="0"/>
+          <a:ext cx="0" cy="0"/>
+          <a:chOff x="0" y="0"/>
+          <a:chExt cx="0" cy="0"/>
+        </a:xfrm>
+      </p:grpSpPr>
       <p:sp>
         <p:nvSpPr>
           <p:cNvPr id="2" name="TextBox 1"/>
@@ -3806,8 +4664,8 @@
 </p:sld>
 </file>
 
-<file path=ppt/slides/slide18.xml><?xml version="1.0" encoding="utf-8"?>
-<p:sld xmlns:a="http://schemas.openxmlformats.org/drawingml/2006/main" xmlns:p="http://schemas.openxmlformats.org/presentationml/2006/main" xmlns:r="http://schemas.openxmlformats.org/officeDocument/2006/relationships">
+<file path=ppt/slides/slide19.xml><?xml version="1.0" encoding="utf-8"?>
+<p:sld xmlns:a="http://schemas.openxmlformats.org/drawingml/2006/main" xmlns:r="http://schemas.openxmlformats.org/officeDocument/2006/relationships" xmlns:p="http://schemas.openxmlformats.org/presentationml/2006/main">
   <p:cSld>
     <p:spTree>
       <p:nvGrpSpPr>
@@ -3815,7 +4673,14 @@
         <p:cNvGrpSpPr/>
         <p:nvPr/>
       </p:nvGrpSpPr>
-      <p:grpSpPr/>
+      <p:grpSpPr>
+        <a:xfrm>
+          <a:off x="0" y="0"/>
+          <a:ext cx="0" cy="0"/>
+          <a:chOff x="0" y="0"/>
+          <a:chExt cx="0" cy="0"/>
+        </a:xfrm>
+      </p:grpSpPr>
       <p:sp>
         <p:nvSpPr>
           <p:cNvPr id="2" name="Title 1"/>
@@ -3835,7 +4700,48 @@
               <a:defRPr sz="2000"/>
             </a:pPr>
             <a:r>
-              <a:t>6. (tùy chọn) Mẫu thiết kế phần mềm (Design Pattern)</a:t>
+              <a:rPr dirty="0"/>
+              <a:t>6. </a:t>
+            </a:r>
+            <a:r>
+              <a:rPr dirty="0" err="1"/>
+              <a:t>Mẫu</a:t>
+            </a:r>
+            <a:r>
+              <a:rPr dirty="0"/>
+              <a:t> </a:t>
+            </a:r>
+            <a:r>
+              <a:rPr dirty="0" err="1"/>
+              <a:t>thiết</a:t>
+            </a:r>
+            <a:r>
+              <a:rPr dirty="0"/>
+              <a:t> </a:t>
+            </a:r>
+            <a:r>
+              <a:rPr dirty="0" err="1"/>
+              <a:t>kế</a:t>
+            </a:r>
+            <a:r>
+              <a:rPr dirty="0"/>
+              <a:t> </a:t>
+            </a:r>
+            <a:r>
+              <a:rPr dirty="0" err="1"/>
+              <a:t>phần</a:t>
+            </a:r>
+            <a:r>
+              <a:rPr dirty="0"/>
+              <a:t> </a:t>
+            </a:r>
+            <a:r>
+              <a:rPr dirty="0" err="1"/>
+              <a:t>mềm</a:t>
+            </a:r>
+            <a:r>
+              <a:rPr dirty="0"/>
+              <a:t> (Design Pattern)</a:t>
             </a:r>
           </a:p>
         </p:txBody>
@@ -3852,28 +4758,159 @@
         </p:nvSpPr>
         <p:spPr/>
         <p:txBody>
-          <a:bodyPr wrap="square" bIns="73152" lIns="45720"/>
+          <a:bodyPr wrap="square" lIns="45720" bIns="73152"/>
           <a:lstStyle/>
           <a:p>
-            <a:pPr>
+            <a:pPr marL="0" indent="0">
               <a:spcAft>
                 <a:spcPts val="300"/>
               </a:spcAft>
+              <a:buNone/>
               <a:defRPr sz="1100"/>
             </a:pPr>
             <a:r>
-              <a:t>(middle level)</a:t>
-            </a:r>
-          </a:p>
-          <a:p>
-            <a:pPr>
-              <a:spcAft>
-                <a:spcPts val="300"/>
-              </a:spcAft>
-              <a:defRPr sz="1100"/>
-            </a:pPr>
-            <a:r>
-              <a:t>Nên dùng hình ảnh tự vẽ theo hệ thống của dự án và tự thuyết minh diễn giải.</a:t>
+              <a:rPr dirty="0" err="1"/>
+              <a:t>Nên</a:t>
+            </a:r>
+            <a:r>
+              <a:rPr dirty="0"/>
+              <a:t> </a:t>
+            </a:r>
+            <a:r>
+              <a:rPr dirty="0" err="1"/>
+              <a:t>dùng</a:t>
+            </a:r>
+            <a:r>
+              <a:rPr dirty="0"/>
+              <a:t> </a:t>
+            </a:r>
+            <a:r>
+              <a:rPr dirty="0" err="1"/>
+              <a:t>hình</a:t>
+            </a:r>
+            <a:r>
+              <a:rPr dirty="0"/>
+              <a:t> </a:t>
+            </a:r>
+            <a:r>
+              <a:rPr dirty="0" err="1"/>
+              <a:t>ảnh</a:t>
+            </a:r>
+            <a:r>
+              <a:rPr dirty="0"/>
+              <a:t> </a:t>
+            </a:r>
+            <a:r>
+              <a:rPr dirty="0" err="1"/>
+              <a:t>tự</a:t>
+            </a:r>
+            <a:r>
+              <a:rPr dirty="0"/>
+              <a:t> </a:t>
+            </a:r>
+            <a:r>
+              <a:rPr dirty="0" err="1"/>
+              <a:t>vẽ</a:t>
+            </a:r>
+            <a:r>
+              <a:rPr dirty="0"/>
+              <a:t> </a:t>
+            </a:r>
+            <a:r>
+              <a:rPr dirty="0" err="1"/>
+              <a:t>theo</a:t>
+            </a:r>
+            <a:r>
+              <a:rPr dirty="0"/>
+              <a:t> </a:t>
+            </a:r>
+            <a:r>
+              <a:rPr dirty="0" err="1"/>
+              <a:t>hệ</a:t>
+            </a:r>
+            <a:r>
+              <a:rPr dirty="0"/>
+              <a:t> </a:t>
+            </a:r>
+            <a:r>
+              <a:rPr dirty="0" err="1"/>
+              <a:t>thống</a:t>
+            </a:r>
+            <a:r>
+              <a:rPr dirty="0"/>
+              <a:t> </a:t>
+            </a:r>
+            <a:r>
+              <a:rPr dirty="0" err="1"/>
+              <a:t>của</a:t>
+            </a:r>
+            <a:r>
+              <a:rPr dirty="0"/>
+              <a:t> </a:t>
+            </a:r>
+            <a:r>
+              <a:rPr dirty="0" err="1"/>
+              <a:t>dự</a:t>
+            </a:r>
+            <a:r>
+              <a:rPr dirty="0"/>
+              <a:t> </a:t>
+            </a:r>
+            <a:r>
+              <a:rPr dirty="0" err="1"/>
+              <a:t>án</a:t>
+            </a:r>
+            <a:r>
+              <a:rPr dirty="0"/>
+              <a:t> </a:t>
+            </a:r>
+            <a:r>
+              <a:rPr dirty="0" err="1"/>
+              <a:t>và</a:t>
+            </a:r>
+            <a:r>
+              <a:rPr dirty="0"/>
+              <a:t> </a:t>
+            </a:r>
+            <a:r>
+              <a:rPr dirty="0" err="1"/>
+              <a:t>tự</a:t>
+            </a:r>
+            <a:r>
+              <a:rPr dirty="0"/>
+              <a:t> </a:t>
+            </a:r>
+            <a:r>
+              <a:rPr dirty="0" err="1"/>
+              <a:t>thuyết</a:t>
+            </a:r>
+            <a:r>
+              <a:rPr dirty="0"/>
+              <a:t> </a:t>
+            </a:r>
+            <a:r>
+              <a:rPr dirty="0" err="1"/>
+              <a:t>minh</a:t>
+            </a:r>
+            <a:r>
+              <a:rPr dirty="0"/>
+              <a:t> </a:t>
+            </a:r>
+            <a:r>
+              <a:rPr dirty="0" err="1"/>
+              <a:t>diễn</a:t>
+            </a:r>
+            <a:r>
+              <a:rPr dirty="0"/>
+              <a:t> </a:t>
+            </a:r>
+            <a:r>
+              <a:rPr dirty="0" err="1"/>
+              <a:t>giải</a:t>
+            </a:r>
+            <a:r>
+              <a:rPr dirty="0"/>
+              <a:t>.</a:t>
             </a:r>
           </a:p>
         </p:txBody>
@@ -3886,8 +4923,8 @@
 </p:sld>
 </file>
 
-<file path=ppt/slides/slide19.xml><?xml version="1.0" encoding="utf-8"?>
-<p:sld xmlns:a="http://schemas.openxmlformats.org/drawingml/2006/main" xmlns:p="http://schemas.openxmlformats.org/presentationml/2006/main" xmlns:r="http://schemas.openxmlformats.org/officeDocument/2006/relationships">
+<file path=ppt/slides/slide2.xml><?xml version="1.0" encoding="utf-8"?>
+<p:sld xmlns:a="http://schemas.openxmlformats.org/drawingml/2006/main" xmlns:r="http://schemas.openxmlformats.org/officeDocument/2006/relationships" xmlns:p="http://schemas.openxmlformats.org/presentationml/2006/main">
   <p:cSld>
     <p:spTree>
       <p:nvGrpSpPr>
@@ -3895,7 +4932,1594 @@
         <p:cNvGrpSpPr/>
         <p:nvPr/>
       </p:nvGrpSpPr>
-      <p:grpSpPr/>
+      <p:grpSpPr>
+        <a:xfrm>
+          <a:off x="0" y="0"/>
+          <a:ext cx="0" cy="0"/>
+          <a:chOff x="0" y="0"/>
+          <a:chExt cx="0" cy="0"/>
+        </a:xfrm>
+      </p:grpSpPr>
+      <p:sp>
+        <p:nvSpPr>
+          <p:cNvPr id="2" name="Title 1"/>
+          <p:cNvSpPr>
+            <a:spLocks noGrp="1"/>
+          </p:cNvSpPr>
+          <p:nvPr>
+            <p:ph type="title"/>
+          </p:nvPr>
+        </p:nvSpPr>
+        <p:spPr/>
+        <p:txBody>
+          <a:bodyPr wrap="square"/>
+          <a:lstStyle/>
+          <a:p>
+            <a:pPr>
+              <a:defRPr sz="2000"/>
+            </a:pPr>
+            <a:r>
+              <a:t>Danh sách nội dung</a:t>
+            </a:r>
+          </a:p>
+        </p:txBody>
+      </p:sp>
+      <p:sp>
+        <p:nvSpPr>
+          <p:cNvPr id="3" name="Content Placeholder 2"/>
+          <p:cNvSpPr>
+            <a:spLocks noGrp="1"/>
+          </p:cNvSpPr>
+          <p:nvPr>
+            <p:ph idx="1"/>
+          </p:nvPr>
+        </p:nvSpPr>
+        <p:spPr/>
+        <p:txBody>
+          <a:bodyPr wrap="square" lIns="45720" bIns="73152"/>
+          <a:lstStyle/>
+          <a:p>
+            <a:pPr marL="0" indent="0">
+              <a:spcAft>
+                <a:spcPts val="300"/>
+              </a:spcAft>
+              <a:buNone/>
+              <a:defRPr sz="1100"/>
+            </a:pPr>
+            <a:r>
+              <a:rPr dirty="0">
+                <a:latin typeface="Tahoma" panose="020B0604030504040204" pitchFamily="34" charset="0"/>
+                <a:ea typeface="Tahoma" panose="020B0604030504040204" pitchFamily="34" charset="0"/>
+                <a:cs typeface="Tahoma" panose="020B0604030504040204" pitchFamily="34" charset="0"/>
+              </a:rPr>
+              <a:t>1. </a:t>
+            </a:r>
+            <a:r>
+              <a:rPr dirty="0" err="1">
+                <a:latin typeface="Tahoma" panose="020B0604030504040204" pitchFamily="34" charset="0"/>
+                <a:ea typeface="Tahoma" panose="020B0604030504040204" pitchFamily="34" charset="0"/>
+                <a:cs typeface="Tahoma" panose="020B0604030504040204" pitchFamily="34" charset="0"/>
+              </a:rPr>
+              <a:t>Đặt</a:t>
+            </a:r>
+            <a:r>
+              <a:rPr dirty="0">
+                <a:latin typeface="Tahoma" panose="020B0604030504040204" pitchFamily="34" charset="0"/>
+                <a:ea typeface="Tahoma" panose="020B0604030504040204" pitchFamily="34" charset="0"/>
+                <a:cs typeface="Tahoma" panose="020B0604030504040204" pitchFamily="34" charset="0"/>
+              </a:rPr>
+              <a:t> </a:t>
+            </a:r>
+            <a:r>
+              <a:rPr dirty="0" err="1">
+                <a:latin typeface="Tahoma" panose="020B0604030504040204" pitchFamily="34" charset="0"/>
+                <a:ea typeface="Tahoma" panose="020B0604030504040204" pitchFamily="34" charset="0"/>
+                <a:cs typeface="Tahoma" panose="020B0604030504040204" pitchFamily="34" charset="0"/>
+              </a:rPr>
+              <a:t>vấn</a:t>
+            </a:r>
+            <a:r>
+              <a:rPr dirty="0">
+                <a:latin typeface="Tahoma" panose="020B0604030504040204" pitchFamily="34" charset="0"/>
+                <a:ea typeface="Tahoma" panose="020B0604030504040204" pitchFamily="34" charset="0"/>
+                <a:cs typeface="Tahoma" panose="020B0604030504040204" pitchFamily="34" charset="0"/>
+              </a:rPr>
+              <a:t> </a:t>
+            </a:r>
+            <a:r>
+              <a:rPr dirty="0" err="1">
+                <a:latin typeface="Tahoma" panose="020B0604030504040204" pitchFamily="34" charset="0"/>
+                <a:ea typeface="Tahoma" panose="020B0604030504040204" pitchFamily="34" charset="0"/>
+                <a:cs typeface="Tahoma" panose="020B0604030504040204" pitchFamily="34" charset="0"/>
+              </a:rPr>
+              <a:t>đề</a:t>
+            </a:r>
+            <a:r>
+              <a:rPr dirty="0">
+                <a:latin typeface="Tahoma" panose="020B0604030504040204" pitchFamily="34" charset="0"/>
+                <a:ea typeface="Tahoma" panose="020B0604030504040204" pitchFamily="34" charset="0"/>
+                <a:cs typeface="Tahoma" panose="020B0604030504040204" pitchFamily="34" charset="0"/>
+              </a:rPr>
+              <a:t> (Problem and scope)</a:t>
+            </a:r>
+          </a:p>
+          <a:p>
+            <a:pPr marL="0" indent="0">
+              <a:spcAft>
+                <a:spcPts val="300"/>
+              </a:spcAft>
+              <a:buNone/>
+              <a:defRPr sz="1100"/>
+            </a:pPr>
+            <a:r>
+              <a:rPr dirty="0">
+                <a:latin typeface="Tahoma" panose="020B0604030504040204" pitchFamily="34" charset="0"/>
+                <a:ea typeface="Tahoma" panose="020B0604030504040204" pitchFamily="34" charset="0"/>
+                <a:cs typeface="Tahoma" panose="020B0604030504040204" pitchFamily="34" charset="0"/>
+              </a:rPr>
+              <a:t>2. Thu </a:t>
+            </a:r>
+            <a:r>
+              <a:rPr dirty="0" err="1">
+                <a:latin typeface="Tahoma" panose="020B0604030504040204" pitchFamily="34" charset="0"/>
+                <a:ea typeface="Tahoma" panose="020B0604030504040204" pitchFamily="34" charset="0"/>
+                <a:cs typeface="Tahoma" panose="020B0604030504040204" pitchFamily="34" charset="0"/>
+              </a:rPr>
+              <a:t>thập</a:t>
+            </a:r>
+            <a:r>
+              <a:rPr dirty="0">
+                <a:latin typeface="Tahoma" panose="020B0604030504040204" pitchFamily="34" charset="0"/>
+                <a:ea typeface="Tahoma" panose="020B0604030504040204" pitchFamily="34" charset="0"/>
+                <a:cs typeface="Tahoma" panose="020B0604030504040204" pitchFamily="34" charset="0"/>
+              </a:rPr>
+              <a:t> </a:t>
+            </a:r>
+            <a:r>
+              <a:rPr dirty="0" err="1">
+                <a:latin typeface="Tahoma" panose="020B0604030504040204" pitchFamily="34" charset="0"/>
+                <a:ea typeface="Tahoma" panose="020B0604030504040204" pitchFamily="34" charset="0"/>
+                <a:cs typeface="Tahoma" panose="020B0604030504040204" pitchFamily="34" charset="0"/>
+              </a:rPr>
+              <a:t>yêu</a:t>
+            </a:r>
+            <a:r>
+              <a:rPr dirty="0">
+                <a:latin typeface="Tahoma" panose="020B0604030504040204" pitchFamily="34" charset="0"/>
+                <a:ea typeface="Tahoma" panose="020B0604030504040204" pitchFamily="34" charset="0"/>
+                <a:cs typeface="Tahoma" panose="020B0604030504040204" pitchFamily="34" charset="0"/>
+              </a:rPr>
+              <a:t> </a:t>
+            </a:r>
+            <a:r>
+              <a:rPr dirty="0" err="1">
+                <a:latin typeface="Tahoma" panose="020B0604030504040204" pitchFamily="34" charset="0"/>
+                <a:ea typeface="Tahoma" panose="020B0604030504040204" pitchFamily="34" charset="0"/>
+                <a:cs typeface="Tahoma" panose="020B0604030504040204" pitchFamily="34" charset="0"/>
+              </a:rPr>
+              <a:t>cầu</a:t>
+            </a:r>
+            <a:r>
+              <a:rPr dirty="0">
+                <a:latin typeface="Tahoma" panose="020B0604030504040204" pitchFamily="34" charset="0"/>
+                <a:ea typeface="Tahoma" panose="020B0604030504040204" pitchFamily="34" charset="0"/>
+                <a:cs typeface="Tahoma" panose="020B0604030504040204" pitchFamily="34" charset="0"/>
+              </a:rPr>
+              <a:t> </a:t>
+            </a:r>
+            <a:r>
+              <a:rPr dirty="0" err="1">
+                <a:latin typeface="Tahoma" panose="020B0604030504040204" pitchFamily="34" charset="0"/>
+                <a:ea typeface="Tahoma" panose="020B0604030504040204" pitchFamily="34" charset="0"/>
+                <a:cs typeface="Tahoma" panose="020B0604030504040204" pitchFamily="34" charset="0"/>
+              </a:rPr>
+              <a:t>và</a:t>
+            </a:r>
+            <a:r>
+              <a:rPr dirty="0">
+                <a:latin typeface="Tahoma" panose="020B0604030504040204" pitchFamily="34" charset="0"/>
+                <a:ea typeface="Tahoma" panose="020B0604030504040204" pitchFamily="34" charset="0"/>
+                <a:cs typeface="Tahoma" panose="020B0604030504040204" pitchFamily="34" charset="0"/>
+              </a:rPr>
+              <a:t> </a:t>
+            </a:r>
+            <a:r>
+              <a:rPr dirty="0" err="1">
+                <a:latin typeface="Tahoma" panose="020B0604030504040204" pitchFamily="34" charset="0"/>
+                <a:ea typeface="Tahoma" panose="020B0604030504040204" pitchFamily="34" charset="0"/>
+                <a:cs typeface="Tahoma" panose="020B0604030504040204" pitchFamily="34" charset="0"/>
+              </a:rPr>
+              <a:t>khảo</a:t>
+            </a:r>
+            <a:r>
+              <a:rPr dirty="0">
+                <a:latin typeface="Tahoma" panose="020B0604030504040204" pitchFamily="34" charset="0"/>
+                <a:ea typeface="Tahoma" panose="020B0604030504040204" pitchFamily="34" charset="0"/>
+                <a:cs typeface="Tahoma" panose="020B0604030504040204" pitchFamily="34" charset="0"/>
+              </a:rPr>
+              <a:t> </a:t>
+            </a:r>
+            <a:r>
+              <a:rPr dirty="0" err="1">
+                <a:latin typeface="Tahoma" panose="020B0604030504040204" pitchFamily="34" charset="0"/>
+                <a:ea typeface="Tahoma" panose="020B0604030504040204" pitchFamily="34" charset="0"/>
+                <a:cs typeface="Tahoma" panose="020B0604030504040204" pitchFamily="34" charset="0"/>
+              </a:rPr>
+              <a:t>sát</a:t>
+            </a:r>
+            <a:r>
+              <a:rPr dirty="0">
+                <a:latin typeface="Tahoma" panose="020B0604030504040204" pitchFamily="34" charset="0"/>
+                <a:ea typeface="Tahoma" panose="020B0604030504040204" pitchFamily="34" charset="0"/>
+                <a:cs typeface="Tahoma" panose="020B0604030504040204" pitchFamily="34" charset="0"/>
+              </a:rPr>
+              <a:t> </a:t>
+            </a:r>
+            <a:r>
+              <a:rPr dirty="0" err="1">
+                <a:latin typeface="Tahoma" panose="020B0604030504040204" pitchFamily="34" charset="0"/>
+                <a:ea typeface="Tahoma" panose="020B0604030504040204" pitchFamily="34" charset="0"/>
+                <a:cs typeface="Tahoma" panose="020B0604030504040204" pitchFamily="34" charset="0"/>
+              </a:rPr>
+              <a:t>nghiệp</a:t>
+            </a:r>
+            <a:r>
+              <a:rPr dirty="0">
+                <a:latin typeface="Tahoma" panose="020B0604030504040204" pitchFamily="34" charset="0"/>
+                <a:ea typeface="Tahoma" panose="020B0604030504040204" pitchFamily="34" charset="0"/>
+                <a:cs typeface="Tahoma" panose="020B0604030504040204" pitchFamily="34" charset="0"/>
+              </a:rPr>
+              <a:t> </a:t>
+            </a:r>
+            <a:r>
+              <a:rPr dirty="0" err="1">
+                <a:latin typeface="Tahoma" panose="020B0604030504040204" pitchFamily="34" charset="0"/>
+                <a:ea typeface="Tahoma" panose="020B0604030504040204" pitchFamily="34" charset="0"/>
+                <a:cs typeface="Tahoma" panose="020B0604030504040204" pitchFamily="34" charset="0"/>
+              </a:rPr>
+              <a:t>vụ</a:t>
+            </a:r>
+            <a:r>
+              <a:rPr dirty="0">
+                <a:latin typeface="Tahoma" panose="020B0604030504040204" pitchFamily="34" charset="0"/>
+                <a:ea typeface="Tahoma" panose="020B0604030504040204" pitchFamily="34" charset="0"/>
+                <a:cs typeface="Tahoma" panose="020B0604030504040204" pitchFamily="34" charset="0"/>
+              </a:rPr>
+              <a:t> (Requirement and survey)</a:t>
+            </a:r>
+          </a:p>
+          <a:p>
+            <a:pPr marL="0" indent="0">
+              <a:spcAft>
+                <a:spcPts val="300"/>
+              </a:spcAft>
+              <a:buNone/>
+              <a:defRPr sz="1100"/>
+            </a:pPr>
+            <a:r>
+              <a:rPr dirty="0">
+                <a:latin typeface="Tahoma" panose="020B0604030504040204" pitchFamily="34" charset="0"/>
+                <a:ea typeface="Tahoma" panose="020B0604030504040204" pitchFamily="34" charset="0"/>
+                <a:cs typeface="Tahoma" panose="020B0604030504040204" pitchFamily="34" charset="0"/>
+              </a:rPr>
+              <a:t>3. </a:t>
+            </a:r>
+            <a:r>
+              <a:rPr dirty="0" err="1">
+                <a:latin typeface="Tahoma" panose="020B0604030504040204" pitchFamily="34" charset="0"/>
+                <a:ea typeface="Tahoma" panose="020B0604030504040204" pitchFamily="34" charset="0"/>
+                <a:cs typeface="Tahoma" panose="020B0604030504040204" pitchFamily="34" charset="0"/>
+              </a:rPr>
+              <a:t>Phân</a:t>
+            </a:r>
+            <a:r>
+              <a:rPr dirty="0">
+                <a:latin typeface="Tahoma" panose="020B0604030504040204" pitchFamily="34" charset="0"/>
+                <a:ea typeface="Tahoma" panose="020B0604030504040204" pitchFamily="34" charset="0"/>
+                <a:cs typeface="Tahoma" panose="020B0604030504040204" pitchFamily="34" charset="0"/>
+              </a:rPr>
+              <a:t> </a:t>
+            </a:r>
+            <a:r>
+              <a:rPr dirty="0" err="1">
+                <a:latin typeface="Tahoma" panose="020B0604030504040204" pitchFamily="34" charset="0"/>
+                <a:ea typeface="Tahoma" panose="020B0604030504040204" pitchFamily="34" charset="0"/>
+                <a:cs typeface="Tahoma" panose="020B0604030504040204" pitchFamily="34" charset="0"/>
+              </a:rPr>
+              <a:t>tích</a:t>
+            </a:r>
+            <a:r>
+              <a:rPr dirty="0">
+                <a:latin typeface="Tahoma" panose="020B0604030504040204" pitchFamily="34" charset="0"/>
+                <a:ea typeface="Tahoma" panose="020B0604030504040204" pitchFamily="34" charset="0"/>
+                <a:cs typeface="Tahoma" panose="020B0604030504040204" pitchFamily="34" charset="0"/>
+              </a:rPr>
+              <a:t> </a:t>
+            </a:r>
+            <a:r>
+              <a:rPr dirty="0" err="1">
+                <a:latin typeface="Tahoma" panose="020B0604030504040204" pitchFamily="34" charset="0"/>
+                <a:ea typeface="Tahoma" panose="020B0604030504040204" pitchFamily="34" charset="0"/>
+                <a:cs typeface="Tahoma" panose="020B0604030504040204" pitchFamily="34" charset="0"/>
+              </a:rPr>
+              <a:t>và</a:t>
+            </a:r>
+            <a:r>
+              <a:rPr dirty="0">
+                <a:latin typeface="Tahoma" panose="020B0604030504040204" pitchFamily="34" charset="0"/>
+                <a:ea typeface="Tahoma" panose="020B0604030504040204" pitchFamily="34" charset="0"/>
+                <a:cs typeface="Tahoma" panose="020B0604030504040204" pitchFamily="34" charset="0"/>
+              </a:rPr>
+              <a:t> </a:t>
+            </a:r>
+            <a:r>
+              <a:rPr dirty="0" err="1">
+                <a:latin typeface="Tahoma" panose="020B0604030504040204" pitchFamily="34" charset="0"/>
+                <a:ea typeface="Tahoma" panose="020B0604030504040204" pitchFamily="34" charset="0"/>
+                <a:cs typeface="Tahoma" panose="020B0604030504040204" pitchFamily="34" charset="0"/>
+              </a:rPr>
+              <a:t>thiết</a:t>
+            </a:r>
+            <a:r>
+              <a:rPr dirty="0">
+                <a:latin typeface="Tahoma" panose="020B0604030504040204" pitchFamily="34" charset="0"/>
+                <a:ea typeface="Tahoma" panose="020B0604030504040204" pitchFamily="34" charset="0"/>
+                <a:cs typeface="Tahoma" panose="020B0604030504040204" pitchFamily="34" charset="0"/>
+              </a:rPr>
+              <a:t> </a:t>
+            </a:r>
+            <a:r>
+              <a:rPr dirty="0" err="1">
+                <a:latin typeface="Tahoma" panose="020B0604030504040204" pitchFamily="34" charset="0"/>
+                <a:ea typeface="Tahoma" panose="020B0604030504040204" pitchFamily="34" charset="0"/>
+                <a:cs typeface="Tahoma" panose="020B0604030504040204" pitchFamily="34" charset="0"/>
+              </a:rPr>
+              <a:t>kế</a:t>
+            </a:r>
+            <a:r>
+              <a:rPr dirty="0">
+                <a:latin typeface="Tahoma" panose="020B0604030504040204" pitchFamily="34" charset="0"/>
+                <a:ea typeface="Tahoma" panose="020B0604030504040204" pitchFamily="34" charset="0"/>
+                <a:cs typeface="Tahoma" panose="020B0604030504040204" pitchFamily="34" charset="0"/>
+              </a:rPr>
+              <a:t> </a:t>
+            </a:r>
+            <a:r>
+              <a:rPr dirty="0" err="1">
+                <a:latin typeface="Tahoma" panose="020B0604030504040204" pitchFamily="34" charset="0"/>
+                <a:ea typeface="Tahoma" panose="020B0604030504040204" pitchFamily="34" charset="0"/>
+                <a:cs typeface="Tahoma" panose="020B0604030504040204" pitchFamily="34" charset="0"/>
+              </a:rPr>
+              <a:t>nghiệp</a:t>
+            </a:r>
+            <a:r>
+              <a:rPr dirty="0">
+                <a:latin typeface="Tahoma" panose="020B0604030504040204" pitchFamily="34" charset="0"/>
+                <a:ea typeface="Tahoma" panose="020B0604030504040204" pitchFamily="34" charset="0"/>
+                <a:cs typeface="Tahoma" panose="020B0604030504040204" pitchFamily="34" charset="0"/>
+              </a:rPr>
+              <a:t> </a:t>
+            </a:r>
+            <a:r>
+              <a:rPr dirty="0" err="1">
+                <a:latin typeface="Tahoma" panose="020B0604030504040204" pitchFamily="34" charset="0"/>
+                <a:ea typeface="Tahoma" panose="020B0604030504040204" pitchFamily="34" charset="0"/>
+                <a:cs typeface="Tahoma" panose="020B0604030504040204" pitchFamily="34" charset="0"/>
+              </a:rPr>
+              <a:t>vụ</a:t>
+            </a:r>
+            <a:r>
+              <a:rPr dirty="0">
+                <a:latin typeface="Tahoma" panose="020B0604030504040204" pitchFamily="34" charset="0"/>
+                <a:ea typeface="Tahoma" panose="020B0604030504040204" pitchFamily="34" charset="0"/>
+                <a:cs typeface="Tahoma" panose="020B0604030504040204" pitchFamily="34" charset="0"/>
+              </a:rPr>
+              <a:t> (Domain or business model / Domain driven design)</a:t>
+            </a:r>
+          </a:p>
+          <a:p>
+            <a:pPr marL="0" indent="0">
+              <a:spcAft>
+                <a:spcPts val="300"/>
+              </a:spcAft>
+              <a:buNone/>
+              <a:defRPr sz="1100"/>
+            </a:pPr>
+            <a:r>
+              <a:rPr dirty="0">
+                <a:latin typeface="Tahoma" panose="020B0604030504040204" pitchFamily="34" charset="0"/>
+                <a:ea typeface="Tahoma" panose="020B0604030504040204" pitchFamily="34" charset="0"/>
+                <a:cs typeface="Tahoma" panose="020B0604030504040204" pitchFamily="34" charset="0"/>
+              </a:rPr>
+              <a:t>4. </a:t>
+            </a:r>
+            <a:r>
+              <a:rPr dirty="0" err="1">
+                <a:latin typeface="Tahoma" panose="020B0604030504040204" pitchFamily="34" charset="0"/>
+                <a:ea typeface="Tahoma" panose="020B0604030504040204" pitchFamily="34" charset="0"/>
+                <a:cs typeface="Tahoma" panose="020B0604030504040204" pitchFamily="34" charset="0"/>
+              </a:rPr>
+              <a:t>Phân</a:t>
+            </a:r>
+            <a:r>
+              <a:rPr dirty="0">
+                <a:latin typeface="Tahoma" panose="020B0604030504040204" pitchFamily="34" charset="0"/>
+                <a:ea typeface="Tahoma" panose="020B0604030504040204" pitchFamily="34" charset="0"/>
+                <a:cs typeface="Tahoma" panose="020B0604030504040204" pitchFamily="34" charset="0"/>
+              </a:rPr>
+              <a:t> </a:t>
+            </a:r>
+            <a:r>
+              <a:rPr dirty="0" err="1">
+                <a:latin typeface="Tahoma" panose="020B0604030504040204" pitchFamily="34" charset="0"/>
+                <a:ea typeface="Tahoma" panose="020B0604030504040204" pitchFamily="34" charset="0"/>
+                <a:cs typeface="Tahoma" panose="020B0604030504040204" pitchFamily="34" charset="0"/>
+              </a:rPr>
+              <a:t>tích</a:t>
+            </a:r>
+            <a:r>
+              <a:rPr dirty="0">
+                <a:latin typeface="Tahoma" panose="020B0604030504040204" pitchFamily="34" charset="0"/>
+                <a:ea typeface="Tahoma" panose="020B0604030504040204" pitchFamily="34" charset="0"/>
+                <a:cs typeface="Tahoma" panose="020B0604030504040204" pitchFamily="34" charset="0"/>
+              </a:rPr>
+              <a:t> </a:t>
+            </a:r>
+            <a:r>
+              <a:rPr dirty="0" err="1">
+                <a:latin typeface="Tahoma" panose="020B0604030504040204" pitchFamily="34" charset="0"/>
+                <a:ea typeface="Tahoma" panose="020B0604030504040204" pitchFamily="34" charset="0"/>
+                <a:cs typeface="Tahoma" panose="020B0604030504040204" pitchFamily="34" charset="0"/>
+              </a:rPr>
+              <a:t>và</a:t>
+            </a:r>
+            <a:r>
+              <a:rPr dirty="0">
+                <a:latin typeface="Tahoma" panose="020B0604030504040204" pitchFamily="34" charset="0"/>
+                <a:ea typeface="Tahoma" panose="020B0604030504040204" pitchFamily="34" charset="0"/>
+                <a:cs typeface="Tahoma" panose="020B0604030504040204" pitchFamily="34" charset="0"/>
+              </a:rPr>
+              <a:t> </a:t>
+            </a:r>
+            <a:r>
+              <a:rPr dirty="0" err="1">
+                <a:latin typeface="Tahoma" panose="020B0604030504040204" pitchFamily="34" charset="0"/>
+                <a:ea typeface="Tahoma" panose="020B0604030504040204" pitchFamily="34" charset="0"/>
+                <a:cs typeface="Tahoma" panose="020B0604030504040204" pitchFamily="34" charset="0"/>
+              </a:rPr>
+              <a:t>thiết</a:t>
+            </a:r>
+            <a:r>
+              <a:rPr dirty="0">
+                <a:latin typeface="Tahoma" panose="020B0604030504040204" pitchFamily="34" charset="0"/>
+                <a:ea typeface="Tahoma" panose="020B0604030504040204" pitchFamily="34" charset="0"/>
+                <a:cs typeface="Tahoma" panose="020B0604030504040204" pitchFamily="34" charset="0"/>
+              </a:rPr>
+              <a:t> </a:t>
+            </a:r>
+            <a:r>
+              <a:rPr dirty="0" err="1">
+                <a:latin typeface="Tahoma" panose="020B0604030504040204" pitchFamily="34" charset="0"/>
+                <a:ea typeface="Tahoma" panose="020B0604030504040204" pitchFamily="34" charset="0"/>
+                <a:cs typeface="Tahoma" panose="020B0604030504040204" pitchFamily="34" charset="0"/>
+              </a:rPr>
+              <a:t>kế</a:t>
+            </a:r>
+            <a:r>
+              <a:rPr dirty="0">
+                <a:latin typeface="Tahoma" panose="020B0604030504040204" pitchFamily="34" charset="0"/>
+                <a:ea typeface="Tahoma" panose="020B0604030504040204" pitchFamily="34" charset="0"/>
+                <a:cs typeface="Tahoma" panose="020B0604030504040204" pitchFamily="34" charset="0"/>
+              </a:rPr>
+              <a:t> </a:t>
+            </a:r>
+            <a:r>
+              <a:rPr dirty="0" err="1">
+                <a:latin typeface="Tahoma" panose="020B0604030504040204" pitchFamily="34" charset="0"/>
+                <a:ea typeface="Tahoma" panose="020B0604030504040204" pitchFamily="34" charset="0"/>
+                <a:cs typeface="Tahoma" panose="020B0604030504040204" pitchFamily="34" charset="0"/>
+              </a:rPr>
+              <a:t>chức</a:t>
+            </a:r>
+            <a:r>
+              <a:rPr dirty="0">
+                <a:latin typeface="Tahoma" panose="020B0604030504040204" pitchFamily="34" charset="0"/>
+                <a:ea typeface="Tahoma" panose="020B0604030504040204" pitchFamily="34" charset="0"/>
+                <a:cs typeface="Tahoma" panose="020B0604030504040204" pitchFamily="34" charset="0"/>
+              </a:rPr>
+              <a:t> </a:t>
+            </a:r>
+            <a:r>
+              <a:rPr dirty="0" err="1">
+                <a:latin typeface="Tahoma" panose="020B0604030504040204" pitchFamily="34" charset="0"/>
+                <a:ea typeface="Tahoma" panose="020B0604030504040204" pitchFamily="34" charset="0"/>
+                <a:cs typeface="Tahoma" panose="020B0604030504040204" pitchFamily="34" charset="0"/>
+              </a:rPr>
+              <a:t>năng</a:t>
+            </a:r>
+            <a:r>
+              <a:rPr dirty="0">
+                <a:latin typeface="Tahoma" panose="020B0604030504040204" pitchFamily="34" charset="0"/>
+                <a:ea typeface="Tahoma" panose="020B0604030504040204" pitchFamily="34" charset="0"/>
+                <a:cs typeface="Tahoma" panose="020B0604030504040204" pitchFamily="34" charset="0"/>
+              </a:rPr>
+              <a:t> </a:t>
+            </a:r>
+            <a:r>
+              <a:rPr dirty="0" err="1">
+                <a:latin typeface="Tahoma" panose="020B0604030504040204" pitchFamily="34" charset="0"/>
+                <a:ea typeface="Tahoma" panose="020B0604030504040204" pitchFamily="34" charset="0"/>
+                <a:cs typeface="Tahoma" panose="020B0604030504040204" pitchFamily="34" charset="0"/>
+              </a:rPr>
+              <a:t>của</a:t>
+            </a:r>
+            <a:r>
+              <a:rPr dirty="0">
+                <a:latin typeface="Tahoma" panose="020B0604030504040204" pitchFamily="34" charset="0"/>
+                <a:ea typeface="Tahoma" panose="020B0604030504040204" pitchFamily="34" charset="0"/>
+                <a:cs typeface="Tahoma" panose="020B0604030504040204" pitchFamily="34" charset="0"/>
+              </a:rPr>
+              <a:t> </a:t>
+            </a:r>
+            <a:r>
+              <a:rPr dirty="0" err="1">
+                <a:latin typeface="Tahoma" panose="020B0604030504040204" pitchFamily="34" charset="0"/>
+                <a:ea typeface="Tahoma" panose="020B0604030504040204" pitchFamily="34" charset="0"/>
+                <a:cs typeface="Tahoma" panose="020B0604030504040204" pitchFamily="34" charset="0"/>
+              </a:rPr>
+              <a:t>hệ</a:t>
+            </a:r>
+            <a:r>
+              <a:rPr dirty="0">
+                <a:latin typeface="Tahoma" panose="020B0604030504040204" pitchFamily="34" charset="0"/>
+                <a:ea typeface="Tahoma" panose="020B0604030504040204" pitchFamily="34" charset="0"/>
+                <a:cs typeface="Tahoma" panose="020B0604030504040204" pitchFamily="34" charset="0"/>
+              </a:rPr>
+              <a:t> </a:t>
+            </a:r>
+            <a:r>
+              <a:rPr dirty="0" err="1">
+                <a:latin typeface="Tahoma" panose="020B0604030504040204" pitchFamily="34" charset="0"/>
+                <a:ea typeface="Tahoma" panose="020B0604030504040204" pitchFamily="34" charset="0"/>
+                <a:cs typeface="Tahoma" panose="020B0604030504040204" pitchFamily="34" charset="0"/>
+              </a:rPr>
+              <a:t>thống</a:t>
+            </a:r>
+            <a:r>
+              <a:rPr dirty="0">
+                <a:latin typeface="Tahoma" panose="020B0604030504040204" pitchFamily="34" charset="0"/>
+                <a:ea typeface="Tahoma" panose="020B0604030504040204" pitchFamily="34" charset="0"/>
+                <a:cs typeface="Tahoma" panose="020B0604030504040204" pitchFamily="34" charset="0"/>
+              </a:rPr>
+              <a:t> (Use case diagram)</a:t>
+            </a:r>
+          </a:p>
+          <a:p>
+            <a:pPr marL="0" indent="0">
+              <a:spcAft>
+                <a:spcPts val="300"/>
+              </a:spcAft>
+              <a:buNone/>
+              <a:defRPr sz="1100"/>
+            </a:pPr>
+            <a:r>
+              <a:rPr dirty="0">
+                <a:latin typeface="Tahoma" panose="020B0604030504040204" pitchFamily="34" charset="0"/>
+                <a:ea typeface="Tahoma" panose="020B0604030504040204" pitchFamily="34" charset="0"/>
+                <a:cs typeface="Tahoma" panose="020B0604030504040204" pitchFamily="34" charset="0"/>
+              </a:rPr>
+              <a:t>5. </a:t>
+            </a:r>
+            <a:r>
+              <a:rPr dirty="0" err="1">
+                <a:latin typeface="Tahoma" panose="020B0604030504040204" pitchFamily="34" charset="0"/>
+                <a:ea typeface="Tahoma" panose="020B0604030504040204" pitchFamily="34" charset="0"/>
+                <a:cs typeface="Tahoma" panose="020B0604030504040204" pitchFamily="34" charset="0"/>
+              </a:rPr>
+              <a:t>Thiết</a:t>
+            </a:r>
+            <a:r>
+              <a:rPr dirty="0">
+                <a:latin typeface="Tahoma" panose="020B0604030504040204" pitchFamily="34" charset="0"/>
+                <a:ea typeface="Tahoma" panose="020B0604030504040204" pitchFamily="34" charset="0"/>
+                <a:cs typeface="Tahoma" panose="020B0604030504040204" pitchFamily="34" charset="0"/>
+              </a:rPr>
+              <a:t> </a:t>
+            </a:r>
+            <a:r>
+              <a:rPr dirty="0" err="1">
+                <a:latin typeface="Tahoma" panose="020B0604030504040204" pitchFamily="34" charset="0"/>
+                <a:ea typeface="Tahoma" panose="020B0604030504040204" pitchFamily="34" charset="0"/>
+                <a:cs typeface="Tahoma" panose="020B0604030504040204" pitchFamily="34" charset="0"/>
+              </a:rPr>
+              <a:t>kế</a:t>
+            </a:r>
+            <a:r>
+              <a:rPr dirty="0">
+                <a:latin typeface="Tahoma" panose="020B0604030504040204" pitchFamily="34" charset="0"/>
+                <a:ea typeface="Tahoma" panose="020B0604030504040204" pitchFamily="34" charset="0"/>
+                <a:cs typeface="Tahoma" panose="020B0604030504040204" pitchFamily="34" charset="0"/>
+              </a:rPr>
+              <a:t> </a:t>
+            </a:r>
+            <a:r>
+              <a:rPr dirty="0" err="1">
+                <a:latin typeface="Tahoma" panose="020B0604030504040204" pitchFamily="34" charset="0"/>
+                <a:ea typeface="Tahoma" panose="020B0604030504040204" pitchFamily="34" charset="0"/>
+                <a:cs typeface="Tahoma" panose="020B0604030504040204" pitchFamily="34" charset="0"/>
+              </a:rPr>
+              <a:t>kiến</a:t>
+            </a:r>
+            <a:r>
+              <a:rPr dirty="0">
+                <a:latin typeface="Tahoma" panose="020B0604030504040204" pitchFamily="34" charset="0"/>
+                <a:ea typeface="Tahoma" panose="020B0604030504040204" pitchFamily="34" charset="0"/>
+                <a:cs typeface="Tahoma" panose="020B0604030504040204" pitchFamily="34" charset="0"/>
+              </a:rPr>
+              <a:t> </a:t>
+            </a:r>
+            <a:r>
+              <a:rPr dirty="0" err="1">
+                <a:latin typeface="Tahoma" panose="020B0604030504040204" pitchFamily="34" charset="0"/>
+                <a:ea typeface="Tahoma" panose="020B0604030504040204" pitchFamily="34" charset="0"/>
+                <a:cs typeface="Tahoma" panose="020B0604030504040204" pitchFamily="34" charset="0"/>
+              </a:rPr>
+              <a:t>trúc</a:t>
+            </a:r>
+            <a:r>
+              <a:rPr dirty="0">
+                <a:latin typeface="Tahoma" panose="020B0604030504040204" pitchFamily="34" charset="0"/>
+                <a:ea typeface="Tahoma" panose="020B0604030504040204" pitchFamily="34" charset="0"/>
+                <a:cs typeface="Tahoma" panose="020B0604030504040204" pitchFamily="34" charset="0"/>
+              </a:rPr>
+              <a:t> </a:t>
+            </a:r>
+            <a:r>
+              <a:rPr dirty="0" err="1">
+                <a:latin typeface="Tahoma" panose="020B0604030504040204" pitchFamily="34" charset="0"/>
+                <a:ea typeface="Tahoma" panose="020B0604030504040204" pitchFamily="34" charset="0"/>
+                <a:cs typeface="Tahoma" panose="020B0604030504040204" pitchFamily="34" charset="0"/>
+              </a:rPr>
+              <a:t>hệ</a:t>
+            </a:r>
+            <a:r>
+              <a:rPr dirty="0">
+                <a:latin typeface="Tahoma" panose="020B0604030504040204" pitchFamily="34" charset="0"/>
+                <a:ea typeface="Tahoma" panose="020B0604030504040204" pitchFamily="34" charset="0"/>
+                <a:cs typeface="Tahoma" panose="020B0604030504040204" pitchFamily="34" charset="0"/>
+              </a:rPr>
+              <a:t> </a:t>
+            </a:r>
+            <a:r>
+              <a:rPr dirty="0" err="1">
+                <a:latin typeface="Tahoma" panose="020B0604030504040204" pitchFamily="34" charset="0"/>
+                <a:ea typeface="Tahoma" panose="020B0604030504040204" pitchFamily="34" charset="0"/>
+                <a:cs typeface="Tahoma" panose="020B0604030504040204" pitchFamily="34" charset="0"/>
+              </a:rPr>
+              <a:t>thống</a:t>
+            </a:r>
+            <a:r>
+              <a:rPr dirty="0">
+                <a:latin typeface="Tahoma" panose="020B0604030504040204" pitchFamily="34" charset="0"/>
+                <a:ea typeface="Tahoma" panose="020B0604030504040204" pitchFamily="34" charset="0"/>
+                <a:cs typeface="Tahoma" panose="020B0604030504040204" pitchFamily="34" charset="0"/>
+              </a:rPr>
+              <a:t> (System architecture design - SAD)</a:t>
+            </a:r>
+          </a:p>
+          <a:p>
+            <a:pPr marL="0" indent="0">
+              <a:spcAft>
+                <a:spcPts val="300"/>
+              </a:spcAft>
+              <a:buNone/>
+              <a:defRPr sz="1100"/>
+            </a:pPr>
+            <a:r>
+              <a:rPr dirty="0">
+                <a:latin typeface="Tahoma" panose="020B0604030504040204" pitchFamily="34" charset="0"/>
+                <a:ea typeface="Tahoma" panose="020B0604030504040204" pitchFamily="34" charset="0"/>
+                <a:cs typeface="Tahoma" panose="020B0604030504040204" pitchFamily="34" charset="0"/>
+              </a:rPr>
+              <a:t>6. </a:t>
+            </a:r>
+            <a:r>
+              <a:rPr dirty="0" err="1">
+                <a:latin typeface="Tahoma" panose="020B0604030504040204" pitchFamily="34" charset="0"/>
+                <a:ea typeface="Tahoma" panose="020B0604030504040204" pitchFamily="34" charset="0"/>
+                <a:cs typeface="Tahoma" panose="020B0604030504040204" pitchFamily="34" charset="0"/>
+              </a:rPr>
+              <a:t>Mẫu</a:t>
+            </a:r>
+            <a:r>
+              <a:rPr dirty="0">
+                <a:latin typeface="Tahoma" panose="020B0604030504040204" pitchFamily="34" charset="0"/>
+                <a:ea typeface="Tahoma" panose="020B0604030504040204" pitchFamily="34" charset="0"/>
+                <a:cs typeface="Tahoma" panose="020B0604030504040204" pitchFamily="34" charset="0"/>
+              </a:rPr>
+              <a:t> </a:t>
+            </a:r>
+            <a:r>
+              <a:rPr dirty="0" err="1">
+                <a:latin typeface="Tahoma" panose="020B0604030504040204" pitchFamily="34" charset="0"/>
+                <a:ea typeface="Tahoma" panose="020B0604030504040204" pitchFamily="34" charset="0"/>
+                <a:cs typeface="Tahoma" panose="020B0604030504040204" pitchFamily="34" charset="0"/>
+              </a:rPr>
+              <a:t>thiết</a:t>
+            </a:r>
+            <a:r>
+              <a:rPr dirty="0">
+                <a:latin typeface="Tahoma" panose="020B0604030504040204" pitchFamily="34" charset="0"/>
+                <a:ea typeface="Tahoma" panose="020B0604030504040204" pitchFamily="34" charset="0"/>
+                <a:cs typeface="Tahoma" panose="020B0604030504040204" pitchFamily="34" charset="0"/>
+              </a:rPr>
+              <a:t> </a:t>
+            </a:r>
+            <a:r>
+              <a:rPr dirty="0" err="1">
+                <a:latin typeface="Tahoma" panose="020B0604030504040204" pitchFamily="34" charset="0"/>
+                <a:ea typeface="Tahoma" panose="020B0604030504040204" pitchFamily="34" charset="0"/>
+                <a:cs typeface="Tahoma" panose="020B0604030504040204" pitchFamily="34" charset="0"/>
+              </a:rPr>
+              <a:t>kế</a:t>
+            </a:r>
+            <a:r>
+              <a:rPr dirty="0">
+                <a:latin typeface="Tahoma" panose="020B0604030504040204" pitchFamily="34" charset="0"/>
+                <a:ea typeface="Tahoma" panose="020B0604030504040204" pitchFamily="34" charset="0"/>
+                <a:cs typeface="Tahoma" panose="020B0604030504040204" pitchFamily="34" charset="0"/>
+              </a:rPr>
+              <a:t> </a:t>
+            </a:r>
+            <a:r>
+              <a:rPr dirty="0" err="1">
+                <a:latin typeface="Tahoma" panose="020B0604030504040204" pitchFamily="34" charset="0"/>
+                <a:ea typeface="Tahoma" panose="020B0604030504040204" pitchFamily="34" charset="0"/>
+                <a:cs typeface="Tahoma" panose="020B0604030504040204" pitchFamily="34" charset="0"/>
+              </a:rPr>
+              <a:t>phần</a:t>
+            </a:r>
+            <a:r>
+              <a:rPr dirty="0">
+                <a:latin typeface="Tahoma" panose="020B0604030504040204" pitchFamily="34" charset="0"/>
+                <a:ea typeface="Tahoma" panose="020B0604030504040204" pitchFamily="34" charset="0"/>
+                <a:cs typeface="Tahoma" panose="020B0604030504040204" pitchFamily="34" charset="0"/>
+              </a:rPr>
+              <a:t> </a:t>
+            </a:r>
+            <a:r>
+              <a:rPr dirty="0" err="1">
+                <a:latin typeface="Tahoma" panose="020B0604030504040204" pitchFamily="34" charset="0"/>
+                <a:ea typeface="Tahoma" panose="020B0604030504040204" pitchFamily="34" charset="0"/>
+                <a:cs typeface="Tahoma" panose="020B0604030504040204" pitchFamily="34" charset="0"/>
+              </a:rPr>
+              <a:t>mềm</a:t>
+            </a:r>
+            <a:r>
+              <a:rPr dirty="0">
+                <a:latin typeface="Tahoma" panose="020B0604030504040204" pitchFamily="34" charset="0"/>
+                <a:ea typeface="Tahoma" panose="020B0604030504040204" pitchFamily="34" charset="0"/>
+                <a:cs typeface="Tahoma" panose="020B0604030504040204" pitchFamily="34" charset="0"/>
+              </a:rPr>
+              <a:t> (Design Pattern)</a:t>
+            </a:r>
+          </a:p>
+          <a:p>
+            <a:pPr marL="0" indent="0">
+              <a:spcAft>
+                <a:spcPts val="300"/>
+              </a:spcAft>
+              <a:buNone/>
+              <a:defRPr sz="1100"/>
+            </a:pPr>
+            <a:r>
+              <a:rPr dirty="0">
+                <a:latin typeface="Tahoma" panose="020B0604030504040204" pitchFamily="34" charset="0"/>
+                <a:ea typeface="Tahoma" panose="020B0604030504040204" pitchFamily="34" charset="0"/>
+                <a:cs typeface="Tahoma" panose="020B0604030504040204" pitchFamily="34" charset="0"/>
+              </a:rPr>
+              <a:t>7. </a:t>
+            </a:r>
+            <a:r>
+              <a:rPr dirty="0" err="1">
+                <a:latin typeface="Tahoma" panose="020B0604030504040204" pitchFamily="34" charset="0"/>
+                <a:ea typeface="Tahoma" panose="020B0604030504040204" pitchFamily="34" charset="0"/>
+                <a:cs typeface="Tahoma" panose="020B0604030504040204" pitchFamily="34" charset="0"/>
+              </a:rPr>
+              <a:t>Cài</a:t>
+            </a:r>
+            <a:r>
+              <a:rPr dirty="0">
+                <a:latin typeface="Tahoma" panose="020B0604030504040204" pitchFamily="34" charset="0"/>
+                <a:ea typeface="Tahoma" panose="020B0604030504040204" pitchFamily="34" charset="0"/>
+                <a:cs typeface="Tahoma" panose="020B0604030504040204" pitchFamily="34" charset="0"/>
+              </a:rPr>
+              <a:t> </a:t>
+            </a:r>
+            <a:r>
+              <a:rPr dirty="0" err="1">
+                <a:latin typeface="Tahoma" panose="020B0604030504040204" pitchFamily="34" charset="0"/>
+                <a:ea typeface="Tahoma" panose="020B0604030504040204" pitchFamily="34" charset="0"/>
+                <a:cs typeface="Tahoma" panose="020B0604030504040204" pitchFamily="34" charset="0"/>
+              </a:rPr>
+              <a:t>đặt</a:t>
+            </a:r>
+            <a:r>
+              <a:rPr dirty="0">
+                <a:latin typeface="Tahoma" panose="020B0604030504040204" pitchFamily="34" charset="0"/>
+                <a:ea typeface="Tahoma" panose="020B0604030504040204" pitchFamily="34" charset="0"/>
+                <a:cs typeface="Tahoma" panose="020B0604030504040204" pitchFamily="34" charset="0"/>
+              </a:rPr>
+              <a:t> </a:t>
+            </a:r>
+            <a:r>
+              <a:rPr dirty="0" err="1">
+                <a:latin typeface="Tahoma" panose="020B0604030504040204" pitchFamily="34" charset="0"/>
+                <a:ea typeface="Tahoma" panose="020B0604030504040204" pitchFamily="34" charset="0"/>
+                <a:cs typeface="Tahoma" panose="020B0604030504040204" pitchFamily="34" charset="0"/>
+              </a:rPr>
+              <a:t>và</a:t>
+            </a:r>
+            <a:r>
+              <a:rPr dirty="0">
+                <a:latin typeface="Tahoma" panose="020B0604030504040204" pitchFamily="34" charset="0"/>
+                <a:ea typeface="Tahoma" panose="020B0604030504040204" pitchFamily="34" charset="0"/>
+                <a:cs typeface="Tahoma" panose="020B0604030504040204" pitchFamily="34" charset="0"/>
+              </a:rPr>
+              <a:t> </a:t>
+            </a:r>
+            <a:r>
+              <a:rPr dirty="0" err="1">
+                <a:latin typeface="Tahoma" panose="020B0604030504040204" pitchFamily="34" charset="0"/>
+                <a:ea typeface="Tahoma" panose="020B0604030504040204" pitchFamily="34" charset="0"/>
+                <a:cs typeface="Tahoma" panose="020B0604030504040204" pitchFamily="34" charset="0"/>
+              </a:rPr>
+              <a:t>triển</a:t>
+            </a:r>
+            <a:r>
+              <a:rPr dirty="0">
+                <a:latin typeface="Tahoma" panose="020B0604030504040204" pitchFamily="34" charset="0"/>
+                <a:ea typeface="Tahoma" panose="020B0604030504040204" pitchFamily="34" charset="0"/>
+                <a:cs typeface="Tahoma" panose="020B0604030504040204" pitchFamily="34" charset="0"/>
+              </a:rPr>
+              <a:t> </a:t>
+            </a:r>
+            <a:r>
+              <a:rPr dirty="0" err="1">
+                <a:latin typeface="Tahoma" panose="020B0604030504040204" pitchFamily="34" charset="0"/>
+                <a:ea typeface="Tahoma" panose="020B0604030504040204" pitchFamily="34" charset="0"/>
+                <a:cs typeface="Tahoma" panose="020B0604030504040204" pitchFamily="34" charset="0"/>
+              </a:rPr>
+              <a:t>khai</a:t>
+            </a:r>
+            <a:r>
+              <a:rPr dirty="0">
+                <a:latin typeface="Tahoma" panose="020B0604030504040204" pitchFamily="34" charset="0"/>
+                <a:ea typeface="Tahoma" panose="020B0604030504040204" pitchFamily="34" charset="0"/>
+                <a:cs typeface="Tahoma" panose="020B0604030504040204" pitchFamily="34" charset="0"/>
+              </a:rPr>
+              <a:t> (CI/CD)</a:t>
+            </a:r>
+          </a:p>
+          <a:p>
+            <a:pPr marL="0" indent="0">
+              <a:spcAft>
+                <a:spcPts val="300"/>
+              </a:spcAft>
+              <a:buNone/>
+              <a:defRPr sz="1100"/>
+            </a:pPr>
+            <a:r>
+              <a:rPr dirty="0">
+                <a:latin typeface="Tahoma" panose="020B0604030504040204" pitchFamily="34" charset="0"/>
+                <a:ea typeface="Tahoma" panose="020B0604030504040204" pitchFamily="34" charset="0"/>
+                <a:cs typeface="Tahoma" panose="020B0604030504040204" pitchFamily="34" charset="0"/>
+              </a:rPr>
+              <a:t>8. </a:t>
+            </a:r>
+            <a:r>
+              <a:rPr dirty="0" err="1">
+                <a:latin typeface="Tahoma" panose="020B0604030504040204" pitchFamily="34" charset="0"/>
+                <a:ea typeface="Tahoma" panose="020B0604030504040204" pitchFamily="34" charset="0"/>
+                <a:cs typeface="Tahoma" panose="020B0604030504040204" pitchFamily="34" charset="0"/>
+              </a:rPr>
+              <a:t>Ứng</a:t>
+            </a:r>
+            <a:r>
+              <a:rPr dirty="0">
+                <a:latin typeface="Tahoma" panose="020B0604030504040204" pitchFamily="34" charset="0"/>
+                <a:ea typeface="Tahoma" panose="020B0604030504040204" pitchFamily="34" charset="0"/>
+                <a:cs typeface="Tahoma" panose="020B0604030504040204" pitchFamily="34" charset="0"/>
+              </a:rPr>
+              <a:t> </a:t>
+            </a:r>
+            <a:r>
+              <a:rPr dirty="0" err="1">
+                <a:latin typeface="Tahoma" panose="020B0604030504040204" pitchFamily="34" charset="0"/>
+                <a:ea typeface="Tahoma" panose="020B0604030504040204" pitchFamily="34" charset="0"/>
+                <a:cs typeface="Tahoma" panose="020B0604030504040204" pitchFamily="34" charset="0"/>
+              </a:rPr>
+              <a:t>dụng</a:t>
+            </a:r>
+            <a:r>
+              <a:rPr dirty="0">
+                <a:latin typeface="Tahoma" panose="020B0604030504040204" pitchFamily="34" charset="0"/>
+                <a:ea typeface="Tahoma" panose="020B0604030504040204" pitchFamily="34" charset="0"/>
+                <a:cs typeface="Tahoma" panose="020B0604030504040204" pitchFamily="34" charset="0"/>
+              </a:rPr>
+              <a:t> AI (AI / AI agent pipeline)</a:t>
+            </a:r>
+          </a:p>
+          <a:p>
+            <a:pPr marL="0" indent="0">
+              <a:spcAft>
+                <a:spcPts val="300"/>
+              </a:spcAft>
+              <a:buNone/>
+              <a:defRPr sz="1100"/>
+            </a:pPr>
+            <a:r>
+              <a:rPr dirty="0">
+                <a:latin typeface="Tahoma" panose="020B0604030504040204" pitchFamily="34" charset="0"/>
+                <a:ea typeface="Tahoma" panose="020B0604030504040204" pitchFamily="34" charset="0"/>
+                <a:cs typeface="Tahoma" panose="020B0604030504040204" pitchFamily="34" charset="0"/>
+              </a:rPr>
+              <a:t>9. </a:t>
+            </a:r>
+            <a:r>
+              <a:rPr dirty="0" err="1">
+                <a:latin typeface="Tahoma" panose="020B0604030504040204" pitchFamily="34" charset="0"/>
+                <a:ea typeface="Tahoma" panose="020B0604030504040204" pitchFamily="34" charset="0"/>
+                <a:cs typeface="Tahoma" panose="020B0604030504040204" pitchFamily="34" charset="0"/>
+              </a:rPr>
+              <a:t>Giám</a:t>
+            </a:r>
+            <a:r>
+              <a:rPr dirty="0">
+                <a:latin typeface="Tahoma" panose="020B0604030504040204" pitchFamily="34" charset="0"/>
+                <a:ea typeface="Tahoma" panose="020B0604030504040204" pitchFamily="34" charset="0"/>
+                <a:cs typeface="Tahoma" panose="020B0604030504040204" pitchFamily="34" charset="0"/>
+              </a:rPr>
+              <a:t> </a:t>
+            </a:r>
+            <a:r>
+              <a:rPr dirty="0" err="1">
+                <a:latin typeface="Tahoma" panose="020B0604030504040204" pitchFamily="34" charset="0"/>
+                <a:ea typeface="Tahoma" panose="020B0604030504040204" pitchFamily="34" charset="0"/>
+                <a:cs typeface="Tahoma" panose="020B0604030504040204" pitchFamily="34" charset="0"/>
+              </a:rPr>
+              <a:t>sát</a:t>
+            </a:r>
+            <a:r>
+              <a:rPr dirty="0">
+                <a:latin typeface="Tahoma" panose="020B0604030504040204" pitchFamily="34" charset="0"/>
+                <a:ea typeface="Tahoma" panose="020B0604030504040204" pitchFamily="34" charset="0"/>
+                <a:cs typeface="Tahoma" panose="020B0604030504040204" pitchFamily="34" charset="0"/>
+              </a:rPr>
+              <a:t> </a:t>
+            </a:r>
+            <a:r>
+              <a:rPr dirty="0" err="1">
+                <a:latin typeface="Tahoma" panose="020B0604030504040204" pitchFamily="34" charset="0"/>
+                <a:ea typeface="Tahoma" panose="020B0604030504040204" pitchFamily="34" charset="0"/>
+                <a:cs typeface="Tahoma" panose="020B0604030504040204" pitchFamily="34" charset="0"/>
+              </a:rPr>
+              <a:t>hệ</a:t>
+            </a:r>
+            <a:r>
+              <a:rPr dirty="0">
+                <a:latin typeface="Tahoma" panose="020B0604030504040204" pitchFamily="34" charset="0"/>
+                <a:ea typeface="Tahoma" panose="020B0604030504040204" pitchFamily="34" charset="0"/>
+                <a:cs typeface="Tahoma" panose="020B0604030504040204" pitchFamily="34" charset="0"/>
+              </a:rPr>
+              <a:t> </a:t>
+            </a:r>
+            <a:r>
+              <a:rPr dirty="0" err="1">
+                <a:latin typeface="Tahoma" panose="020B0604030504040204" pitchFamily="34" charset="0"/>
+                <a:ea typeface="Tahoma" panose="020B0604030504040204" pitchFamily="34" charset="0"/>
+                <a:cs typeface="Tahoma" panose="020B0604030504040204" pitchFamily="34" charset="0"/>
+              </a:rPr>
+              <a:t>thống</a:t>
+            </a:r>
+            <a:r>
+              <a:rPr dirty="0">
+                <a:latin typeface="Tahoma" panose="020B0604030504040204" pitchFamily="34" charset="0"/>
+                <a:ea typeface="Tahoma" panose="020B0604030504040204" pitchFamily="34" charset="0"/>
+                <a:cs typeface="Tahoma" panose="020B0604030504040204" pitchFamily="34" charset="0"/>
+              </a:rPr>
+              <a:t> (System monitor)</a:t>
+            </a:r>
+          </a:p>
+          <a:p>
+            <a:pPr marL="0" indent="0">
+              <a:spcAft>
+                <a:spcPts val="300"/>
+              </a:spcAft>
+              <a:buNone/>
+              <a:defRPr sz="1100"/>
+            </a:pPr>
+            <a:r>
+              <a:rPr dirty="0">
+                <a:latin typeface="Tahoma" panose="020B0604030504040204" pitchFamily="34" charset="0"/>
+                <a:ea typeface="Tahoma" panose="020B0604030504040204" pitchFamily="34" charset="0"/>
+                <a:cs typeface="Tahoma" panose="020B0604030504040204" pitchFamily="34" charset="0"/>
+              </a:rPr>
+              <a:t>10. </a:t>
+            </a:r>
+            <a:r>
+              <a:rPr dirty="0" err="1">
+                <a:latin typeface="Tahoma" panose="020B0604030504040204" pitchFamily="34" charset="0"/>
+                <a:ea typeface="Tahoma" panose="020B0604030504040204" pitchFamily="34" charset="0"/>
+                <a:cs typeface="Tahoma" panose="020B0604030504040204" pitchFamily="34" charset="0"/>
+              </a:rPr>
+              <a:t>Tối</a:t>
+            </a:r>
+            <a:r>
+              <a:rPr dirty="0">
+                <a:latin typeface="Tahoma" panose="020B0604030504040204" pitchFamily="34" charset="0"/>
+                <a:ea typeface="Tahoma" panose="020B0604030504040204" pitchFamily="34" charset="0"/>
+                <a:cs typeface="Tahoma" panose="020B0604030504040204" pitchFamily="34" charset="0"/>
+              </a:rPr>
+              <a:t> </a:t>
+            </a:r>
+            <a:r>
+              <a:rPr dirty="0" err="1">
+                <a:latin typeface="Tahoma" panose="020B0604030504040204" pitchFamily="34" charset="0"/>
+                <a:ea typeface="Tahoma" panose="020B0604030504040204" pitchFamily="34" charset="0"/>
+                <a:cs typeface="Tahoma" panose="020B0604030504040204" pitchFamily="34" charset="0"/>
+              </a:rPr>
+              <a:t>ưu</a:t>
+            </a:r>
+            <a:r>
+              <a:rPr dirty="0">
+                <a:latin typeface="Tahoma" panose="020B0604030504040204" pitchFamily="34" charset="0"/>
+                <a:ea typeface="Tahoma" panose="020B0604030504040204" pitchFamily="34" charset="0"/>
+                <a:cs typeface="Tahoma" panose="020B0604030504040204" pitchFamily="34" charset="0"/>
+              </a:rPr>
+              <a:t> </a:t>
+            </a:r>
+            <a:r>
+              <a:rPr dirty="0" err="1">
+                <a:latin typeface="Tahoma" panose="020B0604030504040204" pitchFamily="34" charset="0"/>
+                <a:ea typeface="Tahoma" panose="020B0604030504040204" pitchFamily="34" charset="0"/>
+                <a:cs typeface="Tahoma" panose="020B0604030504040204" pitchFamily="34" charset="0"/>
+              </a:rPr>
+              <a:t>kiến</a:t>
+            </a:r>
+            <a:r>
+              <a:rPr dirty="0">
+                <a:latin typeface="Tahoma" panose="020B0604030504040204" pitchFamily="34" charset="0"/>
+                <a:ea typeface="Tahoma" panose="020B0604030504040204" pitchFamily="34" charset="0"/>
+                <a:cs typeface="Tahoma" panose="020B0604030504040204" pitchFamily="34" charset="0"/>
+              </a:rPr>
+              <a:t> </a:t>
+            </a:r>
+            <a:r>
+              <a:rPr dirty="0" err="1">
+                <a:latin typeface="Tahoma" panose="020B0604030504040204" pitchFamily="34" charset="0"/>
+                <a:ea typeface="Tahoma" panose="020B0604030504040204" pitchFamily="34" charset="0"/>
+                <a:cs typeface="Tahoma" panose="020B0604030504040204" pitchFamily="34" charset="0"/>
+              </a:rPr>
+              <a:t>trúc</a:t>
+            </a:r>
+            <a:r>
+              <a:rPr dirty="0">
+                <a:latin typeface="Tahoma" panose="020B0604030504040204" pitchFamily="34" charset="0"/>
+                <a:ea typeface="Tahoma" panose="020B0604030504040204" pitchFamily="34" charset="0"/>
+                <a:cs typeface="Tahoma" panose="020B0604030504040204" pitchFamily="34" charset="0"/>
+              </a:rPr>
+              <a:t> </a:t>
+            </a:r>
+            <a:r>
+              <a:rPr dirty="0" err="1">
+                <a:latin typeface="Tahoma" panose="020B0604030504040204" pitchFamily="34" charset="0"/>
+                <a:ea typeface="Tahoma" panose="020B0604030504040204" pitchFamily="34" charset="0"/>
+                <a:cs typeface="Tahoma" panose="020B0604030504040204" pitchFamily="34" charset="0"/>
+              </a:rPr>
+              <a:t>giao</a:t>
+            </a:r>
+            <a:r>
+              <a:rPr dirty="0">
+                <a:latin typeface="Tahoma" panose="020B0604030504040204" pitchFamily="34" charset="0"/>
+                <a:ea typeface="Tahoma" panose="020B0604030504040204" pitchFamily="34" charset="0"/>
+                <a:cs typeface="Tahoma" panose="020B0604030504040204" pitchFamily="34" charset="0"/>
+              </a:rPr>
+              <a:t> </a:t>
+            </a:r>
+            <a:r>
+              <a:rPr dirty="0" err="1">
+                <a:latin typeface="Tahoma" panose="020B0604030504040204" pitchFamily="34" charset="0"/>
+                <a:ea typeface="Tahoma" panose="020B0604030504040204" pitchFamily="34" charset="0"/>
+                <a:cs typeface="Tahoma" panose="020B0604030504040204" pitchFamily="34" charset="0"/>
+              </a:rPr>
+              <a:t>dịch</a:t>
+            </a:r>
+            <a:r>
+              <a:rPr dirty="0">
+                <a:latin typeface="Tahoma" panose="020B0604030504040204" pitchFamily="34" charset="0"/>
+                <a:ea typeface="Tahoma" panose="020B0604030504040204" pitchFamily="34" charset="0"/>
+                <a:cs typeface="Tahoma" panose="020B0604030504040204" pitchFamily="34" charset="0"/>
+              </a:rPr>
+              <a:t> (Transaction process) — </a:t>
+            </a:r>
+            <a:r>
+              <a:rPr dirty="0" err="1">
+                <a:latin typeface="Tahoma" panose="020B0604030504040204" pitchFamily="34" charset="0"/>
+                <a:ea typeface="Tahoma" panose="020B0604030504040204" pitchFamily="34" charset="0"/>
+                <a:cs typeface="Tahoma" panose="020B0604030504040204" pitchFamily="34" charset="0"/>
+              </a:rPr>
+              <a:t>thanh</a:t>
+            </a:r>
+            <a:r>
+              <a:rPr dirty="0">
+                <a:latin typeface="Tahoma" panose="020B0604030504040204" pitchFamily="34" charset="0"/>
+                <a:ea typeface="Tahoma" panose="020B0604030504040204" pitchFamily="34" charset="0"/>
+                <a:cs typeface="Tahoma" panose="020B0604030504040204" pitchFamily="34" charset="0"/>
+              </a:rPr>
+              <a:t> </a:t>
+            </a:r>
+            <a:r>
+              <a:rPr dirty="0" err="1">
+                <a:latin typeface="Tahoma" panose="020B0604030504040204" pitchFamily="34" charset="0"/>
+                <a:ea typeface="Tahoma" panose="020B0604030504040204" pitchFamily="34" charset="0"/>
+                <a:cs typeface="Tahoma" panose="020B0604030504040204" pitchFamily="34" charset="0"/>
+              </a:rPr>
+              <a:t>toán</a:t>
+            </a:r>
+            <a:r>
+              <a:rPr dirty="0">
+                <a:latin typeface="Tahoma" panose="020B0604030504040204" pitchFamily="34" charset="0"/>
+                <a:ea typeface="Tahoma" panose="020B0604030504040204" pitchFamily="34" charset="0"/>
+                <a:cs typeface="Tahoma" panose="020B0604030504040204" pitchFamily="34" charset="0"/>
+              </a:rPr>
+              <a:t> </a:t>
+            </a:r>
+            <a:r>
+              <a:rPr dirty="0" err="1">
+                <a:latin typeface="Tahoma" panose="020B0604030504040204" pitchFamily="34" charset="0"/>
+                <a:ea typeface="Tahoma" panose="020B0604030504040204" pitchFamily="34" charset="0"/>
+                <a:cs typeface="Tahoma" panose="020B0604030504040204" pitchFamily="34" charset="0"/>
+              </a:rPr>
+              <a:t>trực</a:t>
+            </a:r>
+            <a:r>
+              <a:rPr dirty="0">
+                <a:latin typeface="Tahoma" panose="020B0604030504040204" pitchFamily="34" charset="0"/>
+                <a:ea typeface="Tahoma" panose="020B0604030504040204" pitchFamily="34" charset="0"/>
+                <a:cs typeface="Tahoma" panose="020B0604030504040204" pitchFamily="34" charset="0"/>
+              </a:rPr>
+              <a:t> </a:t>
+            </a:r>
+            <a:r>
+              <a:rPr dirty="0" err="1">
+                <a:latin typeface="Tahoma" panose="020B0604030504040204" pitchFamily="34" charset="0"/>
+                <a:ea typeface="Tahoma" panose="020B0604030504040204" pitchFamily="34" charset="0"/>
+                <a:cs typeface="Tahoma" panose="020B0604030504040204" pitchFamily="34" charset="0"/>
+              </a:rPr>
+              <a:t>tuyến</a:t>
+            </a:r>
+            <a:r>
+              <a:rPr dirty="0">
+                <a:latin typeface="Tahoma" panose="020B0604030504040204" pitchFamily="34" charset="0"/>
+                <a:ea typeface="Tahoma" panose="020B0604030504040204" pitchFamily="34" charset="0"/>
+                <a:cs typeface="Tahoma" panose="020B0604030504040204" pitchFamily="34" charset="0"/>
+              </a:rPr>
+              <a:t> MSA</a:t>
+            </a:r>
+          </a:p>
+          <a:p>
+            <a:pPr marL="0" indent="0">
+              <a:spcAft>
+                <a:spcPts val="300"/>
+              </a:spcAft>
+              <a:buNone/>
+              <a:defRPr sz="1100"/>
+            </a:pPr>
+            <a:r>
+              <a:rPr dirty="0">
+                <a:latin typeface="Tahoma" panose="020B0604030504040204" pitchFamily="34" charset="0"/>
+                <a:ea typeface="Tahoma" panose="020B0604030504040204" pitchFamily="34" charset="0"/>
+                <a:cs typeface="Tahoma" panose="020B0604030504040204" pitchFamily="34" charset="0"/>
+              </a:rPr>
+              <a:t>11. </a:t>
+            </a:r>
+            <a:r>
+              <a:rPr dirty="0" err="1">
+                <a:latin typeface="Tahoma" panose="020B0604030504040204" pitchFamily="34" charset="0"/>
+                <a:ea typeface="Tahoma" panose="020B0604030504040204" pitchFamily="34" charset="0"/>
+                <a:cs typeface="Tahoma" panose="020B0604030504040204" pitchFamily="34" charset="0"/>
+              </a:rPr>
+              <a:t>Tối</a:t>
+            </a:r>
+            <a:r>
+              <a:rPr dirty="0">
+                <a:latin typeface="Tahoma" panose="020B0604030504040204" pitchFamily="34" charset="0"/>
+                <a:ea typeface="Tahoma" panose="020B0604030504040204" pitchFamily="34" charset="0"/>
+                <a:cs typeface="Tahoma" panose="020B0604030504040204" pitchFamily="34" charset="0"/>
+              </a:rPr>
+              <a:t> </a:t>
+            </a:r>
+            <a:r>
+              <a:rPr dirty="0" err="1">
+                <a:latin typeface="Tahoma" panose="020B0604030504040204" pitchFamily="34" charset="0"/>
+                <a:ea typeface="Tahoma" panose="020B0604030504040204" pitchFamily="34" charset="0"/>
+                <a:cs typeface="Tahoma" panose="020B0604030504040204" pitchFamily="34" charset="0"/>
+              </a:rPr>
+              <a:t>ưu</a:t>
+            </a:r>
+            <a:r>
+              <a:rPr dirty="0">
+                <a:latin typeface="Tahoma" panose="020B0604030504040204" pitchFamily="34" charset="0"/>
+                <a:ea typeface="Tahoma" panose="020B0604030504040204" pitchFamily="34" charset="0"/>
+                <a:cs typeface="Tahoma" panose="020B0604030504040204" pitchFamily="34" charset="0"/>
+              </a:rPr>
+              <a:t> </a:t>
+            </a:r>
+            <a:r>
+              <a:rPr dirty="0" err="1">
+                <a:latin typeface="Tahoma" panose="020B0604030504040204" pitchFamily="34" charset="0"/>
+                <a:ea typeface="Tahoma" panose="020B0604030504040204" pitchFamily="34" charset="0"/>
+                <a:cs typeface="Tahoma" panose="020B0604030504040204" pitchFamily="34" charset="0"/>
+              </a:rPr>
+              <a:t>hóa</a:t>
+            </a:r>
+            <a:r>
+              <a:rPr dirty="0">
+                <a:latin typeface="Tahoma" panose="020B0604030504040204" pitchFamily="34" charset="0"/>
+                <a:ea typeface="Tahoma" panose="020B0604030504040204" pitchFamily="34" charset="0"/>
+                <a:cs typeface="Tahoma" panose="020B0604030504040204" pitchFamily="34" charset="0"/>
+              </a:rPr>
+              <a:t> </a:t>
+            </a:r>
+            <a:r>
+              <a:rPr dirty="0" err="1">
+                <a:latin typeface="Tahoma" panose="020B0604030504040204" pitchFamily="34" charset="0"/>
+                <a:ea typeface="Tahoma" panose="020B0604030504040204" pitchFamily="34" charset="0"/>
+                <a:cs typeface="Tahoma" panose="020B0604030504040204" pitchFamily="34" charset="0"/>
+              </a:rPr>
+              <a:t>hệ</a:t>
+            </a:r>
+            <a:r>
+              <a:rPr dirty="0">
+                <a:latin typeface="Tahoma" panose="020B0604030504040204" pitchFamily="34" charset="0"/>
+                <a:ea typeface="Tahoma" panose="020B0604030504040204" pitchFamily="34" charset="0"/>
+                <a:cs typeface="Tahoma" panose="020B0604030504040204" pitchFamily="34" charset="0"/>
+              </a:rPr>
+              <a:t> </a:t>
+            </a:r>
+            <a:r>
+              <a:rPr dirty="0" err="1">
+                <a:latin typeface="Tahoma" panose="020B0604030504040204" pitchFamily="34" charset="0"/>
+                <a:ea typeface="Tahoma" panose="020B0604030504040204" pitchFamily="34" charset="0"/>
+                <a:cs typeface="Tahoma" panose="020B0604030504040204" pitchFamily="34" charset="0"/>
+              </a:rPr>
+              <a:t>thống</a:t>
+            </a:r>
+            <a:r>
+              <a:rPr dirty="0">
+                <a:latin typeface="Tahoma" panose="020B0604030504040204" pitchFamily="34" charset="0"/>
+                <a:ea typeface="Tahoma" panose="020B0604030504040204" pitchFamily="34" charset="0"/>
+                <a:cs typeface="Tahoma" panose="020B0604030504040204" pitchFamily="34" charset="0"/>
+              </a:rPr>
+              <a:t> </a:t>
+            </a:r>
+            <a:r>
+              <a:rPr dirty="0" err="1">
+                <a:latin typeface="Tahoma" panose="020B0604030504040204" pitchFamily="34" charset="0"/>
+                <a:ea typeface="Tahoma" panose="020B0604030504040204" pitchFamily="34" charset="0"/>
+                <a:cs typeface="Tahoma" panose="020B0604030504040204" pitchFamily="34" charset="0"/>
+              </a:rPr>
+              <a:t>đáp</a:t>
+            </a:r>
+            <a:r>
+              <a:rPr dirty="0">
+                <a:latin typeface="Tahoma" panose="020B0604030504040204" pitchFamily="34" charset="0"/>
+                <a:ea typeface="Tahoma" panose="020B0604030504040204" pitchFamily="34" charset="0"/>
+                <a:cs typeface="Tahoma" panose="020B0604030504040204" pitchFamily="34" charset="0"/>
+              </a:rPr>
+              <a:t> </a:t>
+            </a:r>
+            <a:r>
+              <a:rPr dirty="0" err="1">
+                <a:latin typeface="Tahoma" panose="020B0604030504040204" pitchFamily="34" charset="0"/>
+                <a:ea typeface="Tahoma" panose="020B0604030504040204" pitchFamily="34" charset="0"/>
+                <a:cs typeface="Tahoma" panose="020B0604030504040204" pitchFamily="34" charset="0"/>
+              </a:rPr>
+              <a:t>ứng</a:t>
+            </a:r>
+            <a:r>
+              <a:rPr dirty="0">
+                <a:latin typeface="Tahoma" panose="020B0604030504040204" pitchFamily="34" charset="0"/>
+                <a:ea typeface="Tahoma" panose="020B0604030504040204" pitchFamily="34" charset="0"/>
+                <a:cs typeface="Tahoma" panose="020B0604030504040204" pitchFamily="34" charset="0"/>
+              </a:rPr>
+              <a:t> </a:t>
+            </a:r>
+            <a:r>
+              <a:rPr dirty="0" err="1">
+                <a:latin typeface="Tahoma" panose="020B0604030504040204" pitchFamily="34" charset="0"/>
+                <a:ea typeface="Tahoma" panose="020B0604030504040204" pitchFamily="34" charset="0"/>
+                <a:cs typeface="Tahoma" panose="020B0604030504040204" pitchFamily="34" charset="0"/>
+              </a:rPr>
+              <a:t>nhu</a:t>
+            </a:r>
+            <a:r>
+              <a:rPr dirty="0">
+                <a:latin typeface="Tahoma" panose="020B0604030504040204" pitchFamily="34" charset="0"/>
+                <a:ea typeface="Tahoma" panose="020B0604030504040204" pitchFamily="34" charset="0"/>
+                <a:cs typeface="Tahoma" panose="020B0604030504040204" pitchFamily="34" charset="0"/>
+              </a:rPr>
+              <a:t> </a:t>
+            </a:r>
+            <a:r>
+              <a:rPr dirty="0" err="1">
+                <a:latin typeface="Tahoma" panose="020B0604030504040204" pitchFamily="34" charset="0"/>
+                <a:ea typeface="Tahoma" panose="020B0604030504040204" pitchFamily="34" charset="0"/>
+                <a:cs typeface="Tahoma" panose="020B0604030504040204" pitchFamily="34" charset="0"/>
+              </a:rPr>
+              <a:t>cầu</a:t>
+            </a:r>
+            <a:r>
+              <a:rPr dirty="0">
+                <a:latin typeface="Tahoma" panose="020B0604030504040204" pitchFamily="34" charset="0"/>
+                <a:ea typeface="Tahoma" panose="020B0604030504040204" pitchFamily="34" charset="0"/>
+                <a:cs typeface="Tahoma" panose="020B0604030504040204" pitchFamily="34" charset="0"/>
+              </a:rPr>
+              <a:t> (System scalability)</a:t>
+            </a:r>
+          </a:p>
+          <a:p>
+            <a:pPr marL="0" indent="0">
+              <a:spcAft>
+                <a:spcPts val="300"/>
+              </a:spcAft>
+              <a:buNone/>
+              <a:defRPr sz="1100"/>
+            </a:pPr>
+            <a:r>
+              <a:rPr dirty="0">
+                <a:latin typeface="Tahoma" panose="020B0604030504040204" pitchFamily="34" charset="0"/>
+                <a:ea typeface="Tahoma" panose="020B0604030504040204" pitchFamily="34" charset="0"/>
+                <a:cs typeface="Tahoma" panose="020B0604030504040204" pitchFamily="34" charset="0"/>
+              </a:rPr>
+              <a:t>12. </a:t>
+            </a:r>
+            <a:r>
+              <a:rPr dirty="0" err="1">
+                <a:latin typeface="Tahoma" panose="020B0604030504040204" pitchFamily="34" charset="0"/>
+                <a:ea typeface="Tahoma" panose="020B0604030504040204" pitchFamily="34" charset="0"/>
+                <a:cs typeface="Tahoma" panose="020B0604030504040204" pitchFamily="34" charset="0"/>
+              </a:rPr>
+              <a:t>Tăng</a:t>
+            </a:r>
+            <a:r>
+              <a:rPr dirty="0">
+                <a:latin typeface="Tahoma" panose="020B0604030504040204" pitchFamily="34" charset="0"/>
+                <a:ea typeface="Tahoma" panose="020B0604030504040204" pitchFamily="34" charset="0"/>
+                <a:cs typeface="Tahoma" panose="020B0604030504040204" pitchFamily="34" charset="0"/>
+              </a:rPr>
+              <a:t> </a:t>
+            </a:r>
+            <a:r>
+              <a:rPr dirty="0" err="1">
+                <a:latin typeface="Tahoma" panose="020B0604030504040204" pitchFamily="34" charset="0"/>
+                <a:ea typeface="Tahoma" panose="020B0604030504040204" pitchFamily="34" charset="0"/>
+                <a:cs typeface="Tahoma" panose="020B0604030504040204" pitchFamily="34" charset="0"/>
+              </a:rPr>
+              <a:t>cường</a:t>
+            </a:r>
+            <a:r>
+              <a:rPr dirty="0">
+                <a:latin typeface="Tahoma" panose="020B0604030504040204" pitchFamily="34" charset="0"/>
+                <a:ea typeface="Tahoma" panose="020B0604030504040204" pitchFamily="34" charset="0"/>
+                <a:cs typeface="Tahoma" panose="020B0604030504040204" pitchFamily="34" charset="0"/>
+              </a:rPr>
+              <a:t> </a:t>
+            </a:r>
+            <a:r>
+              <a:rPr dirty="0" err="1">
+                <a:latin typeface="Tahoma" panose="020B0604030504040204" pitchFamily="34" charset="0"/>
+                <a:ea typeface="Tahoma" panose="020B0604030504040204" pitchFamily="34" charset="0"/>
+                <a:cs typeface="Tahoma" panose="020B0604030504040204" pitchFamily="34" charset="0"/>
+              </a:rPr>
+              <a:t>bảo</a:t>
+            </a:r>
+            <a:r>
+              <a:rPr dirty="0">
+                <a:latin typeface="Tahoma" panose="020B0604030504040204" pitchFamily="34" charset="0"/>
+                <a:ea typeface="Tahoma" panose="020B0604030504040204" pitchFamily="34" charset="0"/>
+                <a:cs typeface="Tahoma" panose="020B0604030504040204" pitchFamily="34" charset="0"/>
+              </a:rPr>
+              <a:t> </a:t>
+            </a:r>
+            <a:r>
+              <a:rPr dirty="0" err="1">
+                <a:latin typeface="Tahoma" panose="020B0604030504040204" pitchFamily="34" charset="0"/>
+                <a:ea typeface="Tahoma" panose="020B0604030504040204" pitchFamily="34" charset="0"/>
+                <a:cs typeface="Tahoma" panose="020B0604030504040204" pitchFamily="34" charset="0"/>
+              </a:rPr>
+              <a:t>mật</a:t>
+            </a:r>
+            <a:r>
+              <a:rPr dirty="0">
+                <a:latin typeface="Tahoma" panose="020B0604030504040204" pitchFamily="34" charset="0"/>
+                <a:ea typeface="Tahoma" panose="020B0604030504040204" pitchFamily="34" charset="0"/>
+                <a:cs typeface="Tahoma" panose="020B0604030504040204" pitchFamily="34" charset="0"/>
+              </a:rPr>
+              <a:t> </a:t>
+            </a:r>
+            <a:r>
+              <a:rPr dirty="0" err="1">
+                <a:latin typeface="Tahoma" panose="020B0604030504040204" pitchFamily="34" charset="0"/>
+                <a:ea typeface="Tahoma" panose="020B0604030504040204" pitchFamily="34" charset="0"/>
+                <a:cs typeface="Tahoma" panose="020B0604030504040204" pitchFamily="34" charset="0"/>
+              </a:rPr>
+              <a:t>hệ</a:t>
+            </a:r>
+            <a:r>
+              <a:rPr dirty="0">
+                <a:latin typeface="Tahoma" panose="020B0604030504040204" pitchFamily="34" charset="0"/>
+                <a:ea typeface="Tahoma" panose="020B0604030504040204" pitchFamily="34" charset="0"/>
+                <a:cs typeface="Tahoma" panose="020B0604030504040204" pitchFamily="34" charset="0"/>
+              </a:rPr>
+              <a:t> </a:t>
+            </a:r>
+            <a:r>
+              <a:rPr dirty="0" err="1">
+                <a:latin typeface="Tahoma" panose="020B0604030504040204" pitchFamily="34" charset="0"/>
+                <a:ea typeface="Tahoma" panose="020B0604030504040204" pitchFamily="34" charset="0"/>
+                <a:cs typeface="Tahoma" panose="020B0604030504040204" pitchFamily="34" charset="0"/>
+              </a:rPr>
+              <a:t>thống</a:t>
+            </a:r>
+            <a:r>
+              <a:rPr dirty="0">
+                <a:latin typeface="Tahoma" panose="020B0604030504040204" pitchFamily="34" charset="0"/>
+                <a:ea typeface="Tahoma" panose="020B0604030504040204" pitchFamily="34" charset="0"/>
+                <a:cs typeface="Tahoma" panose="020B0604030504040204" pitchFamily="34" charset="0"/>
+              </a:rPr>
+              <a:t> </a:t>
+            </a:r>
+            <a:r>
+              <a:rPr dirty="0" err="1">
+                <a:latin typeface="Tahoma" panose="020B0604030504040204" pitchFamily="34" charset="0"/>
+                <a:ea typeface="Tahoma" panose="020B0604030504040204" pitchFamily="34" charset="0"/>
+                <a:cs typeface="Tahoma" panose="020B0604030504040204" pitchFamily="34" charset="0"/>
+              </a:rPr>
+              <a:t>và</a:t>
+            </a:r>
+            <a:r>
+              <a:rPr dirty="0">
+                <a:latin typeface="Tahoma" panose="020B0604030504040204" pitchFamily="34" charset="0"/>
+                <a:ea typeface="Tahoma" panose="020B0604030504040204" pitchFamily="34" charset="0"/>
+                <a:cs typeface="Tahoma" panose="020B0604030504040204" pitchFamily="34" charset="0"/>
+              </a:rPr>
+              <a:t> </a:t>
+            </a:r>
+            <a:r>
+              <a:rPr dirty="0" err="1">
+                <a:latin typeface="Tahoma" panose="020B0604030504040204" pitchFamily="34" charset="0"/>
+                <a:ea typeface="Tahoma" panose="020B0604030504040204" pitchFamily="34" charset="0"/>
+                <a:cs typeface="Tahoma" panose="020B0604030504040204" pitchFamily="34" charset="0"/>
+              </a:rPr>
+              <a:t>dữ</a:t>
+            </a:r>
+            <a:r>
+              <a:rPr dirty="0">
+                <a:latin typeface="Tahoma" panose="020B0604030504040204" pitchFamily="34" charset="0"/>
+                <a:ea typeface="Tahoma" panose="020B0604030504040204" pitchFamily="34" charset="0"/>
+                <a:cs typeface="Tahoma" panose="020B0604030504040204" pitchFamily="34" charset="0"/>
+              </a:rPr>
+              <a:t> </a:t>
+            </a:r>
+            <a:r>
+              <a:rPr dirty="0" err="1">
+                <a:latin typeface="Tahoma" panose="020B0604030504040204" pitchFamily="34" charset="0"/>
+                <a:ea typeface="Tahoma" panose="020B0604030504040204" pitchFamily="34" charset="0"/>
+                <a:cs typeface="Tahoma" panose="020B0604030504040204" pitchFamily="34" charset="0"/>
+              </a:rPr>
+              <a:t>liệu</a:t>
+            </a:r>
+            <a:r>
+              <a:rPr dirty="0">
+                <a:latin typeface="Tahoma" panose="020B0604030504040204" pitchFamily="34" charset="0"/>
+                <a:ea typeface="Tahoma" panose="020B0604030504040204" pitchFamily="34" charset="0"/>
+                <a:cs typeface="Tahoma" panose="020B0604030504040204" pitchFamily="34" charset="0"/>
+              </a:rPr>
+              <a:t> (Information Security, Data security)</a:t>
+            </a:r>
+          </a:p>
+          <a:p>
+            <a:pPr marL="0" indent="0">
+              <a:spcAft>
+                <a:spcPts val="300"/>
+              </a:spcAft>
+              <a:buNone/>
+              <a:defRPr sz="1100"/>
+            </a:pPr>
+            <a:r>
+              <a:rPr dirty="0">
+                <a:latin typeface="Tahoma" panose="020B0604030504040204" pitchFamily="34" charset="0"/>
+                <a:ea typeface="Tahoma" panose="020B0604030504040204" pitchFamily="34" charset="0"/>
+                <a:cs typeface="Tahoma" panose="020B0604030504040204" pitchFamily="34" charset="0"/>
+              </a:rPr>
+              <a:t>13. </a:t>
+            </a:r>
+            <a:r>
+              <a:rPr dirty="0" err="1">
+                <a:latin typeface="Tahoma" panose="020B0604030504040204" pitchFamily="34" charset="0"/>
+                <a:ea typeface="Tahoma" panose="020B0604030504040204" pitchFamily="34" charset="0"/>
+                <a:cs typeface="Tahoma" panose="020B0604030504040204" pitchFamily="34" charset="0"/>
+              </a:rPr>
+              <a:t>Kết</a:t>
+            </a:r>
+            <a:r>
+              <a:rPr dirty="0">
+                <a:latin typeface="Tahoma" panose="020B0604030504040204" pitchFamily="34" charset="0"/>
+                <a:ea typeface="Tahoma" panose="020B0604030504040204" pitchFamily="34" charset="0"/>
+                <a:cs typeface="Tahoma" panose="020B0604030504040204" pitchFamily="34" charset="0"/>
+              </a:rPr>
+              <a:t> </a:t>
+            </a:r>
+            <a:r>
+              <a:rPr dirty="0" err="1">
+                <a:latin typeface="Tahoma" panose="020B0604030504040204" pitchFamily="34" charset="0"/>
+                <a:ea typeface="Tahoma" panose="020B0604030504040204" pitchFamily="34" charset="0"/>
+                <a:cs typeface="Tahoma" panose="020B0604030504040204" pitchFamily="34" charset="0"/>
+              </a:rPr>
+              <a:t>luận</a:t>
+            </a:r>
+            <a:endParaRPr dirty="0">
+              <a:latin typeface="Tahoma" panose="020B0604030504040204" pitchFamily="34" charset="0"/>
+              <a:ea typeface="Tahoma" panose="020B0604030504040204" pitchFamily="34" charset="0"/>
+              <a:cs typeface="Tahoma" panose="020B0604030504040204" pitchFamily="34" charset="0"/>
+            </a:endParaRPr>
+          </a:p>
+          <a:p>
+            <a:pPr marL="0" indent="0">
+              <a:spcAft>
+                <a:spcPts val="300"/>
+              </a:spcAft>
+              <a:buNone/>
+              <a:defRPr sz="1100"/>
+            </a:pPr>
+            <a:r>
+              <a:rPr dirty="0">
+                <a:latin typeface="Tahoma" panose="020B0604030504040204" pitchFamily="34" charset="0"/>
+                <a:ea typeface="Tahoma" panose="020B0604030504040204" pitchFamily="34" charset="0"/>
+                <a:cs typeface="Tahoma" panose="020B0604030504040204" pitchFamily="34" charset="0"/>
+              </a:rPr>
+              <a:t>14. Demo</a:t>
+            </a:r>
+          </a:p>
+        </p:txBody>
+      </p:sp>
+    </p:spTree>
+  </p:cSld>
+  <p:clrMapOvr>
+    <a:masterClrMapping/>
+  </p:clrMapOvr>
+</p:sld>
+</file>
+
+<file path=ppt/slides/slide20.xml><?xml version="1.0" encoding="utf-8"?>
+<p:sld xmlns:a="http://schemas.openxmlformats.org/drawingml/2006/main" xmlns:r="http://schemas.openxmlformats.org/officeDocument/2006/relationships" xmlns:p="http://schemas.openxmlformats.org/presentationml/2006/main">
+  <p:cSld>
+    <p:spTree>
+      <p:nvGrpSpPr>
+        <p:cNvPr id="1" name=""/>
+        <p:cNvGrpSpPr/>
+        <p:nvPr/>
+      </p:nvGrpSpPr>
+      <p:grpSpPr>
+        <a:xfrm>
+          <a:off x="0" y="0"/>
+          <a:ext cx="0" cy="0"/>
+          <a:chOff x="0" y="0"/>
+          <a:chExt cx="0" cy="0"/>
+        </a:xfrm>
+      </p:grpSpPr>
       <p:sp>
         <p:nvSpPr>
           <p:cNvPr id="2" name="TextBox 1"/>
@@ -3959,8 +6583,8 @@
 </p:sld>
 </file>
 
-<file path=ppt/slides/slide2.xml><?xml version="1.0" encoding="utf-8"?>
-<p:sld xmlns:a="http://schemas.openxmlformats.org/drawingml/2006/main" xmlns:p="http://schemas.openxmlformats.org/presentationml/2006/main" xmlns:r="http://schemas.openxmlformats.org/officeDocument/2006/relationships">
+<file path=ppt/slides/slide21.xml><?xml version="1.0" encoding="utf-8"?>
+<p:sld xmlns:a="http://schemas.openxmlformats.org/drawingml/2006/main" xmlns:r="http://schemas.openxmlformats.org/officeDocument/2006/relationships" xmlns:p="http://schemas.openxmlformats.org/presentationml/2006/main">
   <p:cSld>
     <p:spTree>
       <p:nvGrpSpPr>
@@ -3968,219 +6592,14 @@
         <p:cNvGrpSpPr/>
         <p:nvPr/>
       </p:nvGrpSpPr>
-      <p:grpSpPr/>
-      <p:sp>
-        <p:nvSpPr>
-          <p:cNvPr id="2" name="Title 1"/>
-          <p:cNvSpPr>
-            <a:spLocks noGrp="1"/>
-          </p:cNvSpPr>
-          <p:nvPr>
-            <p:ph type="title"/>
-          </p:nvPr>
-        </p:nvSpPr>
-        <p:spPr/>
-        <p:txBody>
-          <a:bodyPr wrap="square"/>
-          <a:lstStyle/>
-          <a:p>
-            <a:pPr>
-              <a:defRPr sz="2000"/>
-            </a:pPr>
-            <a:r>
-              <a:t>Danh sách nội dung</a:t>
-            </a:r>
-          </a:p>
-        </p:txBody>
-      </p:sp>
-      <p:sp>
-        <p:nvSpPr>
-          <p:cNvPr id="3" name="Content Placeholder 2"/>
-          <p:cNvSpPr>
-            <a:spLocks noGrp="1"/>
-          </p:cNvSpPr>
-          <p:nvPr>
-            <p:ph idx="1"/>
-          </p:nvPr>
-        </p:nvSpPr>
-        <p:spPr/>
-        <p:txBody>
-          <a:bodyPr wrap="square" bIns="73152" lIns="45720"/>
-          <a:lstStyle/>
-          <a:p>
-            <a:pPr>
-              <a:spcAft>
-                <a:spcPts val="300"/>
-              </a:spcAft>
-              <a:defRPr sz="1100"/>
-            </a:pPr>
-            <a:r>
-              <a:t>1. Đặt vấn đề (Problem and scope)</a:t>
-            </a:r>
-          </a:p>
-          <a:p>
-            <a:pPr>
-              <a:spcAft>
-                <a:spcPts val="300"/>
-              </a:spcAft>
-              <a:defRPr sz="1100"/>
-            </a:pPr>
-            <a:r>
-              <a:t>2. Thu thập yêu cầu và khảo sát nghiệp vụ (Requirement and survey)</a:t>
-            </a:r>
-          </a:p>
-          <a:p>
-            <a:pPr>
-              <a:spcAft>
-                <a:spcPts val="300"/>
-              </a:spcAft>
-              <a:defRPr sz="1100"/>
-            </a:pPr>
-            <a:r>
-              <a:t>3. Phân tích và thiết kế nghiệp vụ (Domain or business model / Domain driven design)</a:t>
-            </a:r>
-          </a:p>
-          <a:p>
-            <a:pPr>
-              <a:spcAft>
-                <a:spcPts val="300"/>
-              </a:spcAft>
-              <a:defRPr sz="1100"/>
-            </a:pPr>
-            <a:r>
-              <a:t>4. Phân tích và thiết kế chức năng của hệ thống (Use case diagram)</a:t>
-            </a:r>
-          </a:p>
-          <a:p>
-            <a:pPr>
-              <a:spcAft>
-                <a:spcPts val="300"/>
-              </a:spcAft>
-              <a:defRPr sz="1100"/>
-            </a:pPr>
-            <a:r>
-              <a:t>5. Thiết kế kiến trúc hệ thống (System architecture design - SAD)</a:t>
-            </a:r>
-          </a:p>
-          <a:p>
-            <a:pPr>
-              <a:spcAft>
-                <a:spcPts val="300"/>
-              </a:spcAft>
-              <a:defRPr sz="1100"/>
-            </a:pPr>
-            <a:r>
-              <a:t>6. (tùy chọn) Mẫu thiết kế phần mềm (Design Pattern)</a:t>
-            </a:r>
-          </a:p>
-          <a:p>
-            <a:pPr>
-              <a:spcAft>
-                <a:spcPts val="300"/>
-              </a:spcAft>
-              <a:defRPr sz="1100"/>
-            </a:pPr>
-            <a:r>
-              <a:t>7. (tùy chọn) Cài đặt và triển khai (CI/CD)</a:t>
-            </a:r>
-          </a:p>
-          <a:p>
-            <a:pPr>
-              <a:spcAft>
-                <a:spcPts val="300"/>
-              </a:spcAft>
-              <a:defRPr sz="1100"/>
-            </a:pPr>
-            <a:r>
-              <a:t>8. (tùy chọn) Ứng dụng AI (AI / AI agent pipeline)</a:t>
-            </a:r>
-          </a:p>
-          <a:p>
-            <a:pPr>
-              <a:spcAft>
-                <a:spcPts val="300"/>
-              </a:spcAft>
-              <a:defRPr sz="1100"/>
-            </a:pPr>
-            <a:r>
-              <a:t>9. (tùy chọn) Giám sát hệ thống (System monitor)</a:t>
-            </a:r>
-          </a:p>
-          <a:p>
-            <a:pPr>
-              <a:spcAft>
-                <a:spcPts val="300"/>
-              </a:spcAft>
-              <a:defRPr sz="1100"/>
-            </a:pPr>
-            <a:r>
-              <a:t>10. (tùy chọn) Tối ưu kiến trúc giao dịch (Transaction process) — thanh toán trực tuyến MSA</a:t>
-            </a:r>
-          </a:p>
-          <a:p>
-            <a:pPr>
-              <a:spcAft>
-                <a:spcPts val="300"/>
-              </a:spcAft>
-              <a:defRPr sz="1100"/>
-            </a:pPr>
-            <a:r>
-              <a:t>11. (tùy chọn) Tối ưu hóa hệ thống đáp ứng nhu cầu (System scalability)</a:t>
-            </a:r>
-          </a:p>
-          <a:p>
-            <a:pPr>
-              <a:spcAft>
-                <a:spcPts val="300"/>
-              </a:spcAft>
-              <a:defRPr sz="1100"/>
-            </a:pPr>
-            <a:r>
-              <a:t>12. (tùy chọn) Tăng cường bảo mật hệ thống và dữ liệu (Information Security, Data security)</a:t>
-            </a:r>
-          </a:p>
-          <a:p>
-            <a:pPr>
-              <a:spcAft>
-                <a:spcPts val="300"/>
-              </a:spcAft>
-              <a:defRPr sz="1100"/>
-            </a:pPr>
-            <a:r>
-              <a:t>13. Kết luận</a:t>
-            </a:r>
-          </a:p>
-          <a:p>
-            <a:pPr>
-              <a:spcAft>
-                <a:spcPts val="300"/>
-              </a:spcAft>
-              <a:defRPr sz="1100"/>
-            </a:pPr>
-            <a:r>
-              <a:t>14. Demo</a:t>
-            </a:r>
-          </a:p>
-        </p:txBody>
-      </p:sp>
-    </p:spTree>
-  </p:cSld>
-  <p:clrMapOvr>
-    <a:masterClrMapping/>
-  </p:clrMapOvr>
-</p:sld>
-</file>
-
-<file path=ppt/slides/slide20.xml><?xml version="1.0" encoding="utf-8"?>
-<p:sld xmlns:a="http://schemas.openxmlformats.org/drawingml/2006/main" xmlns:p="http://schemas.openxmlformats.org/presentationml/2006/main" xmlns:r="http://schemas.openxmlformats.org/officeDocument/2006/relationships">
-  <p:cSld>
-    <p:spTree>
-      <p:nvGrpSpPr>
-        <p:cNvPr id="1" name=""/>
-        <p:cNvGrpSpPr/>
-        <p:nvPr/>
-      </p:nvGrpSpPr>
-      <p:grpSpPr/>
+      <p:grpSpPr>
+        <a:xfrm>
+          <a:off x="0" y="0"/>
+          <a:ext cx="0" cy="0"/>
+          <a:chOff x="0" y="0"/>
+          <a:chExt cx="0" cy="0"/>
+        </a:xfrm>
+      </p:grpSpPr>
       <p:sp>
         <p:nvSpPr>
           <p:cNvPr id="2" name="TextBox 1"/>
@@ -4244,8 +6663,8 @@
 </p:sld>
 </file>
 
-<file path=ppt/slides/slide21.xml><?xml version="1.0" encoding="utf-8"?>
-<p:sld xmlns:a="http://schemas.openxmlformats.org/drawingml/2006/main" xmlns:p="http://schemas.openxmlformats.org/presentationml/2006/main" xmlns:r="http://schemas.openxmlformats.org/officeDocument/2006/relationships">
+<file path=ppt/slides/slide22.xml><?xml version="1.0" encoding="utf-8"?>
+<p:sld xmlns:a="http://schemas.openxmlformats.org/drawingml/2006/main" xmlns:r="http://schemas.openxmlformats.org/officeDocument/2006/relationships" xmlns:p="http://schemas.openxmlformats.org/presentationml/2006/main">
   <p:cSld>
     <p:spTree>
       <p:nvGrpSpPr>
@@ -4253,7 +6672,14 @@
         <p:cNvGrpSpPr/>
         <p:nvPr/>
       </p:nvGrpSpPr>
-      <p:grpSpPr/>
+      <p:grpSpPr>
+        <a:xfrm>
+          <a:off x="0" y="0"/>
+          <a:ext cx="0" cy="0"/>
+          <a:chOff x="0" y="0"/>
+          <a:chExt cx="0" cy="0"/>
+        </a:xfrm>
+      </p:grpSpPr>
       <p:sp>
         <p:nvSpPr>
           <p:cNvPr id="2" name="Title 1"/>
@@ -4273,7 +6699,48 @@
               <a:defRPr sz="2000"/>
             </a:pPr>
             <a:r>
-              <a:t>7. (tùy chọn) Cài đặt và triển khai (CI/CD)</a:t>
+              <a:rPr dirty="0"/>
+              <a:t>7. </a:t>
+            </a:r>
+            <a:r>
+              <a:rPr dirty="0" err="1"/>
+              <a:t>Cài</a:t>
+            </a:r>
+            <a:r>
+              <a:rPr dirty="0"/>
+              <a:t> </a:t>
+            </a:r>
+            <a:r>
+              <a:rPr dirty="0" err="1"/>
+              <a:t>đặt</a:t>
+            </a:r>
+            <a:r>
+              <a:rPr dirty="0"/>
+              <a:t> </a:t>
+            </a:r>
+            <a:r>
+              <a:rPr dirty="0" err="1"/>
+              <a:t>và</a:t>
+            </a:r>
+            <a:r>
+              <a:rPr dirty="0"/>
+              <a:t> </a:t>
+            </a:r>
+            <a:r>
+              <a:rPr dirty="0" err="1"/>
+              <a:t>triển</a:t>
+            </a:r>
+            <a:r>
+              <a:rPr dirty="0"/>
+              <a:t> </a:t>
+            </a:r>
+            <a:r>
+              <a:rPr dirty="0" err="1"/>
+              <a:t>khai</a:t>
+            </a:r>
+            <a:r>
+              <a:rPr dirty="0"/>
+              <a:t> (CI/CD)</a:t>
             </a:r>
           </a:p>
         </p:txBody>
@@ -4290,29 +6757,17 @@
         </p:nvSpPr>
         <p:spPr/>
         <p:txBody>
-          <a:bodyPr wrap="square" bIns="73152" lIns="45720"/>
+          <a:bodyPr wrap="square" lIns="45720" bIns="73152"/>
           <a:lstStyle/>
           <a:p>
-            <a:pPr>
+            <a:pPr marL="0" indent="0">
               <a:spcAft>
                 <a:spcPts val="300"/>
               </a:spcAft>
+              <a:buNone/>
               <a:defRPr sz="1100"/>
             </a:pPr>
-            <a:r>
-              <a:t>(middle level)</a:t>
-            </a:r>
-          </a:p>
-          <a:p>
-            <a:pPr>
-              <a:spcAft>
-                <a:spcPts val="300"/>
-              </a:spcAft>
-              <a:defRPr sz="1100"/>
-            </a:pPr>
-            <a:r>
-              <a:t>Nên dùng hình ảnh tự vẽ theo hệ thống của dự án và tự thuyết minh diễn giải.</a:t>
-            </a:r>
+            <a:endParaRPr dirty="0"/>
           </a:p>
         </p:txBody>
       </p:sp>
@@ -4324,8 +6779,8 @@
 </p:sld>
 </file>
 
-<file path=ppt/slides/slide22.xml><?xml version="1.0" encoding="utf-8"?>
-<p:sld xmlns:a="http://schemas.openxmlformats.org/drawingml/2006/main" xmlns:p="http://schemas.openxmlformats.org/presentationml/2006/main" xmlns:r="http://schemas.openxmlformats.org/officeDocument/2006/relationships">
+<file path=ppt/slides/slide23.xml><?xml version="1.0" encoding="utf-8"?>
+<p:sld xmlns:a="http://schemas.openxmlformats.org/drawingml/2006/main" xmlns:r="http://schemas.openxmlformats.org/officeDocument/2006/relationships" xmlns:p="http://schemas.openxmlformats.org/presentationml/2006/main">
   <p:cSld>
     <p:spTree>
       <p:nvGrpSpPr>
@@ -4333,7 +6788,14 @@
         <p:cNvGrpSpPr/>
         <p:nvPr/>
       </p:nvGrpSpPr>
-      <p:grpSpPr/>
+      <p:grpSpPr>
+        <a:xfrm>
+          <a:off x="0" y="0"/>
+          <a:ext cx="0" cy="0"/>
+          <a:chOff x="0" y="0"/>
+          <a:chExt cx="0" cy="0"/>
+        </a:xfrm>
+      </p:grpSpPr>
       <p:sp>
         <p:nvSpPr>
           <p:cNvPr id="2" name="TextBox 1"/>
@@ -4397,8 +6859,8 @@
 </p:sld>
 </file>
 
-<file path=ppt/slides/slide23.xml><?xml version="1.0" encoding="utf-8"?>
-<p:sld xmlns:a="http://schemas.openxmlformats.org/drawingml/2006/main" xmlns:p="http://schemas.openxmlformats.org/presentationml/2006/main" xmlns:r="http://schemas.openxmlformats.org/officeDocument/2006/relationships">
+<file path=ppt/slides/slide24.xml><?xml version="1.0" encoding="utf-8"?>
+<p:sld xmlns:a="http://schemas.openxmlformats.org/drawingml/2006/main" xmlns:r="http://schemas.openxmlformats.org/officeDocument/2006/relationships" xmlns:p="http://schemas.openxmlformats.org/presentationml/2006/main">
   <p:cSld>
     <p:spTree>
       <p:nvGrpSpPr>
@@ -4406,7 +6868,14 @@
         <p:cNvGrpSpPr/>
         <p:nvPr/>
       </p:nvGrpSpPr>
-      <p:grpSpPr/>
+      <p:grpSpPr>
+        <a:xfrm>
+          <a:off x="0" y="0"/>
+          <a:ext cx="0" cy="0"/>
+          <a:chOff x="0" y="0"/>
+          <a:chExt cx="0" cy="0"/>
+        </a:xfrm>
+      </p:grpSpPr>
       <p:sp>
         <p:nvSpPr>
           <p:cNvPr id="2" name="TextBox 1"/>
@@ -4470,8 +6939,8 @@
 </p:sld>
 </file>
 
-<file path=ppt/slides/slide24.xml><?xml version="1.0" encoding="utf-8"?>
-<p:sld xmlns:a="http://schemas.openxmlformats.org/drawingml/2006/main" xmlns:p="http://schemas.openxmlformats.org/presentationml/2006/main" xmlns:r="http://schemas.openxmlformats.org/officeDocument/2006/relationships">
+<file path=ppt/slides/slide25.xml><?xml version="1.0" encoding="utf-8"?>
+<p:sld xmlns:a="http://schemas.openxmlformats.org/drawingml/2006/main" xmlns:r="http://schemas.openxmlformats.org/officeDocument/2006/relationships" xmlns:p="http://schemas.openxmlformats.org/presentationml/2006/main">
   <p:cSld>
     <p:spTree>
       <p:nvGrpSpPr>
@@ -4479,7 +6948,14 @@
         <p:cNvGrpSpPr/>
         <p:nvPr/>
       </p:nvGrpSpPr>
-      <p:grpSpPr/>
+      <p:grpSpPr>
+        <a:xfrm>
+          <a:off x="0" y="0"/>
+          <a:ext cx="0" cy="0"/>
+          <a:chOff x="0" y="0"/>
+          <a:chExt cx="0" cy="0"/>
+        </a:xfrm>
+      </p:grpSpPr>
       <p:sp>
         <p:nvSpPr>
           <p:cNvPr id="2" name="TextBox 1"/>
@@ -4543,8 +7019,8 @@
 </p:sld>
 </file>
 
-<file path=ppt/slides/slide25.xml><?xml version="1.0" encoding="utf-8"?>
-<p:sld xmlns:a="http://schemas.openxmlformats.org/drawingml/2006/main" xmlns:p="http://schemas.openxmlformats.org/presentationml/2006/main" xmlns:r="http://schemas.openxmlformats.org/officeDocument/2006/relationships">
+<file path=ppt/slides/slide26.xml><?xml version="1.0" encoding="utf-8"?>
+<p:sld xmlns:a="http://schemas.openxmlformats.org/drawingml/2006/main" xmlns:r="http://schemas.openxmlformats.org/officeDocument/2006/relationships" xmlns:p="http://schemas.openxmlformats.org/presentationml/2006/main">
   <p:cSld>
     <p:spTree>
       <p:nvGrpSpPr>
@@ -4552,7 +7028,14 @@
         <p:cNvGrpSpPr/>
         <p:nvPr/>
       </p:nvGrpSpPr>
-      <p:grpSpPr/>
+      <p:grpSpPr>
+        <a:xfrm>
+          <a:off x="0" y="0"/>
+          <a:ext cx="0" cy="0"/>
+          <a:chOff x="0" y="0"/>
+          <a:chExt cx="0" cy="0"/>
+        </a:xfrm>
+      </p:grpSpPr>
       <p:sp>
         <p:nvSpPr>
           <p:cNvPr id="2" name="Title 1"/>
@@ -4572,7 +7055,24 @@
               <a:defRPr sz="2000"/>
             </a:pPr>
             <a:r>
-              <a:t>8. (tùy chọn) Ứng dụng AI (AI / AI agent pipeline)</a:t>
+              <a:rPr dirty="0"/>
+              <a:t>8. </a:t>
+            </a:r>
+            <a:r>
+              <a:rPr dirty="0" err="1"/>
+              <a:t>Ứng</a:t>
+            </a:r>
+            <a:r>
+              <a:rPr dirty="0"/>
+              <a:t> </a:t>
+            </a:r>
+            <a:r>
+              <a:rPr dirty="0" err="1"/>
+              <a:t>dụng</a:t>
+            </a:r>
+            <a:r>
+              <a:rPr dirty="0"/>
+              <a:t> AI (AI / AI agent pipeline)</a:t>
             </a:r>
           </a:p>
         </p:txBody>
@@ -4589,7 +7089,7 @@
         </p:nvSpPr>
         <p:spPr/>
         <p:txBody>
-          <a:bodyPr wrap="square" bIns="73152" lIns="45720"/>
+          <a:bodyPr wrap="square" lIns="45720" bIns="73152"/>
           <a:lstStyle/>
           <a:p>
             <a:pPr>
@@ -4623,8 +7123,8 @@
 </p:sld>
 </file>
 
-<file path=ppt/slides/slide26.xml><?xml version="1.0" encoding="utf-8"?>
-<p:sld xmlns:a="http://schemas.openxmlformats.org/drawingml/2006/main" xmlns:p="http://schemas.openxmlformats.org/presentationml/2006/main" xmlns:r="http://schemas.openxmlformats.org/officeDocument/2006/relationships">
+<file path=ppt/slides/slide27.xml><?xml version="1.0" encoding="utf-8"?>
+<p:sld xmlns:a="http://schemas.openxmlformats.org/drawingml/2006/main" xmlns:r="http://schemas.openxmlformats.org/officeDocument/2006/relationships" xmlns:p="http://schemas.openxmlformats.org/presentationml/2006/main">
   <p:cSld>
     <p:spTree>
       <p:nvGrpSpPr>
@@ -4632,7 +7132,14 @@
         <p:cNvGrpSpPr/>
         <p:nvPr/>
       </p:nvGrpSpPr>
-      <p:grpSpPr/>
+      <p:grpSpPr>
+        <a:xfrm>
+          <a:off x="0" y="0"/>
+          <a:ext cx="0" cy="0"/>
+          <a:chOff x="0" y="0"/>
+          <a:chExt cx="0" cy="0"/>
+        </a:xfrm>
+      </p:grpSpPr>
       <p:sp>
         <p:nvSpPr>
           <p:cNvPr id="2" name="TextBox 1"/>
@@ -4696,8 +7203,8 @@
 </p:sld>
 </file>
 
-<file path=ppt/slides/slide27.xml><?xml version="1.0" encoding="utf-8"?>
-<p:sld xmlns:a="http://schemas.openxmlformats.org/drawingml/2006/main" xmlns:p="http://schemas.openxmlformats.org/presentationml/2006/main" xmlns:r="http://schemas.openxmlformats.org/officeDocument/2006/relationships">
+<file path=ppt/slides/slide28.xml><?xml version="1.0" encoding="utf-8"?>
+<p:sld xmlns:a="http://schemas.openxmlformats.org/drawingml/2006/main" xmlns:r="http://schemas.openxmlformats.org/officeDocument/2006/relationships" xmlns:p="http://schemas.openxmlformats.org/presentationml/2006/main">
   <p:cSld>
     <p:spTree>
       <p:nvGrpSpPr>
@@ -4705,7 +7212,14 @@
         <p:cNvGrpSpPr/>
         <p:nvPr/>
       </p:nvGrpSpPr>
-      <p:grpSpPr/>
+      <p:grpSpPr>
+        <a:xfrm>
+          <a:off x="0" y="0"/>
+          <a:ext cx="0" cy="0"/>
+          <a:chOff x="0" y="0"/>
+          <a:chExt cx="0" cy="0"/>
+        </a:xfrm>
+      </p:grpSpPr>
       <p:sp>
         <p:nvSpPr>
           <p:cNvPr id="2" name="TextBox 1"/>
@@ -4769,8 +7283,8 @@
 </p:sld>
 </file>
 
-<file path=ppt/slides/slide28.xml><?xml version="1.0" encoding="utf-8"?>
-<p:sld xmlns:a="http://schemas.openxmlformats.org/drawingml/2006/main" xmlns:p="http://schemas.openxmlformats.org/presentationml/2006/main" xmlns:r="http://schemas.openxmlformats.org/officeDocument/2006/relationships">
+<file path=ppt/slides/slide29.xml><?xml version="1.0" encoding="utf-8"?>
+<p:sld xmlns:a="http://schemas.openxmlformats.org/drawingml/2006/main" xmlns:r="http://schemas.openxmlformats.org/officeDocument/2006/relationships" xmlns:p="http://schemas.openxmlformats.org/presentationml/2006/main">
   <p:cSld>
     <p:spTree>
       <p:nvGrpSpPr>
@@ -4778,7 +7292,14 @@
         <p:cNvGrpSpPr/>
         <p:nvPr/>
       </p:nvGrpSpPr>
-      <p:grpSpPr/>
+      <p:grpSpPr>
+        <a:xfrm>
+          <a:off x="0" y="0"/>
+          <a:ext cx="0" cy="0"/>
+          <a:chOff x="0" y="0"/>
+          <a:chExt cx="0" cy="0"/>
+        </a:xfrm>
+      </p:grpSpPr>
       <p:sp>
         <p:nvSpPr>
           <p:cNvPr id="2" name="Title 1"/>
@@ -4798,7 +7319,40 @@
               <a:defRPr sz="2000"/>
             </a:pPr>
             <a:r>
-              <a:t>9. (tùy chọn) Giám sát hệ thống (System monitor)</a:t>
+              <a:rPr dirty="0"/>
+              <a:t>9. </a:t>
+            </a:r>
+            <a:r>
+              <a:rPr dirty="0" err="1"/>
+              <a:t>Giám</a:t>
+            </a:r>
+            <a:r>
+              <a:rPr dirty="0"/>
+              <a:t> </a:t>
+            </a:r>
+            <a:r>
+              <a:rPr dirty="0" err="1"/>
+              <a:t>sát</a:t>
+            </a:r>
+            <a:r>
+              <a:rPr dirty="0"/>
+              <a:t> </a:t>
+            </a:r>
+            <a:r>
+              <a:rPr dirty="0" err="1"/>
+              <a:t>hệ</a:t>
+            </a:r>
+            <a:r>
+              <a:rPr dirty="0"/>
+              <a:t> </a:t>
+            </a:r>
+            <a:r>
+              <a:rPr dirty="0" err="1"/>
+              <a:t>thống</a:t>
+            </a:r>
+            <a:r>
+              <a:rPr dirty="0"/>
+              <a:t> (System monitor)</a:t>
             </a:r>
           </a:p>
         </p:txBody>
@@ -4815,7 +7369,7 @@
         </p:nvSpPr>
         <p:spPr/>
         <p:txBody>
-          <a:bodyPr wrap="square" bIns="73152" lIns="45720"/>
+          <a:bodyPr wrap="square" lIns="45720" bIns="73152"/>
           <a:lstStyle/>
           <a:p>
             <a:pPr>
@@ -4825,6 +7379,7 @@
               <a:defRPr sz="1100"/>
             </a:pPr>
             <a:r>
+              <a:rPr dirty="0"/>
               <a:t>(middle level)</a:t>
             </a:r>
           </a:p>
@@ -4836,7 +7391,148 @@
               <a:defRPr sz="1100"/>
             </a:pPr>
             <a:r>
-              <a:t>Nên dùng hình ảnh tự vẽ theo hệ thống của dự án và tự thuyết minh diễn giải.</a:t>
+              <a:rPr dirty="0" err="1"/>
+              <a:t>Nên</a:t>
+            </a:r>
+            <a:r>
+              <a:rPr dirty="0"/>
+              <a:t> </a:t>
+            </a:r>
+            <a:r>
+              <a:rPr dirty="0" err="1"/>
+              <a:t>dùng</a:t>
+            </a:r>
+            <a:r>
+              <a:rPr dirty="0"/>
+              <a:t> </a:t>
+            </a:r>
+            <a:r>
+              <a:rPr dirty="0" err="1"/>
+              <a:t>hình</a:t>
+            </a:r>
+            <a:r>
+              <a:rPr dirty="0"/>
+              <a:t> </a:t>
+            </a:r>
+            <a:r>
+              <a:rPr dirty="0" err="1"/>
+              <a:t>ảnh</a:t>
+            </a:r>
+            <a:r>
+              <a:rPr dirty="0"/>
+              <a:t> </a:t>
+            </a:r>
+            <a:r>
+              <a:rPr dirty="0" err="1"/>
+              <a:t>tự</a:t>
+            </a:r>
+            <a:r>
+              <a:rPr dirty="0"/>
+              <a:t> </a:t>
+            </a:r>
+            <a:r>
+              <a:rPr dirty="0" err="1"/>
+              <a:t>vẽ</a:t>
+            </a:r>
+            <a:r>
+              <a:rPr dirty="0"/>
+              <a:t> </a:t>
+            </a:r>
+            <a:r>
+              <a:rPr dirty="0" err="1"/>
+              <a:t>theo</a:t>
+            </a:r>
+            <a:r>
+              <a:rPr dirty="0"/>
+              <a:t> </a:t>
+            </a:r>
+            <a:r>
+              <a:rPr dirty="0" err="1"/>
+              <a:t>hệ</a:t>
+            </a:r>
+            <a:r>
+              <a:rPr dirty="0"/>
+              <a:t> </a:t>
+            </a:r>
+            <a:r>
+              <a:rPr dirty="0" err="1"/>
+              <a:t>thống</a:t>
+            </a:r>
+            <a:r>
+              <a:rPr dirty="0"/>
+              <a:t> </a:t>
+            </a:r>
+            <a:r>
+              <a:rPr dirty="0" err="1"/>
+              <a:t>của</a:t>
+            </a:r>
+            <a:r>
+              <a:rPr dirty="0"/>
+              <a:t> </a:t>
+            </a:r>
+            <a:r>
+              <a:rPr dirty="0" err="1"/>
+              <a:t>dự</a:t>
+            </a:r>
+            <a:r>
+              <a:rPr dirty="0"/>
+              <a:t> </a:t>
+            </a:r>
+            <a:r>
+              <a:rPr dirty="0" err="1"/>
+              <a:t>án</a:t>
+            </a:r>
+            <a:r>
+              <a:rPr dirty="0"/>
+              <a:t> </a:t>
+            </a:r>
+            <a:r>
+              <a:rPr dirty="0" err="1"/>
+              <a:t>và</a:t>
+            </a:r>
+            <a:r>
+              <a:rPr dirty="0"/>
+              <a:t> </a:t>
+            </a:r>
+            <a:r>
+              <a:rPr dirty="0" err="1"/>
+              <a:t>tự</a:t>
+            </a:r>
+            <a:r>
+              <a:rPr dirty="0"/>
+              <a:t> </a:t>
+            </a:r>
+            <a:r>
+              <a:rPr dirty="0" err="1"/>
+              <a:t>thuyết</a:t>
+            </a:r>
+            <a:r>
+              <a:rPr dirty="0"/>
+              <a:t> </a:t>
+            </a:r>
+            <a:r>
+              <a:rPr dirty="0" err="1"/>
+              <a:t>minh</a:t>
+            </a:r>
+            <a:r>
+              <a:rPr dirty="0"/>
+              <a:t> </a:t>
+            </a:r>
+            <a:r>
+              <a:rPr dirty="0" err="1"/>
+              <a:t>diễn</a:t>
+            </a:r>
+            <a:r>
+              <a:rPr dirty="0"/>
+              <a:t> </a:t>
+            </a:r>
+            <a:r>
+              <a:rPr dirty="0" err="1"/>
+              <a:t>giải</a:t>
+            </a:r>
+            <a:r>
+              <a:rPr dirty="0"/>
+              <a:t>.</a:t>
             </a:r>
           </a:p>
           <a:p>
@@ -4847,6 +7543,7 @@
               <a:defRPr sz="1100"/>
             </a:pPr>
             <a:r>
+              <a:rPr dirty="0"/>
               <a:t>ELK (Elastic Logstash Kibana): Logging.</a:t>
             </a:r>
           </a:p>
@@ -4858,6 +7555,7 @@
               <a:defRPr sz="1100"/>
             </a:pPr>
             <a:r>
+              <a:rPr dirty="0"/>
               <a:t>Grafana / Prometheus: Performance.</a:t>
             </a:r>
           </a:p>
@@ -4871,8 +7569,8 @@
 </p:sld>
 </file>
 
-<file path=ppt/slides/slide29.xml><?xml version="1.0" encoding="utf-8"?>
-<p:sld xmlns:a="http://schemas.openxmlformats.org/drawingml/2006/main" xmlns:p="http://schemas.openxmlformats.org/presentationml/2006/main" xmlns:r="http://schemas.openxmlformats.org/officeDocument/2006/relationships">
+<file path=ppt/slides/slide3.xml><?xml version="1.0" encoding="utf-8"?>
+<p:sld xmlns:a="http://schemas.openxmlformats.org/drawingml/2006/main" xmlns:r="http://schemas.openxmlformats.org/officeDocument/2006/relationships" xmlns:p="http://schemas.openxmlformats.org/presentationml/2006/main">
   <p:cSld>
     <p:spTree>
       <p:nvGrpSpPr>
@@ -4880,7 +7578,1332 @@
         <p:cNvGrpSpPr/>
         <p:nvPr/>
       </p:nvGrpSpPr>
-      <p:grpSpPr/>
+      <p:grpSpPr>
+        <a:xfrm>
+          <a:off x="0" y="0"/>
+          <a:ext cx="0" cy="0"/>
+          <a:chOff x="0" y="0"/>
+          <a:chExt cx="0" cy="0"/>
+        </a:xfrm>
+      </p:grpSpPr>
+      <p:sp>
+        <p:nvSpPr>
+          <p:cNvPr id="2" name="Title 1"/>
+          <p:cNvSpPr>
+            <a:spLocks noGrp="1"/>
+          </p:cNvSpPr>
+          <p:nvPr>
+            <p:ph type="title"/>
+          </p:nvPr>
+        </p:nvSpPr>
+        <p:spPr/>
+        <p:txBody>
+          <a:bodyPr wrap="square"/>
+          <a:lstStyle/>
+          <a:p>
+            <a:pPr>
+              <a:defRPr sz="2000"/>
+            </a:pPr>
+            <a:r>
+              <a:t>1. Đặt vấn đề (Problem and scope)</a:t>
+            </a:r>
+          </a:p>
+        </p:txBody>
+      </p:sp>
+      <p:sp>
+        <p:nvSpPr>
+          <p:cNvPr id="3" name="Content Placeholder 2"/>
+          <p:cNvSpPr>
+            <a:spLocks noGrp="1"/>
+          </p:cNvSpPr>
+          <p:nvPr>
+            <p:ph idx="1"/>
+          </p:nvPr>
+        </p:nvSpPr>
+        <p:spPr>
+          <a:xfrm>
+            <a:off x="457200" y="1600200"/>
+            <a:ext cx="8337176" cy="4525963"/>
+          </a:xfrm>
+        </p:spPr>
+        <p:txBody>
+          <a:bodyPr wrap="square" lIns="45720" bIns="73152">
+            <a:normAutofit/>
+          </a:bodyPr>
+          <a:lstStyle/>
+          <a:p>
+            <a:pPr marL="0" indent="0">
+              <a:spcAft>
+                <a:spcPts val="1000"/>
+              </a:spcAft>
+              <a:buNone/>
+              <a:defRPr sz="1900">
+                <a:solidFill>
+                  <a:srgbClr val="1E293B"/>
+                </a:solidFill>
+              </a:defRPr>
+            </a:pPr>
+            <a:r>
+              <a:rPr lang="vi-VN" sz="1300" dirty="0">
+                <a:latin typeface="+mj-lt"/>
+              </a:rPr>
+              <a:t>• Trong </a:t>
+            </a:r>
+            <a:r>
+              <a:rPr lang="vi-VN" sz="1300" dirty="0" err="1">
+                <a:latin typeface="+mj-lt"/>
+              </a:rPr>
+              <a:t>những</a:t>
+            </a:r>
+            <a:r>
+              <a:rPr lang="vi-VN" sz="1300" dirty="0">
+                <a:latin typeface="+mj-lt"/>
+              </a:rPr>
+              <a:t> năm </a:t>
+            </a:r>
+            <a:r>
+              <a:rPr lang="vi-VN" sz="1300" dirty="0" err="1">
+                <a:latin typeface="+mj-lt"/>
+              </a:rPr>
+              <a:t>gần</a:t>
+            </a:r>
+            <a:r>
+              <a:rPr lang="vi-VN" sz="1300" dirty="0">
+                <a:latin typeface="+mj-lt"/>
+              </a:rPr>
+              <a:t> đây, </a:t>
+            </a:r>
+            <a:r>
+              <a:rPr lang="vi-VN" sz="1300" dirty="0" err="1">
+                <a:latin typeface="+mj-lt"/>
+              </a:rPr>
+              <a:t>các</a:t>
+            </a:r>
+            <a:r>
+              <a:rPr lang="vi-VN" sz="1300" dirty="0">
+                <a:latin typeface="+mj-lt"/>
+              </a:rPr>
+              <a:t> </a:t>
+            </a:r>
+            <a:r>
+              <a:rPr lang="vi-VN" sz="1300" dirty="0" err="1">
+                <a:latin typeface="+mj-lt"/>
+              </a:rPr>
+              <a:t>nền</a:t>
+            </a:r>
+            <a:r>
+              <a:rPr lang="vi-VN" sz="1300" dirty="0">
+                <a:latin typeface="+mj-lt"/>
+              </a:rPr>
+              <a:t> </a:t>
+            </a:r>
+            <a:r>
+              <a:rPr lang="vi-VN" sz="1300" dirty="0" err="1">
+                <a:latin typeface="+mj-lt"/>
+              </a:rPr>
+              <a:t>tảng</a:t>
+            </a:r>
+            <a:r>
+              <a:rPr lang="vi-VN" sz="1300" dirty="0">
+                <a:latin typeface="+mj-lt"/>
+              </a:rPr>
+              <a:t> </a:t>
+            </a:r>
+            <a:r>
+              <a:rPr lang="vi-VN" sz="1300" dirty="0" err="1">
+                <a:latin typeface="+mj-lt"/>
+              </a:rPr>
+              <a:t>gọi</a:t>
+            </a:r>
+            <a:r>
+              <a:rPr lang="vi-VN" sz="1300" dirty="0">
+                <a:latin typeface="+mj-lt"/>
+              </a:rPr>
+              <a:t> xe công </a:t>
+            </a:r>
+            <a:r>
+              <a:rPr lang="vi-VN" sz="1300" dirty="0" err="1">
+                <a:latin typeface="+mj-lt"/>
+              </a:rPr>
+              <a:t>nghệ</a:t>
+            </a:r>
+            <a:r>
+              <a:rPr lang="vi-VN" sz="1300" dirty="0">
+                <a:latin typeface="+mj-lt"/>
+              </a:rPr>
+              <a:t> như </a:t>
+            </a:r>
+            <a:r>
+              <a:rPr lang="vi-VN" sz="1300" dirty="0" err="1">
+                <a:latin typeface="+mj-lt"/>
+              </a:rPr>
+              <a:t>Grab</a:t>
+            </a:r>
+            <a:r>
+              <a:rPr lang="vi-VN" sz="1300" dirty="0">
+                <a:latin typeface="+mj-lt"/>
+              </a:rPr>
+              <a:t>, </a:t>
+            </a:r>
+            <a:r>
+              <a:rPr lang="en-US" sz="1300" dirty="0" err="1">
+                <a:latin typeface="+mj-lt"/>
+              </a:rPr>
+              <a:t>Xanh</a:t>
+            </a:r>
+            <a:r>
+              <a:rPr lang="en-US" sz="1300" dirty="0">
+                <a:latin typeface="+mj-lt"/>
+              </a:rPr>
+              <a:t> SM</a:t>
+            </a:r>
+            <a:r>
+              <a:rPr lang="vi-VN" sz="1300" dirty="0">
+                <a:latin typeface="+mj-lt"/>
+              </a:rPr>
+              <a:t> </a:t>
+            </a:r>
+            <a:r>
+              <a:rPr lang="vi-VN" sz="1300" dirty="0" err="1">
+                <a:latin typeface="+mj-lt"/>
+              </a:rPr>
+              <a:t>và</a:t>
+            </a:r>
+            <a:r>
+              <a:rPr lang="vi-VN" sz="1300" dirty="0">
+                <a:latin typeface="+mj-lt"/>
+              </a:rPr>
+              <a:t> Be </a:t>
+            </a:r>
+            <a:r>
+              <a:rPr lang="vi-VN" sz="1300" dirty="0" err="1">
+                <a:latin typeface="+mj-lt"/>
+              </a:rPr>
+              <a:t>đã</a:t>
+            </a:r>
+            <a:r>
+              <a:rPr lang="vi-VN" sz="1300" dirty="0">
+                <a:latin typeface="+mj-lt"/>
+              </a:rPr>
+              <a:t> thay </a:t>
+            </a:r>
+            <a:r>
+              <a:rPr lang="vi-VN" sz="1300" dirty="0" err="1">
+                <a:latin typeface="+mj-lt"/>
+              </a:rPr>
+              <a:t>đổi</a:t>
+            </a:r>
+            <a:r>
+              <a:rPr lang="vi-VN" sz="1300" dirty="0">
+                <a:latin typeface="+mj-lt"/>
+              </a:rPr>
+              <a:t> </a:t>
+            </a:r>
+            <a:r>
+              <a:rPr lang="vi-VN" sz="1300" dirty="0" err="1">
+                <a:latin typeface="+mj-lt"/>
+              </a:rPr>
+              <a:t>mạnh</a:t>
+            </a:r>
+            <a:r>
+              <a:rPr lang="vi-VN" sz="1300" dirty="0">
+                <a:latin typeface="+mj-lt"/>
+              </a:rPr>
+              <a:t> </a:t>
+            </a:r>
+            <a:r>
+              <a:rPr lang="vi-VN" sz="1300" dirty="0" err="1">
+                <a:latin typeface="+mj-lt"/>
+              </a:rPr>
+              <a:t>mẽ</a:t>
+            </a:r>
+            <a:r>
+              <a:rPr lang="vi-VN" sz="1300" dirty="0">
+                <a:latin typeface="+mj-lt"/>
+              </a:rPr>
+              <a:t> </a:t>
+            </a:r>
+            <a:r>
+              <a:rPr lang="vi-VN" sz="1300" dirty="0" err="1">
+                <a:latin typeface="+mj-lt"/>
+              </a:rPr>
+              <a:t>thói</a:t>
+            </a:r>
+            <a:r>
+              <a:rPr lang="vi-VN" sz="1300" dirty="0">
+                <a:latin typeface="+mj-lt"/>
+              </a:rPr>
+              <a:t> quen di </a:t>
+            </a:r>
+            <a:r>
+              <a:rPr lang="vi-VN" sz="1300" dirty="0" err="1">
+                <a:latin typeface="+mj-lt"/>
+              </a:rPr>
+              <a:t>chuyển</a:t>
+            </a:r>
+            <a:r>
+              <a:rPr lang="vi-VN" sz="1300" dirty="0">
+                <a:latin typeface="+mj-lt"/>
+              </a:rPr>
+              <a:t> </a:t>
+            </a:r>
+            <a:r>
+              <a:rPr lang="vi-VN" sz="1300" dirty="0" err="1">
+                <a:latin typeface="+mj-lt"/>
+              </a:rPr>
+              <a:t>của</a:t>
+            </a:r>
+            <a:r>
+              <a:rPr lang="vi-VN" sz="1300" dirty="0">
+                <a:latin typeface="+mj-lt"/>
+              </a:rPr>
+              <a:t> </a:t>
+            </a:r>
+            <a:r>
+              <a:rPr lang="vi-VN" sz="1300" dirty="0" err="1">
+                <a:latin typeface="+mj-lt"/>
+              </a:rPr>
+              <a:t>người</a:t>
+            </a:r>
+            <a:r>
+              <a:rPr lang="vi-VN" sz="1300" dirty="0">
+                <a:latin typeface="+mj-lt"/>
+              </a:rPr>
+              <a:t> </a:t>
+            </a:r>
+            <a:r>
+              <a:rPr lang="vi-VN" sz="1300" dirty="0" err="1">
+                <a:latin typeface="+mj-lt"/>
+              </a:rPr>
+              <a:t>dùng</a:t>
+            </a:r>
+            <a:r>
+              <a:rPr lang="vi-VN" sz="1300" dirty="0">
+                <a:latin typeface="+mj-lt"/>
+              </a:rPr>
+              <a:t> </a:t>
+            </a:r>
+            <a:r>
+              <a:rPr lang="vi-VN" sz="1300" dirty="0" err="1">
+                <a:latin typeface="+mj-lt"/>
+              </a:rPr>
+              <a:t>tại</a:t>
+            </a:r>
+            <a:r>
+              <a:rPr lang="vi-VN" sz="1300" dirty="0">
+                <a:latin typeface="+mj-lt"/>
+              </a:rPr>
+              <a:t> </a:t>
+            </a:r>
+            <a:r>
+              <a:rPr lang="vi-VN" sz="1300" dirty="0" err="1">
+                <a:latin typeface="+mj-lt"/>
+              </a:rPr>
+              <a:t>Việt</a:t>
+            </a:r>
+            <a:r>
+              <a:rPr lang="vi-VN" sz="1300" dirty="0">
+                <a:latin typeface="+mj-lt"/>
+              </a:rPr>
+              <a:t> Nam.</a:t>
+            </a:r>
+          </a:p>
+          <a:p>
+            <a:pPr marL="0" indent="0">
+              <a:spcAft>
+                <a:spcPts val="1000"/>
+              </a:spcAft>
+              <a:buNone/>
+              <a:defRPr sz="1900">
+                <a:solidFill>
+                  <a:srgbClr val="1E293B"/>
+                </a:solidFill>
+              </a:defRPr>
+            </a:pPr>
+            <a:r>
+              <a:rPr lang="vi-VN" sz="1300" dirty="0">
+                <a:latin typeface="+mj-lt"/>
+              </a:rPr>
+              <a:t>• Tuy nhiên, </a:t>
+            </a:r>
+            <a:r>
+              <a:rPr lang="vi-VN" sz="1300" dirty="0" err="1">
+                <a:latin typeface="+mj-lt"/>
+              </a:rPr>
+              <a:t>các</a:t>
+            </a:r>
+            <a:r>
+              <a:rPr lang="vi-VN" sz="1300" dirty="0">
+                <a:latin typeface="+mj-lt"/>
+              </a:rPr>
+              <a:t> </a:t>
+            </a:r>
+            <a:r>
+              <a:rPr lang="vi-VN" sz="1300" dirty="0" err="1">
+                <a:latin typeface="+mj-lt"/>
+              </a:rPr>
+              <a:t>hệ</a:t>
+            </a:r>
+            <a:r>
+              <a:rPr lang="vi-VN" sz="1300" dirty="0">
+                <a:latin typeface="+mj-lt"/>
+              </a:rPr>
+              <a:t> </a:t>
+            </a:r>
+            <a:r>
+              <a:rPr lang="vi-VN" sz="1300" dirty="0" err="1">
+                <a:latin typeface="+mj-lt"/>
+              </a:rPr>
+              <a:t>thống</a:t>
+            </a:r>
+            <a:r>
+              <a:rPr lang="vi-VN" sz="1300" dirty="0">
+                <a:latin typeface="+mj-lt"/>
+              </a:rPr>
+              <a:t> </a:t>
+            </a:r>
+            <a:r>
+              <a:rPr lang="vi-VN" sz="1300" dirty="0" err="1">
+                <a:latin typeface="+mj-lt"/>
+              </a:rPr>
+              <a:t>gọi</a:t>
+            </a:r>
+            <a:r>
+              <a:rPr lang="vi-VN" sz="1300" dirty="0">
+                <a:latin typeface="+mj-lt"/>
+              </a:rPr>
+              <a:t> xe </a:t>
+            </a:r>
+            <a:r>
+              <a:rPr lang="vi-VN" sz="1300" dirty="0" err="1">
+                <a:latin typeface="+mj-lt"/>
+              </a:rPr>
+              <a:t>hiện</a:t>
+            </a:r>
+            <a:r>
+              <a:rPr lang="vi-VN" sz="1300" dirty="0">
+                <a:latin typeface="+mj-lt"/>
+              </a:rPr>
+              <a:t> </a:t>
+            </a:r>
+            <a:r>
+              <a:rPr lang="vi-VN" sz="1300" dirty="0" err="1">
+                <a:latin typeface="+mj-lt"/>
+              </a:rPr>
+              <a:t>đại</a:t>
+            </a:r>
+            <a:r>
+              <a:rPr lang="vi-VN" sz="1300" dirty="0">
+                <a:latin typeface="+mj-lt"/>
+              </a:rPr>
+              <a:t> </a:t>
+            </a:r>
+            <a:r>
+              <a:rPr lang="vi-VN" sz="1300" dirty="0" err="1">
+                <a:latin typeface="+mj-lt"/>
+              </a:rPr>
+              <a:t>đòi</a:t>
+            </a:r>
+            <a:r>
+              <a:rPr lang="vi-VN" sz="1300" dirty="0">
+                <a:latin typeface="+mj-lt"/>
+              </a:rPr>
+              <a:t> </a:t>
+            </a:r>
+            <a:r>
+              <a:rPr lang="vi-VN" sz="1300" dirty="0" err="1">
+                <a:latin typeface="+mj-lt"/>
+              </a:rPr>
+              <a:t>hỏi</a:t>
+            </a:r>
+            <a:r>
+              <a:rPr lang="vi-VN" sz="1300" dirty="0">
+                <a:latin typeface="+mj-lt"/>
+              </a:rPr>
+              <a:t> </a:t>
+            </a:r>
+            <a:r>
+              <a:rPr lang="vi-VN" sz="1300" dirty="0" err="1">
+                <a:latin typeface="+mj-lt"/>
+              </a:rPr>
+              <a:t>khả</a:t>
+            </a:r>
+            <a:r>
+              <a:rPr lang="vi-VN" sz="1300" dirty="0">
+                <a:latin typeface="+mj-lt"/>
+              </a:rPr>
+              <a:t> năng </a:t>
+            </a:r>
+            <a:r>
+              <a:rPr lang="vi-VN" sz="1300" dirty="0" err="1">
+                <a:latin typeface="+mj-lt"/>
+              </a:rPr>
+              <a:t>xử</a:t>
+            </a:r>
+            <a:r>
+              <a:rPr lang="vi-VN" sz="1300" dirty="0">
+                <a:latin typeface="+mj-lt"/>
+              </a:rPr>
+              <a:t> </a:t>
+            </a:r>
+            <a:r>
+              <a:rPr lang="vi-VN" sz="1300" dirty="0" err="1">
+                <a:latin typeface="+mj-lt"/>
+              </a:rPr>
+              <a:t>lý</a:t>
+            </a:r>
+            <a:r>
+              <a:rPr lang="vi-VN" sz="1300" dirty="0">
+                <a:latin typeface="+mj-lt"/>
+              </a:rPr>
+              <a:t> </a:t>
+            </a:r>
+            <a:r>
+              <a:rPr lang="vi-VN" sz="1300" dirty="0" err="1">
+                <a:latin typeface="+mj-lt"/>
+              </a:rPr>
+              <a:t>realtime</a:t>
+            </a:r>
+            <a:r>
+              <a:rPr lang="vi-VN" sz="1300" dirty="0">
+                <a:latin typeface="+mj-lt"/>
+              </a:rPr>
+              <a:t>, </a:t>
+            </a:r>
+            <a:r>
+              <a:rPr lang="vi-VN" sz="1300" dirty="0" err="1">
+                <a:latin typeface="+mj-lt"/>
+              </a:rPr>
+              <a:t>định</a:t>
+            </a:r>
+            <a:r>
+              <a:rPr lang="vi-VN" sz="1300" dirty="0">
+                <a:latin typeface="+mj-lt"/>
+              </a:rPr>
+              <a:t> </a:t>
+            </a:r>
+            <a:r>
+              <a:rPr lang="vi-VN" sz="1300" dirty="0" err="1">
+                <a:latin typeface="+mj-lt"/>
+              </a:rPr>
+              <a:t>vị</a:t>
+            </a:r>
+            <a:r>
+              <a:rPr lang="vi-VN" sz="1300" dirty="0">
+                <a:latin typeface="+mj-lt"/>
+              </a:rPr>
+              <a:t> </a:t>
+            </a:r>
+            <a:r>
+              <a:rPr lang="vi-VN" sz="1300" dirty="0" err="1">
+                <a:latin typeface="+mj-lt"/>
+              </a:rPr>
+              <a:t>chính</a:t>
+            </a:r>
+            <a:r>
+              <a:rPr lang="vi-VN" sz="1300" dirty="0">
+                <a:latin typeface="+mj-lt"/>
+              </a:rPr>
+              <a:t> </a:t>
+            </a:r>
+            <a:r>
+              <a:rPr lang="vi-VN" sz="1300" dirty="0" err="1">
+                <a:latin typeface="+mj-lt"/>
+              </a:rPr>
+              <a:t>xác</a:t>
+            </a:r>
+            <a:r>
+              <a:rPr lang="vi-VN" sz="1300" dirty="0">
+                <a:latin typeface="+mj-lt"/>
+              </a:rPr>
+              <a:t>, </a:t>
+            </a:r>
+            <a:r>
+              <a:rPr lang="vi-VN" sz="1300" dirty="0" err="1">
+                <a:latin typeface="+mj-lt"/>
+              </a:rPr>
+              <a:t>quản</a:t>
+            </a:r>
+            <a:r>
+              <a:rPr lang="vi-VN" sz="1300" dirty="0">
+                <a:latin typeface="+mj-lt"/>
+              </a:rPr>
+              <a:t> </a:t>
+            </a:r>
+            <a:r>
+              <a:rPr lang="vi-VN" sz="1300" dirty="0" err="1">
+                <a:latin typeface="+mj-lt"/>
+              </a:rPr>
+              <a:t>lý</a:t>
+            </a:r>
+            <a:r>
+              <a:rPr lang="vi-VN" sz="1300" dirty="0">
+                <a:latin typeface="+mj-lt"/>
+              </a:rPr>
+              <a:t> giao </a:t>
+            </a:r>
+            <a:r>
+              <a:rPr lang="vi-VN" sz="1300" dirty="0" err="1">
+                <a:latin typeface="+mj-lt"/>
+              </a:rPr>
+              <a:t>dịch</a:t>
+            </a:r>
+            <a:r>
+              <a:rPr lang="vi-VN" sz="1300" dirty="0">
+                <a:latin typeface="+mj-lt"/>
+              </a:rPr>
+              <a:t> </a:t>
+            </a:r>
+            <a:r>
+              <a:rPr lang="vi-VN" sz="1300" dirty="0" err="1">
+                <a:latin typeface="+mj-lt"/>
+              </a:rPr>
+              <a:t>tài</a:t>
+            </a:r>
+            <a:r>
+              <a:rPr lang="vi-VN" sz="1300" dirty="0">
+                <a:latin typeface="+mj-lt"/>
+              </a:rPr>
+              <a:t> </a:t>
+            </a:r>
+            <a:r>
+              <a:rPr lang="vi-VN" sz="1300" dirty="0" err="1">
+                <a:latin typeface="+mj-lt"/>
+              </a:rPr>
+              <a:t>chính</a:t>
+            </a:r>
+            <a:r>
+              <a:rPr lang="vi-VN" sz="1300" dirty="0">
+                <a:latin typeface="+mj-lt"/>
+              </a:rPr>
+              <a:t> </a:t>
+            </a:r>
+            <a:r>
+              <a:rPr lang="vi-VN" sz="1300" dirty="0" err="1">
+                <a:latin typeface="+mj-lt"/>
+              </a:rPr>
+              <a:t>và</a:t>
+            </a:r>
+            <a:r>
+              <a:rPr lang="vi-VN" sz="1300" dirty="0">
+                <a:latin typeface="+mj-lt"/>
+              </a:rPr>
+              <a:t> </a:t>
+            </a:r>
+            <a:r>
+              <a:rPr lang="vi-VN" sz="1300" dirty="0" err="1">
+                <a:latin typeface="+mj-lt"/>
+              </a:rPr>
+              <a:t>mở</a:t>
+            </a:r>
+            <a:r>
+              <a:rPr lang="vi-VN" sz="1300" dirty="0">
+                <a:latin typeface="+mj-lt"/>
+              </a:rPr>
+              <a:t> </a:t>
+            </a:r>
+            <a:r>
+              <a:rPr lang="vi-VN" sz="1300" dirty="0" err="1">
+                <a:latin typeface="+mj-lt"/>
+              </a:rPr>
+              <a:t>rộng</a:t>
+            </a:r>
+            <a:r>
+              <a:rPr lang="vi-VN" sz="1300" dirty="0">
+                <a:latin typeface="+mj-lt"/>
+              </a:rPr>
+              <a:t> </a:t>
+            </a:r>
+            <a:r>
+              <a:rPr lang="vi-VN" sz="1300" dirty="0" err="1">
+                <a:latin typeface="+mj-lt"/>
+              </a:rPr>
+              <a:t>hệ</a:t>
+            </a:r>
+            <a:r>
+              <a:rPr lang="vi-VN" sz="1300" dirty="0">
+                <a:latin typeface="+mj-lt"/>
+              </a:rPr>
+              <a:t> </a:t>
+            </a:r>
+            <a:r>
+              <a:rPr lang="vi-VN" sz="1300" dirty="0" err="1">
+                <a:latin typeface="+mj-lt"/>
+              </a:rPr>
+              <a:t>thống</a:t>
+            </a:r>
+            <a:r>
+              <a:rPr lang="vi-VN" sz="1300" dirty="0">
+                <a:latin typeface="+mj-lt"/>
+              </a:rPr>
+              <a:t> </a:t>
+            </a:r>
+            <a:r>
+              <a:rPr lang="vi-VN" sz="1300" dirty="0" err="1">
+                <a:latin typeface="+mj-lt"/>
+              </a:rPr>
+              <a:t>với</a:t>
+            </a:r>
+            <a:r>
+              <a:rPr lang="vi-VN" sz="1300" dirty="0">
+                <a:latin typeface="+mj-lt"/>
+              </a:rPr>
+              <a:t> lưu </a:t>
+            </a:r>
+            <a:r>
+              <a:rPr lang="vi-VN" sz="1300" dirty="0" err="1">
+                <a:latin typeface="+mj-lt"/>
+              </a:rPr>
+              <a:t>lượng</a:t>
+            </a:r>
+            <a:r>
+              <a:rPr lang="vi-VN" sz="1300" dirty="0">
+                <a:latin typeface="+mj-lt"/>
+              </a:rPr>
+              <a:t> </a:t>
+            </a:r>
+            <a:r>
+              <a:rPr lang="vi-VN" sz="1300" dirty="0" err="1">
+                <a:latin typeface="+mj-lt"/>
+              </a:rPr>
+              <a:t>lớn</a:t>
+            </a:r>
+            <a:r>
+              <a:rPr lang="vi-VN" sz="1300" dirty="0">
+                <a:latin typeface="+mj-lt"/>
+              </a:rPr>
+              <a:t>.</a:t>
+            </a:r>
+          </a:p>
+          <a:p>
+            <a:pPr marL="0" indent="0">
+              <a:spcAft>
+                <a:spcPts val="1000"/>
+              </a:spcAft>
+              <a:buNone/>
+              <a:defRPr sz="1900">
+                <a:solidFill>
+                  <a:srgbClr val="1E293B"/>
+                </a:solidFill>
+              </a:defRPr>
+            </a:pPr>
+            <a:r>
+              <a:rPr lang="vi-VN" sz="1300" dirty="0">
+                <a:latin typeface="+mj-lt"/>
+              </a:rPr>
+              <a:t>• </a:t>
+            </a:r>
+            <a:r>
+              <a:rPr lang="vi-VN" sz="1300" dirty="0" err="1">
+                <a:latin typeface="+mj-lt"/>
+              </a:rPr>
+              <a:t>Nhóm</a:t>
+            </a:r>
+            <a:r>
+              <a:rPr lang="vi-VN" sz="1300" dirty="0">
+                <a:latin typeface="+mj-lt"/>
+              </a:rPr>
+              <a:t> </a:t>
+            </a:r>
+            <a:r>
+              <a:rPr lang="vi-VN" sz="1300" dirty="0" err="1">
+                <a:latin typeface="+mj-lt"/>
+              </a:rPr>
+              <a:t>thực</a:t>
+            </a:r>
+            <a:r>
+              <a:rPr lang="vi-VN" sz="1300" dirty="0">
+                <a:latin typeface="+mj-lt"/>
+              </a:rPr>
+              <a:t> </a:t>
+            </a:r>
+            <a:r>
+              <a:rPr lang="vi-VN" sz="1300" dirty="0" err="1">
+                <a:latin typeface="+mj-lt"/>
+              </a:rPr>
+              <a:t>hiện</a:t>
+            </a:r>
+            <a:r>
+              <a:rPr lang="vi-VN" sz="1300" dirty="0">
+                <a:latin typeface="+mj-lt"/>
+              </a:rPr>
+              <a:t> </a:t>
+            </a:r>
+            <a:r>
+              <a:rPr lang="vi-VN" sz="1300" dirty="0" err="1">
+                <a:latin typeface="+mj-lt"/>
+              </a:rPr>
+              <a:t>đề</a:t>
+            </a:r>
+            <a:r>
+              <a:rPr lang="vi-VN" sz="1300" dirty="0">
+                <a:latin typeface="+mj-lt"/>
+              </a:rPr>
+              <a:t> </a:t>
+            </a:r>
+            <a:r>
+              <a:rPr lang="vi-VN" sz="1300" dirty="0" err="1">
+                <a:latin typeface="+mj-lt"/>
+              </a:rPr>
+              <a:t>tài</a:t>
+            </a:r>
+            <a:r>
+              <a:rPr lang="vi-VN" sz="1300" dirty="0">
+                <a:latin typeface="+mj-lt"/>
+              </a:rPr>
+              <a:t> </a:t>
+            </a:r>
+            <a:r>
+              <a:rPr lang="vi-VN" sz="1300" dirty="0" err="1">
+                <a:latin typeface="+mj-lt"/>
+              </a:rPr>
+              <a:t>nhằm</a:t>
+            </a:r>
+            <a:r>
+              <a:rPr lang="vi-VN" sz="1300" dirty="0">
+                <a:latin typeface="+mj-lt"/>
+              </a:rPr>
+              <a:t> nghiên </a:t>
+            </a:r>
+            <a:r>
+              <a:rPr lang="vi-VN" sz="1300" dirty="0" err="1">
+                <a:latin typeface="+mj-lt"/>
+              </a:rPr>
+              <a:t>cứu</a:t>
+            </a:r>
+            <a:r>
+              <a:rPr lang="vi-VN" sz="1300" dirty="0">
+                <a:latin typeface="+mj-lt"/>
+              </a:rPr>
+              <a:t> </a:t>
+            </a:r>
+            <a:r>
+              <a:rPr lang="vi-VN" sz="1300" dirty="0" err="1">
+                <a:latin typeface="+mj-lt"/>
+              </a:rPr>
+              <a:t>và</a:t>
+            </a:r>
+            <a:r>
+              <a:rPr lang="vi-VN" sz="1300" dirty="0">
+                <a:latin typeface="+mj-lt"/>
+              </a:rPr>
+              <a:t> xây </a:t>
+            </a:r>
+            <a:r>
+              <a:rPr lang="vi-VN" sz="1300" dirty="0" err="1">
+                <a:latin typeface="+mj-lt"/>
+              </a:rPr>
+              <a:t>dựng</a:t>
+            </a:r>
+            <a:r>
+              <a:rPr lang="vi-VN" sz="1300" dirty="0">
+                <a:latin typeface="+mj-lt"/>
+              </a:rPr>
+              <a:t> </a:t>
+            </a:r>
+            <a:r>
+              <a:rPr lang="vi-VN" sz="1300" dirty="0" err="1">
+                <a:latin typeface="+mj-lt"/>
+              </a:rPr>
+              <a:t>một</a:t>
+            </a:r>
+            <a:r>
+              <a:rPr lang="vi-VN" sz="1300" dirty="0">
+                <a:latin typeface="+mj-lt"/>
+              </a:rPr>
+              <a:t> </a:t>
+            </a:r>
+            <a:r>
+              <a:rPr lang="vi-VN" sz="1300" dirty="0" err="1">
+                <a:latin typeface="+mj-lt"/>
+              </a:rPr>
+              <a:t>hệ</a:t>
+            </a:r>
+            <a:r>
+              <a:rPr lang="vi-VN" sz="1300" dirty="0">
+                <a:latin typeface="+mj-lt"/>
+              </a:rPr>
+              <a:t> </a:t>
+            </a:r>
+            <a:r>
+              <a:rPr lang="vi-VN" sz="1300" dirty="0" err="1">
+                <a:latin typeface="+mj-lt"/>
+              </a:rPr>
+              <a:t>thống</a:t>
+            </a:r>
+            <a:r>
+              <a:rPr lang="vi-VN" sz="1300" dirty="0">
+                <a:latin typeface="+mj-lt"/>
+              </a:rPr>
+              <a:t> </a:t>
+            </a:r>
+            <a:r>
+              <a:rPr lang="vi-VN" sz="1300" dirty="0" err="1">
+                <a:latin typeface="+mj-lt"/>
+              </a:rPr>
+              <a:t>đặt</a:t>
+            </a:r>
+            <a:r>
+              <a:rPr lang="vi-VN" sz="1300" dirty="0">
+                <a:latin typeface="+mj-lt"/>
+              </a:rPr>
+              <a:t> xe </a:t>
+            </a:r>
+            <a:r>
+              <a:rPr lang="vi-VN" sz="1300" dirty="0" err="1">
+                <a:latin typeface="+mj-lt"/>
+              </a:rPr>
+              <a:t>hoàn</a:t>
+            </a:r>
+            <a:r>
+              <a:rPr lang="vi-VN" sz="1300" dirty="0">
+                <a:latin typeface="+mj-lt"/>
+              </a:rPr>
+              <a:t> </a:t>
+            </a:r>
+            <a:r>
+              <a:rPr lang="vi-VN" sz="1300" dirty="0" err="1">
+                <a:latin typeface="+mj-lt"/>
+              </a:rPr>
+              <a:t>chỉnh</a:t>
+            </a:r>
+            <a:r>
+              <a:rPr lang="vi-VN" sz="1300" dirty="0">
+                <a:latin typeface="+mj-lt"/>
+              </a:rPr>
+              <a:t> theo </a:t>
+            </a:r>
+            <a:r>
+              <a:rPr lang="vi-VN" sz="1300" dirty="0" err="1">
+                <a:latin typeface="+mj-lt"/>
+              </a:rPr>
+              <a:t>hướng</a:t>
+            </a:r>
+            <a:r>
+              <a:rPr lang="vi-VN" sz="1300" dirty="0">
+                <a:latin typeface="+mj-lt"/>
+              </a:rPr>
+              <a:t> </a:t>
+            </a:r>
+            <a:r>
+              <a:rPr lang="vi-VN" sz="1300" dirty="0" err="1">
+                <a:latin typeface="+mj-lt"/>
+              </a:rPr>
+              <a:t>hiện</a:t>
+            </a:r>
+            <a:r>
+              <a:rPr lang="vi-VN" sz="1300" dirty="0">
+                <a:latin typeface="+mj-lt"/>
+              </a:rPr>
+              <a:t> </a:t>
+            </a:r>
+            <a:r>
+              <a:rPr lang="vi-VN" sz="1300" dirty="0" err="1">
+                <a:latin typeface="+mj-lt"/>
+              </a:rPr>
+              <a:t>đại</a:t>
+            </a:r>
+            <a:r>
+              <a:rPr lang="vi-VN" sz="1300" dirty="0">
+                <a:latin typeface="+mj-lt"/>
+              </a:rPr>
+              <a:t>, mô </a:t>
+            </a:r>
+            <a:r>
+              <a:rPr lang="vi-VN" sz="1300" dirty="0" err="1">
+                <a:latin typeface="+mj-lt"/>
+              </a:rPr>
+              <a:t>phỏng</a:t>
+            </a:r>
+            <a:r>
+              <a:rPr lang="vi-VN" sz="1300" dirty="0">
+                <a:latin typeface="+mj-lt"/>
+              </a:rPr>
+              <a:t> mô </a:t>
+            </a:r>
+            <a:r>
+              <a:rPr lang="vi-VN" sz="1300" dirty="0" err="1">
+                <a:latin typeface="+mj-lt"/>
+              </a:rPr>
+              <a:t>hình</a:t>
+            </a:r>
+            <a:r>
+              <a:rPr lang="vi-VN" sz="1300" dirty="0">
+                <a:latin typeface="+mj-lt"/>
+              </a:rPr>
+              <a:t> </a:t>
+            </a:r>
+            <a:r>
+              <a:rPr lang="vi-VN" sz="1300" dirty="0" err="1">
+                <a:latin typeface="+mj-lt"/>
+              </a:rPr>
+              <a:t>vận</a:t>
+            </a:r>
+            <a:r>
+              <a:rPr lang="vi-VN" sz="1300" dirty="0">
+                <a:latin typeface="+mj-lt"/>
+              </a:rPr>
+              <a:t> </a:t>
+            </a:r>
+            <a:r>
+              <a:rPr lang="vi-VN" sz="1300" dirty="0" err="1">
+                <a:latin typeface="+mj-lt"/>
+              </a:rPr>
+              <a:t>hành</a:t>
+            </a:r>
+            <a:r>
+              <a:rPr lang="vi-VN" sz="1300" dirty="0">
+                <a:latin typeface="+mj-lt"/>
+              </a:rPr>
+              <a:t> </a:t>
+            </a:r>
+            <a:r>
+              <a:rPr lang="vi-VN" sz="1300" dirty="0" err="1">
+                <a:latin typeface="+mj-lt"/>
+              </a:rPr>
+              <a:t>thực</a:t>
+            </a:r>
+            <a:r>
+              <a:rPr lang="vi-VN" sz="1300" dirty="0">
+                <a:latin typeface="+mj-lt"/>
+              </a:rPr>
+              <a:t> </a:t>
+            </a:r>
+            <a:r>
+              <a:rPr lang="vi-VN" sz="1300" dirty="0" err="1">
+                <a:latin typeface="+mj-lt"/>
+              </a:rPr>
+              <a:t>tế</a:t>
+            </a:r>
+            <a:r>
+              <a:rPr lang="vi-VN" sz="1300" dirty="0">
+                <a:latin typeface="+mj-lt"/>
+              </a:rPr>
+              <a:t> </a:t>
+            </a:r>
+            <a:r>
+              <a:rPr lang="vi-VN" sz="1300" dirty="0" err="1">
+                <a:latin typeface="+mj-lt"/>
+              </a:rPr>
+              <a:t>của</a:t>
+            </a:r>
+            <a:r>
+              <a:rPr lang="vi-VN" sz="1300" dirty="0">
+                <a:latin typeface="+mj-lt"/>
+              </a:rPr>
+              <a:t> </a:t>
+            </a:r>
+            <a:r>
+              <a:rPr lang="vi-VN" sz="1300" dirty="0" err="1">
+                <a:latin typeface="+mj-lt"/>
+              </a:rPr>
+              <a:t>các</a:t>
+            </a:r>
+            <a:r>
+              <a:rPr lang="vi-VN" sz="1300" dirty="0">
+                <a:latin typeface="+mj-lt"/>
+              </a:rPr>
+              <a:t> </a:t>
+            </a:r>
+            <a:r>
+              <a:rPr lang="vi-VN" sz="1300" dirty="0" err="1">
+                <a:latin typeface="+mj-lt"/>
+              </a:rPr>
+              <a:t>nền</a:t>
+            </a:r>
+            <a:r>
+              <a:rPr lang="vi-VN" sz="1300" dirty="0">
+                <a:latin typeface="+mj-lt"/>
+              </a:rPr>
+              <a:t> </a:t>
+            </a:r>
+            <a:r>
+              <a:rPr lang="vi-VN" sz="1300" dirty="0" err="1">
+                <a:latin typeface="+mj-lt"/>
+              </a:rPr>
+              <a:t>tảng</a:t>
+            </a:r>
+            <a:r>
+              <a:rPr lang="vi-VN" sz="1300" dirty="0">
+                <a:latin typeface="+mj-lt"/>
+              </a:rPr>
+              <a:t> </a:t>
+            </a:r>
+            <a:r>
+              <a:rPr lang="vi-VN" sz="1300" dirty="0" err="1">
+                <a:latin typeface="+mj-lt"/>
+              </a:rPr>
+              <a:t>ride-hailing</a:t>
+            </a:r>
+            <a:r>
+              <a:rPr lang="vi-VN" sz="1300" dirty="0">
+                <a:latin typeface="+mj-lt"/>
+              </a:rPr>
+              <a:t> </a:t>
+            </a:r>
+            <a:r>
+              <a:rPr lang="vi-VN" sz="1300" dirty="0" err="1">
+                <a:latin typeface="+mj-lt"/>
+              </a:rPr>
+              <a:t>hiện</a:t>
+            </a:r>
+            <a:r>
+              <a:rPr lang="vi-VN" sz="1300" dirty="0">
+                <a:latin typeface="+mj-lt"/>
+              </a:rPr>
+              <a:t> nay.</a:t>
+            </a:r>
+          </a:p>
+          <a:p>
+            <a:pPr marL="0" indent="0">
+              <a:spcAft>
+                <a:spcPts val="1000"/>
+              </a:spcAft>
+              <a:buNone/>
+              <a:defRPr sz="1900">
+                <a:solidFill>
+                  <a:srgbClr val="1E293B"/>
+                </a:solidFill>
+              </a:defRPr>
+            </a:pPr>
+            <a:r>
+              <a:rPr lang="vi-VN" sz="1300" dirty="0">
+                <a:latin typeface="+mj-lt"/>
+              </a:rPr>
+              <a:t>• </a:t>
+            </a:r>
+            <a:r>
+              <a:rPr lang="vi-VN" sz="1300" dirty="0" err="1">
+                <a:latin typeface="+mj-lt"/>
+              </a:rPr>
+              <a:t>Đề</a:t>
+            </a:r>
+            <a:r>
+              <a:rPr lang="vi-VN" sz="1300" dirty="0">
+                <a:latin typeface="+mj-lt"/>
+              </a:rPr>
+              <a:t> </a:t>
+            </a:r>
+            <a:r>
+              <a:rPr lang="vi-VN" sz="1300" dirty="0" err="1">
+                <a:latin typeface="+mj-lt"/>
+              </a:rPr>
+              <a:t>tài</a:t>
+            </a:r>
+            <a:r>
+              <a:rPr lang="vi-VN" sz="1300" dirty="0">
+                <a:latin typeface="+mj-lt"/>
+              </a:rPr>
+              <a:t> </a:t>
+            </a:r>
+            <a:r>
+              <a:rPr lang="vi-VN" sz="1300" dirty="0" err="1">
+                <a:latin typeface="+mj-lt"/>
+              </a:rPr>
+              <a:t>đồng</a:t>
+            </a:r>
+            <a:r>
+              <a:rPr lang="vi-VN" sz="1300" dirty="0">
+                <a:latin typeface="+mj-lt"/>
+              </a:rPr>
+              <a:t> </a:t>
+            </a:r>
+            <a:r>
+              <a:rPr lang="vi-VN" sz="1300" dirty="0" err="1">
+                <a:latin typeface="+mj-lt"/>
+              </a:rPr>
+              <a:t>thời</a:t>
+            </a:r>
+            <a:r>
+              <a:rPr lang="vi-VN" sz="1300" dirty="0">
+                <a:latin typeface="+mj-lt"/>
+              </a:rPr>
+              <a:t> </a:t>
+            </a:r>
+            <a:r>
+              <a:rPr lang="vi-VN" sz="1300" dirty="0" err="1">
+                <a:latin typeface="+mj-lt"/>
+              </a:rPr>
+              <a:t>tập</a:t>
+            </a:r>
+            <a:r>
+              <a:rPr lang="vi-VN" sz="1300" dirty="0">
+                <a:latin typeface="+mj-lt"/>
+              </a:rPr>
+              <a:t> trung </a:t>
+            </a:r>
+            <a:r>
+              <a:rPr lang="vi-VN" sz="1300" dirty="0" err="1">
+                <a:latin typeface="+mj-lt"/>
+              </a:rPr>
+              <a:t>vào</a:t>
+            </a:r>
+            <a:r>
+              <a:rPr lang="vi-VN" sz="1300" dirty="0">
+                <a:latin typeface="+mj-lt"/>
+              </a:rPr>
+              <a:t> </a:t>
+            </a:r>
+            <a:r>
+              <a:rPr lang="vi-VN" sz="1300" dirty="0" err="1">
+                <a:latin typeface="+mj-lt"/>
+              </a:rPr>
+              <a:t>khả</a:t>
+            </a:r>
+            <a:r>
+              <a:rPr lang="vi-VN" sz="1300" dirty="0">
+                <a:latin typeface="+mj-lt"/>
+              </a:rPr>
+              <a:t> năng </a:t>
+            </a:r>
+            <a:r>
+              <a:rPr lang="vi-VN" sz="1300" dirty="0" err="1">
+                <a:latin typeface="+mj-lt"/>
+              </a:rPr>
+              <a:t>ứng</a:t>
+            </a:r>
+            <a:r>
+              <a:rPr lang="vi-VN" sz="1300" dirty="0">
+                <a:latin typeface="+mj-lt"/>
+              </a:rPr>
+              <a:t> </a:t>
+            </a:r>
+            <a:r>
+              <a:rPr lang="vi-VN" sz="1300" dirty="0" err="1">
+                <a:latin typeface="+mj-lt"/>
+              </a:rPr>
+              <a:t>dụng</a:t>
+            </a:r>
+            <a:r>
+              <a:rPr lang="vi-VN" sz="1300" dirty="0">
+                <a:latin typeface="+mj-lt"/>
+              </a:rPr>
+              <a:t> AI, </a:t>
+            </a:r>
+            <a:r>
+              <a:rPr lang="vi-VN" sz="1300" dirty="0" err="1">
+                <a:latin typeface="+mj-lt"/>
+              </a:rPr>
+              <a:t>microservices</a:t>
+            </a:r>
+            <a:r>
+              <a:rPr lang="vi-VN" sz="1300" dirty="0">
+                <a:latin typeface="+mj-lt"/>
+              </a:rPr>
+              <a:t>, </a:t>
+            </a:r>
+            <a:r>
+              <a:rPr lang="vi-VN" sz="1300" dirty="0" err="1">
+                <a:latin typeface="+mj-lt"/>
+              </a:rPr>
+              <a:t>cloud</a:t>
+            </a:r>
+            <a:r>
+              <a:rPr lang="vi-VN" sz="1300" dirty="0">
+                <a:latin typeface="+mj-lt"/>
+              </a:rPr>
+              <a:t> </a:t>
+            </a:r>
+            <a:r>
+              <a:rPr lang="vi-VN" sz="1300" dirty="0" err="1">
+                <a:latin typeface="+mj-lt"/>
+              </a:rPr>
+              <a:t>deployment</a:t>
+            </a:r>
+            <a:r>
+              <a:rPr lang="vi-VN" sz="1300" dirty="0">
+                <a:latin typeface="+mj-lt"/>
+              </a:rPr>
+              <a:t> trong </a:t>
+            </a:r>
+            <a:r>
+              <a:rPr lang="vi-VN" sz="1300" dirty="0" err="1">
+                <a:latin typeface="+mj-lt"/>
+              </a:rPr>
+              <a:t>một</a:t>
+            </a:r>
+            <a:r>
+              <a:rPr lang="vi-VN" sz="1300" dirty="0">
+                <a:latin typeface="+mj-lt"/>
+              </a:rPr>
+              <a:t> </a:t>
+            </a:r>
+            <a:r>
+              <a:rPr lang="vi-VN" sz="1300" dirty="0" err="1">
+                <a:latin typeface="+mj-lt"/>
+              </a:rPr>
+              <a:t>hệ</a:t>
+            </a:r>
+            <a:r>
+              <a:rPr lang="vi-VN" sz="1300" dirty="0">
+                <a:latin typeface="+mj-lt"/>
+              </a:rPr>
+              <a:t> </a:t>
+            </a:r>
+            <a:r>
+              <a:rPr lang="vi-VN" sz="1300" dirty="0" err="1">
+                <a:latin typeface="+mj-lt"/>
+              </a:rPr>
+              <a:t>thống</a:t>
+            </a:r>
+            <a:r>
+              <a:rPr lang="vi-VN" sz="1300" dirty="0">
+                <a:latin typeface="+mj-lt"/>
+              </a:rPr>
+              <a:t> </a:t>
+            </a:r>
+            <a:r>
+              <a:rPr lang="vi-VN" sz="1300" dirty="0" err="1">
+                <a:latin typeface="+mj-lt"/>
+              </a:rPr>
+              <a:t>thống</a:t>
+            </a:r>
+            <a:r>
+              <a:rPr lang="vi-VN" sz="1300" dirty="0">
+                <a:latin typeface="+mj-lt"/>
+              </a:rPr>
+              <a:t> </a:t>
+            </a:r>
+            <a:r>
+              <a:rPr lang="vi-VN" sz="1300" dirty="0" err="1">
+                <a:latin typeface="+mj-lt"/>
+              </a:rPr>
+              <a:t>nhất</a:t>
+            </a:r>
+            <a:r>
+              <a:rPr lang="vi-VN" sz="1300" dirty="0">
+                <a:latin typeface="+mj-lt"/>
+              </a:rPr>
+              <a:t>.</a:t>
+            </a:r>
+          </a:p>
+        </p:txBody>
+      </p:sp>
+    </p:spTree>
+  </p:cSld>
+  <p:clrMapOvr>
+    <a:masterClrMapping/>
+  </p:clrMapOvr>
+</p:sld>
+</file>
+
+<file path=ppt/slides/slide30.xml><?xml version="1.0" encoding="utf-8"?>
+<p:sld xmlns:a="http://schemas.openxmlformats.org/drawingml/2006/main" xmlns:r="http://schemas.openxmlformats.org/officeDocument/2006/relationships" xmlns:p="http://schemas.openxmlformats.org/presentationml/2006/main">
+  <p:cSld>
+    <p:spTree>
+      <p:nvGrpSpPr>
+        <p:cNvPr id="1" name=""/>
+        <p:cNvGrpSpPr/>
+        <p:nvPr/>
+      </p:nvGrpSpPr>
+      <p:grpSpPr>
+        <a:xfrm>
+          <a:off x="0" y="0"/>
+          <a:ext cx="0" cy="0"/>
+          <a:chOff x="0" y="0"/>
+          <a:chExt cx="0" cy="0"/>
+        </a:xfrm>
+      </p:grpSpPr>
       <p:sp>
         <p:nvSpPr>
           <p:cNvPr id="2" name="TextBox 1"/>
@@ -4944,8 +8967,8 @@
 </p:sld>
 </file>
 
-<file path=ppt/slides/slide3.xml><?xml version="1.0" encoding="utf-8"?>
-<p:sld xmlns:a="http://schemas.openxmlformats.org/drawingml/2006/main" xmlns:p="http://schemas.openxmlformats.org/presentationml/2006/main" xmlns:r="http://schemas.openxmlformats.org/officeDocument/2006/relationships">
+<file path=ppt/slides/slide31.xml><?xml version="1.0" encoding="utf-8"?>
+<p:sld xmlns:a="http://schemas.openxmlformats.org/drawingml/2006/main" xmlns:r="http://schemas.openxmlformats.org/officeDocument/2006/relationships" xmlns:p="http://schemas.openxmlformats.org/presentationml/2006/main">
   <p:cSld>
     <p:spTree>
       <p:nvGrpSpPr>
@@ -4953,7 +8976,14 @@
         <p:cNvGrpSpPr/>
         <p:nvPr/>
       </p:nvGrpSpPr>
-      <p:grpSpPr/>
+      <p:grpSpPr>
+        <a:xfrm>
+          <a:off x="0" y="0"/>
+          <a:ext cx="0" cy="0"/>
+          <a:chOff x="0" y="0"/>
+          <a:chExt cx="0" cy="0"/>
+        </a:xfrm>
+      </p:grpSpPr>
       <p:sp>
         <p:nvSpPr>
           <p:cNvPr id="2" name="Title 1"/>
@@ -4973,7 +9003,56 @@
               <a:defRPr sz="2000"/>
             </a:pPr>
             <a:r>
-              <a:t>1. Đặt vấn đề (Problem and scope)</a:t>
+              <a:rPr dirty="0"/>
+              <a:t>10. </a:t>
+            </a:r>
+            <a:r>
+              <a:rPr dirty="0" err="1"/>
+              <a:t>Tối</a:t>
+            </a:r>
+            <a:r>
+              <a:rPr dirty="0"/>
+              <a:t> </a:t>
+            </a:r>
+            <a:r>
+              <a:rPr dirty="0" err="1"/>
+              <a:t>ưu</a:t>
+            </a:r>
+            <a:r>
+              <a:rPr dirty="0"/>
+              <a:t> </a:t>
+            </a:r>
+            <a:r>
+              <a:rPr dirty="0" err="1"/>
+              <a:t>kiến</a:t>
+            </a:r>
+            <a:r>
+              <a:rPr dirty="0"/>
+              <a:t> </a:t>
+            </a:r>
+            <a:r>
+              <a:rPr dirty="0" err="1"/>
+              <a:t>trúc</a:t>
+            </a:r>
+            <a:r>
+              <a:rPr dirty="0"/>
+              <a:t> </a:t>
+            </a:r>
+            <a:r>
+              <a:rPr dirty="0" err="1"/>
+              <a:t>giao</a:t>
+            </a:r>
+            <a:r>
+              <a:rPr dirty="0"/>
+              <a:t> </a:t>
+            </a:r>
+            <a:r>
+              <a:rPr dirty="0" err="1"/>
+              <a:t>dịch</a:t>
+            </a:r>
+            <a:r>
+              <a:rPr dirty="0"/>
+              <a:t> (Transaction process — MSA)</a:t>
             </a:r>
           </a:p>
         </p:txBody>
@@ -4990,7 +9069,7 @@
         </p:nvSpPr>
         <p:spPr/>
         <p:txBody>
-          <a:bodyPr wrap="square" bIns="73152" lIns="45720"/>
+          <a:bodyPr wrap="square" lIns="45720" bIns="73152"/>
           <a:lstStyle/>
           <a:p>
             <a:pPr>
@@ -5000,7 +9079,7 @@
               <a:defRPr sz="1100"/>
             </a:pPr>
             <a:r>
-              <a:t>(fresher level)</a:t>
+              <a:t>(senior level)</a:t>
             </a:r>
           </a:p>
           <a:p>
@@ -5011,7 +9090,7 @@
               <a:defRPr sz="1100"/>
             </a:pPr>
             <a:r>
-              <a:t>Mô tả bài toán và phạm vi ngắn gọn không nên đọc slide, nên dùng danh sách gạch đầu dòng liệt kê ý chính và tự thuyết minh chi tiết.</a:t>
+              <a:t>Nên dùng hình ảnh tự vẽ theo hệ thống của dự án và tự thuyết minh diễn giải.</a:t>
             </a:r>
           </a:p>
         </p:txBody>
@@ -5024,8 +9103,8 @@
 </p:sld>
 </file>
 
-<file path=ppt/slides/slide30.xml><?xml version="1.0" encoding="utf-8"?>
-<p:sld xmlns:a="http://schemas.openxmlformats.org/drawingml/2006/main" xmlns:p="http://schemas.openxmlformats.org/presentationml/2006/main" xmlns:r="http://schemas.openxmlformats.org/officeDocument/2006/relationships">
+<file path=ppt/slides/slide32.xml><?xml version="1.0" encoding="utf-8"?>
+<p:sld xmlns:a="http://schemas.openxmlformats.org/drawingml/2006/main" xmlns:r="http://schemas.openxmlformats.org/officeDocument/2006/relationships" xmlns:p="http://schemas.openxmlformats.org/presentationml/2006/main">
   <p:cSld>
     <p:spTree>
       <p:nvGrpSpPr>
@@ -5033,87 +9112,14 @@
         <p:cNvGrpSpPr/>
         <p:nvPr/>
       </p:nvGrpSpPr>
-      <p:grpSpPr/>
-      <p:sp>
-        <p:nvSpPr>
-          <p:cNvPr id="2" name="Title 1"/>
-          <p:cNvSpPr>
-            <a:spLocks noGrp="1"/>
-          </p:cNvSpPr>
-          <p:nvPr>
-            <p:ph type="title"/>
-          </p:nvPr>
-        </p:nvSpPr>
-        <p:spPr/>
-        <p:txBody>
-          <a:bodyPr wrap="square"/>
-          <a:lstStyle/>
-          <a:p>
-            <a:pPr>
-              <a:defRPr sz="2000"/>
-            </a:pPr>
-            <a:r>
-              <a:t>10. (tùy chọn) Tối ưu kiến trúc giao dịch (Transaction process — MSA)</a:t>
-            </a:r>
-          </a:p>
-        </p:txBody>
-      </p:sp>
-      <p:sp>
-        <p:nvSpPr>
-          <p:cNvPr id="3" name="Content Placeholder 2"/>
-          <p:cNvSpPr>
-            <a:spLocks noGrp="1"/>
-          </p:cNvSpPr>
-          <p:nvPr>
-            <p:ph idx="1"/>
-          </p:nvPr>
-        </p:nvSpPr>
-        <p:spPr/>
-        <p:txBody>
-          <a:bodyPr wrap="square" bIns="73152" lIns="45720"/>
-          <a:lstStyle/>
-          <a:p>
-            <a:pPr>
-              <a:spcAft>
-                <a:spcPts val="300"/>
-              </a:spcAft>
-              <a:defRPr sz="1100"/>
-            </a:pPr>
-            <a:r>
-              <a:t>(senior level)</a:t>
-            </a:r>
-          </a:p>
-          <a:p>
-            <a:pPr>
-              <a:spcAft>
-                <a:spcPts val="300"/>
-              </a:spcAft>
-              <a:defRPr sz="1100"/>
-            </a:pPr>
-            <a:r>
-              <a:t>Nên dùng hình ảnh tự vẽ theo hệ thống của dự án và tự thuyết minh diễn giải.</a:t>
-            </a:r>
-          </a:p>
-        </p:txBody>
-      </p:sp>
-    </p:spTree>
-  </p:cSld>
-  <p:clrMapOvr>
-    <a:masterClrMapping/>
-  </p:clrMapOvr>
-</p:sld>
-</file>
-
-<file path=ppt/slides/slide31.xml><?xml version="1.0" encoding="utf-8"?>
-<p:sld xmlns:a="http://schemas.openxmlformats.org/drawingml/2006/main" xmlns:p="http://schemas.openxmlformats.org/presentationml/2006/main" xmlns:r="http://schemas.openxmlformats.org/officeDocument/2006/relationships">
-  <p:cSld>
-    <p:spTree>
-      <p:nvGrpSpPr>
-        <p:cNvPr id="1" name=""/>
-        <p:cNvGrpSpPr/>
-        <p:nvPr/>
-      </p:nvGrpSpPr>
-      <p:grpSpPr/>
+      <p:grpSpPr>
+        <a:xfrm>
+          <a:off x="0" y="0"/>
+          <a:ext cx="0" cy="0"/>
+          <a:chOff x="0" y="0"/>
+          <a:chExt cx="0" cy="0"/>
+        </a:xfrm>
+      </p:grpSpPr>
       <p:sp>
         <p:nvSpPr>
           <p:cNvPr id="2" name="TextBox 1"/>
@@ -5177,8 +9183,8 @@
 </p:sld>
 </file>
 
-<file path=ppt/slides/slide32.xml><?xml version="1.0" encoding="utf-8"?>
-<p:sld xmlns:a="http://schemas.openxmlformats.org/drawingml/2006/main" xmlns:p="http://schemas.openxmlformats.org/presentationml/2006/main" xmlns:r="http://schemas.openxmlformats.org/officeDocument/2006/relationships">
+<file path=ppt/slides/slide33.xml><?xml version="1.0" encoding="utf-8"?>
+<p:sld xmlns:a="http://schemas.openxmlformats.org/drawingml/2006/main" xmlns:r="http://schemas.openxmlformats.org/officeDocument/2006/relationships" xmlns:p="http://schemas.openxmlformats.org/presentationml/2006/main">
   <p:cSld>
     <p:spTree>
       <p:nvGrpSpPr>
@@ -5186,7 +9192,14 @@
         <p:cNvGrpSpPr/>
         <p:nvPr/>
       </p:nvGrpSpPr>
-      <p:grpSpPr/>
+      <p:grpSpPr>
+        <a:xfrm>
+          <a:off x="0" y="0"/>
+          <a:ext cx="0" cy="0"/>
+          <a:chOff x="0" y="0"/>
+          <a:chExt cx="0" cy="0"/>
+        </a:xfrm>
+      </p:grpSpPr>
       <p:sp>
         <p:nvSpPr>
           <p:cNvPr id="2" name="TextBox 1"/>
@@ -5250,8 +9263,8 @@
 </p:sld>
 </file>
 
-<file path=ppt/slides/slide33.xml><?xml version="1.0" encoding="utf-8"?>
-<p:sld xmlns:a="http://schemas.openxmlformats.org/drawingml/2006/main" xmlns:p="http://schemas.openxmlformats.org/presentationml/2006/main" xmlns:r="http://schemas.openxmlformats.org/officeDocument/2006/relationships">
+<file path=ppt/slides/slide34.xml><?xml version="1.0" encoding="utf-8"?>
+<p:sld xmlns:a="http://schemas.openxmlformats.org/drawingml/2006/main" xmlns:r="http://schemas.openxmlformats.org/officeDocument/2006/relationships" xmlns:p="http://schemas.openxmlformats.org/presentationml/2006/main">
   <p:cSld>
     <p:spTree>
       <p:nvGrpSpPr>
@@ -5259,7 +9272,14 @@
         <p:cNvGrpSpPr/>
         <p:nvPr/>
       </p:nvGrpSpPr>
-      <p:grpSpPr/>
+      <p:grpSpPr>
+        <a:xfrm>
+          <a:off x="0" y="0"/>
+          <a:ext cx="0" cy="0"/>
+          <a:chOff x="0" y="0"/>
+          <a:chExt cx="0" cy="0"/>
+        </a:xfrm>
+      </p:grpSpPr>
       <p:sp>
         <p:nvSpPr>
           <p:cNvPr id="2" name="TextBox 1"/>
@@ -5323,8 +9343,8 @@
 </p:sld>
 </file>
 
-<file path=ppt/slides/slide34.xml><?xml version="1.0" encoding="utf-8"?>
-<p:sld xmlns:a="http://schemas.openxmlformats.org/drawingml/2006/main" xmlns:p="http://schemas.openxmlformats.org/presentationml/2006/main" xmlns:r="http://schemas.openxmlformats.org/officeDocument/2006/relationships">
+<file path=ppt/slides/slide35.xml><?xml version="1.0" encoding="utf-8"?>
+<p:sld xmlns:a="http://schemas.openxmlformats.org/drawingml/2006/main" xmlns:r="http://schemas.openxmlformats.org/officeDocument/2006/relationships" xmlns:p="http://schemas.openxmlformats.org/presentationml/2006/main">
   <p:cSld>
     <p:spTree>
       <p:nvGrpSpPr>
@@ -5332,7 +9352,14 @@
         <p:cNvGrpSpPr/>
         <p:nvPr/>
       </p:nvGrpSpPr>
-      <p:grpSpPr/>
+      <p:grpSpPr>
+        <a:xfrm>
+          <a:off x="0" y="0"/>
+          <a:ext cx="0" cy="0"/>
+          <a:chOff x="0" y="0"/>
+          <a:chExt cx="0" cy="0"/>
+        </a:xfrm>
+      </p:grpSpPr>
       <p:sp>
         <p:nvSpPr>
           <p:cNvPr id="2" name="Title 1"/>
@@ -5352,7 +9379,80 @@
               <a:defRPr sz="2000"/>
             </a:pPr>
             <a:r>
-              <a:t>11. (tùy chọn) Tối ưu hóa hệ thống đáp ứng nhu cầu (System scalability)</a:t>
+              <a:rPr dirty="0"/>
+              <a:t>11. </a:t>
+            </a:r>
+            <a:r>
+              <a:rPr dirty="0" err="1"/>
+              <a:t>Tối</a:t>
+            </a:r>
+            <a:r>
+              <a:rPr dirty="0"/>
+              <a:t> </a:t>
+            </a:r>
+            <a:r>
+              <a:rPr dirty="0" err="1"/>
+              <a:t>ưu</a:t>
+            </a:r>
+            <a:r>
+              <a:rPr dirty="0"/>
+              <a:t> </a:t>
+            </a:r>
+            <a:r>
+              <a:rPr dirty="0" err="1"/>
+              <a:t>hóa</a:t>
+            </a:r>
+            <a:r>
+              <a:rPr dirty="0"/>
+              <a:t> </a:t>
+            </a:r>
+            <a:r>
+              <a:rPr dirty="0" err="1"/>
+              <a:t>hệ</a:t>
+            </a:r>
+            <a:r>
+              <a:rPr dirty="0"/>
+              <a:t> </a:t>
+            </a:r>
+            <a:r>
+              <a:rPr dirty="0" err="1"/>
+              <a:t>thống</a:t>
+            </a:r>
+            <a:r>
+              <a:rPr dirty="0"/>
+              <a:t> </a:t>
+            </a:r>
+            <a:r>
+              <a:rPr dirty="0" err="1"/>
+              <a:t>đáp</a:t>
+            </a:r>
+            <a:r>
+              <a:rPr dirty="0"/>
+              <a:t> </a:t>
+            </a:r>
+            <a:r>
+              <a:rPr dirty="0" err="1"/>
+              <a:t>ứng</a:t>
+            </a:r>
+            <a:r>
+              <a:rPr dirty="0"/>
+              <a:t> </a:t>
+            </a:r>
+            <a:r>
+              <a:rPr dirty="0" err="1"/>
+              <a:t>nhu</a:t>
+            </a:r>
+            <a:r>
+              <a:rPr dirty="0"/>
+              <a:t> </a:t>
+            </a:r>
+            <a:r>
+              <a:rPr dirty="0" err="1"/>
+              <a:t>cầu</a:t>
+            </a:r>
+            <a:r>
+              <a:rPr dirty="0"/>
+              <a:t> (System scalability)</a:t>
             </a:r>
           </a:p>
         </p:txBody>
@@ -5369,7 +9469,7 @@
         </p:nvSpPr>
         <p:spPr/>
         <p:txBody>
-          <a:bodyPr wrap="square" bIns="73152" lIns="45720"/>
+          <a:bodyPr wrap="square" lIns="45720" bIns="73152"/>
           <a:lstStyle/>
           <a:p>
             <a:pPr>
@@ -5425,8 +9525,8 @@
 </p:sld>
 </file>
 
-<file path=ppt/slides/slide35.xml><?xml version="1.0" encoding="utf-8"?>
-<p:sld xmlns:a="http://schemas.openxmlformats.org/drawingml/2006/main" xmlns:p="http://schemas.openxmlformats.org/presentationml/2006/main" xmlns:r="http://schemas.openxmlformats.org/officeDocument/2006/relationships">
+<file path=ppt/slides/slide36.xml><?xml version="1.0" encoding="utf-8"?>
+<p:sld xmlns:a="http://schemas.openxmlformats.org/drawingml/2006/main" xmlns:r="http://schemas.openxmlformats.org/officeDocument/2006/relationships" xmlns:p="http://schemas.openxmlformats.org/presentationml/2006/main">
   <p:cSld>
     <p:spTree>
       <p:nvGrpSpPr>
@@ -5434,7 +9534,14 @@
         <p:cNvGrpSpPr/>
         <p:nvPr/>
       </p:nvGrpSpPr>
-      <p:grpSpPr/>
+      <p:grpSpPr>
+        <a:xfrm>
+          <a:off x="0" y="0"/>
+          <a:ext cx="0" cy="0"/>
+          <a:chOff x="0" y="0"/>
+          <a:chExt cx="0" cy="0"/>
+        </a:xfrm>
+      </p:grpSpPr>
       <p:sp>
         <p:nvSpPr>
           <p:cNvPr id="2" name="TextBox 1"/>
@@ -5498,8 +9605,8 @@
 </p:sld>
 </file>
 
-<file path=ppt/slides/slide36.xml><?xml version="1.0" encoding="utf-8"?>
-<p:sld xmlns:a="http://schemas.openxmlformats.org/drawingml/2006/main" xmlns:p="http://schemas.openxmlformats.org/presentationml/2006/main" xmlns:r="http://schemas.openxmlformats.org/officeDocument/2006/relationships">
+<file path=ppt/slides/slide37.xml><?xml version="1.0" encoding="utf-8"?>
+<p:sld xmlns:a="http://schemas.openxmlformats.org/drawingml/2006/main" xmlns:r="http://schemas.openxmlformats.org/officeDocument/2006/relationships" xmlns:p="http://schemas.openxmlformats.org/presentationml/2006/main">
   <p:cSld>
     <p:spTree>
       <p:nvGrpSpPr>
@@ -5507,7 +9614,14 @@
         <p:cNvGrpSpPr/>
         <p:nvPr/>
       </p:nvGrpSpPr>
-      <p:grpSpPr/>
+      <p:grpSpPr>
+        <a:xfrm>
+          <a:off x="0" y="0"/>
+          <a:ext cx="0" cy="0"/>
+          <a:chOff x="0" y="0"/>
+          <a:chExt cx="0" cy="0"/>
+        </a:xfrm>
+      </p:grpSpPr>
       <p:sp>
         <p:nvSpPr>
           <p:cNvPr id="2" name="Title 1"/>
@@ -5527,8 +9641,78 @@
               <a:defRPr sz="2000"/>
             </a:pPr>
             <a:r>
-              <a:t>12. (tùy chọn) Tăng cường bảo mật hệ thống và dữ liệu</a:t>
-            </a:r>
+              <a:rPr dirty="0"/>
+              <a:t>12. </a:t>
+            </a:r>
+            <a:r>
+              <a:rPr dirty="0" err="1"/>
+              <a:t>Tăng</a:t>
+            </a:r>
+            <a:r>
+              <a:rPr dirty="0"/>
+              <a:t> </a:t>
+            </a:r>
+            <a:r>
+              <a:rPr dirty="0" err="1"/>
+              <a:t>cường</a:t>
+            </a:r>
+            <a:r>
+              <a:rPr dirty="0"/>
+              <a:t> </a:t>
+            </a:r>
+            <a:r>
+              <a:rPr dirty="0" err="1"/>
+              <a:t>bảo</a:t>
+            </a:r>
+            <a:r>
+              <a:rPr dirty="0"/>
+              <a:t> </a:t>
+            </a:r>
+            <a:r>
+              <a:rPr dirty="0" err="1"/>
+              <a:t>mật</a:t>
+            </a:r>
+            <a:r>
+              <a:rPr dirty="0"/>
+              <a:t> </a:t>
+            </a:r>
+            <a:r>
+              <a:rPr dirty="0" err="1"/>
+              <a:t>hệ</a:t>
+            </a:r>
+            <a:r>
+              <a:rPr dirty="0"/>
+              <a:t> </a:t>
+            </a:r>
+            <a:r>
+              <a:rPr dirty="0" err="1"/>
+              <a:t>thống</a:t>
+            </a:r>
+            <a:r>
+              <a:rPr dirty="0"/>
+              <a:t> </a:t>
+            </a:r>
+            <a:r>
+              <a:rPr dirty="0" err="1"/>
+              <a:t>và</a:t>
+            </a:r>
+            <a:r>
+              <a:rPr dirty="0"/>
+              <a:t> </a:t>
+            </a:r>
+            <a:r>
+              <a:rPr dirty="0" err="1"/>
+              <a:t>dữ</a:t>
+            </a:r>
+            <a:r>
+              <a:rPr dirty="0"/>
+              <a:t> </a:t>
+            </a:r>
+            <a:r>
+              <a:rPr dirty="0" err="1"/>
+              <a:t>liệu</a:t>
+            </a:r>
+            <a:endParaRPr dirty="0"/>
           </a:p>
         </p:txBody>
       </p:sp>
@@ -5544,7 +9728,7 @@
         </p:nvSpPr>
         <p:spPr/>
         <p:txBody>
-          <a:bodyPr wrap="square" bIns="73152" lIns="45720"/>
+          <a:bodyPr wrap="square" lIns="45720" bIns="73152"/>
           <a:lstStyle/>
           <a:p>
             <a:pPr>
@@ -5578,8 +9762,8 @@
 </p:sld>
 </file>
 
-<file path=ppt/slides/slide37.xml><?xml version="1.0" encoding="utf-8"?>
-<p:sld xmlns:a="http://schemas.openxmlformats.org/drawingml/2006/main" xmlns:p="http://schemas.openxmlformats.org/presentationml/2006/main" xmlns:r="http://schemas.openxmlformats.org/officeDocument/2006/relationships">
+<file path=ppt/slides/slide38.xml><?xml version="1.0" encoding="utf-8"?>
+<p:sld xmlns:a="http://schemas.openxmlformats.org/drawingml/2006/main" xmlns:r="http://schemas.openxmlformats.org/officeDocument/2006/relationships" xmlns:p="http://schemas.openxmlformats.org/presentationml/2006/main">
   <p:cSld>
     <p:spTree>
       <p:nvGrpSpPr>
@@ -5587,7 +9771,14 @@
         <p:cNvGrpSpPr/>
         <p:nvPr/>
       </p:nvGrpSpPr>
-      <p:grpSpPr/>
+      <p:grpSpPr>
+        <a:xfrm>
+          <a:off x="0" y="0"/>
+          <a:ext cx="0" cy="0"/>
+          <a:chOff x="0" y="0"/>
+          <a:chExt cx="0" cy="0"/>
+        </a:xfrm>
+      </p:grpSpPr>
       <p:sp>
         <p:nvSpPr>
           <p:cNvPr id="2" name="TextBox 1"/>
@@ -5651,8 +9842,8 @@
 </p:sld>
 </file>
 
-<file path=ppt/slides/slide38.xml><?xml version="1.0" encoding="utf-8"?>
-<p:sld xmlns:a="http://schemas.openxmlformats.org/drawingml/2006/main" xmlns:p="http://schemas.openxmlformats.org/presentationml/2006/main" xmlns:r="http://schemas.openxmlformats.org/officeDocument/2006/relationships">
+<file path=ppt/slides/slide39.xml><?xml version="1.0" encoding="utf-8"?>
+<p:sld xmlns:a="http://schemas.openxmlformats.org/drawingml/2006/main" xmlns:r="http://schemas.openxmlformats.org/officeDocument/2006/relationships" xmlns:p="http://schemas.openxmlformats.org/presentationml/2006/main">
   <p:cSld>
     <p:spTree>
       <p:nvGrpSpPr>
@@ -5660,7 +9851,14 @@
         <p:cNvGrpSpPr/>
         <p:nvPr/>
       </p:nvGrpSpPr>
-      <p:grpSpPr/>
+      <p:grpSpPr>
+        <a:xfrm>
+          <a:off x="0" y="0"/>
+          <a:ext cx="0" cy="0"/>
+          <a:chOff x="0" y="0"/>
+          <a:chExt cx="0" cy="0"/>
+        </a:xfrm>
+      </p:grpSpPr>
       <p:sp>
         <p:nvSpPr>
           <p:cNvPr id="2" name="Title 1"/>
@@ -5697,7 +9895,7 @@
         </p:nvSpPr>
         <p:spPr/>
         <p:txBody>
-          <a:bodyPr wrap="square" bIns="73152" lIns="45720"/>
+          <a:bodyPr wrap="square" lIns="45720" bIns="73152"/>
           <a:lstStyle/>
           <a:p>
             <a:pPr>
@@ -5731,8 +9929,8 @@
 </p:sld>
 </file>
 
-<file path=ppt/slides/slide39.xml><?xml version="1.0" encoding="utf-8"?>
-<p:sld xmlns:a="http://schemas.openxmlformats.org/drawingml/2006/main" xmlns:p="http://schemas.openxmlformats.org/presentationml/2006/main" xmlns:r="http://schemas.openxmlformats.org/officeDocument/2006/relationships">
+<file path=ppt/slides/slide4.xml><?xml version="1.0" encoding="utf-8"?>
+<p:sld xmlns:a="http://schemas.openxmlformats.org/drawingml/2006/main" xmlns:r="http://schemas.openxmlformats.org/officeDocument/2006/relationships" xmlns:p="http://schemas.openxmlformats.org/presentationml/2006/main">
   <p:cSld>
     <p:spTree>
       <p:nvGrpSpPr>
@@ -5740,7 +9938,1003 @@
         <p:cNvGrpSpPr/>
         <p:nvPr/>
       </p:nvGrpSpPr>
-      <p:grpSpPr/>
+      <p:grpSpPr>
+        <a:xfrm>
+          <a:off x="0" y="0"/>
+          <a:ext cx="0" cy="0"/>
+          <a:chOff x="0" y="0"/>
+          <a:chExt cx="0" cy="0"/>
+        </a:xfrm>
+      </p:grpSpPr>
+      <p:sp>
+        <p:nvSpPr>
+          <p:cNvPr id="2" name="Title 1"/>
+          <p:cNvSpPr>
+            <a:spLocks noGrp="1"/>
+          </p:cNvSpPr>
+          <p:nvPr>
+            <p:ph type="title"/>
+          </p:nvPr>
+        </p:nvSpPr>
+        <p:spPr>
+          <a:xfrm>
+            <a:off x="457200" y="274638"/>
+            <a:ext cx="8229600" cy="612868"/>
+          </a:xfrm>
+        </p:spPr>
+        <p:txBody>
+          <a:bodyPr wrap="square"/>
+          <a:lstStyle/>
+          <a:p>
+            <a:pPr>
+              <a:defRPr sz="2000"/>
+            </a:pPr>
+            <a:r>
+              <a:rPr dirty="0"/>
+              <a:t>2. Thu </a:t>
+            </a:r>
+            <a:r>
+              <a:rPr dirty="0" err="1"/>
+              <a:t>thập</a:t>
+            </a:r>
+            <a:r>
+              <a:rPr dirty="0"/>
+              <a:t> </a:t>
+            </a:r>
+            <a:r>
+              <a:rPr dirty="0" err="1"/>
+              <a:t>yêu</a:t>
+            </a:r>
+            <a:r>
+              <a:rPr dirty="0"/>
+              <a:t> </a:t>
+            </a:r>
+            <a:r>
+              <a:rPr dirty="0" err="1"/>
+              <a:t>cầu</a:t>
+            </a:r>
+            <a:r>
+              <a:rPr dirty="0"/>
+              <a:t> </a:t>
+            </a:r>
+            <a:r>
+              <a:rPr dirty="0" err="1"/>
+              <a:t>và</a:t>
+            </a:r>
+            <a:r>
+              <a:rPr dirty="0"/>
+              <a:t> </a:t>
+            </a:r>
+            <a:r>
+              <a:rPr dirty="0" err="1"/>
+              <a:t>khảo</a:t>
+            </a:r>
+            <a:r>
+              <a:rPr dirty="0"/>
+              <a:t> </a:t>
+            </a:r>
+            <a:r>
+              <a:rPr dirty="0" err="1"/>
+              <a:t>sát</a:t>
+            </a:r>
+            <a:r>
+              <a:rPr dirty="0"/>
+              <a:t> </a:t>
+            </a:r>
+            <a:r>
+              <a:rPr dirty="0" err="1"/>
+              <a:t>nghiệp</a:t>
+            </a:r>
+            <a:r>
+              <a:rPr dirty="0"/>
+              <a:t> </a:t>
+            </a:r>
+            <a:r>
+              <a:rPr dirty="0" err="1"/>
+              <a:t>vụ</a:t>
+            </a:r>
+            <a:r>
+              <a:rPr dirty="0"/>
+              <a:t> (Requirement and survey)</a:t>
+            </a:r>
+          </a:p>
+        </p:txBody>
+      </p:sp>
+      <p:sp>
+        <p:nvSpPr>
+          <p:cNvPr id="3" name="Content Placeholder 2"/>
+          <p:cNvSpPr>
+            <a:spLocks noGrp="1"/>
+          </p:cNvSpPr>
+          <p:nvPr>
+            <p:ph idx="1"/>
+          </p:nvPr>
+        </p:nvSpPr>
+        <p:spPr>
+          <a:xfrm>
+            <a:off x="555814" y="4034118"/>
+            <a:ext cx="8319246" cy="4509248"/>
+          </a:xfrm>
+        </p:spPr>
+        <p:txBody>
+          <a:bodyPr wrap="square" lIns="45720" bIns="73152">
+            <a:normAutofit/>
+          </a:bodyPr>
+          <a:lstStyle/>
+          <a:p>
+            <a:pPr marL="0" indent="0">
+              <a:spcAft>
+                <a:spcPts val="1000"/>
+              </a:spcAft>
+              <a:buNone/>
+              <a:defRPr sz="1900">
+                <a:solidFill>
+                  <a:srgbClr val="1E293B"/>
+                </a:solidFill>
+              </a:defRPr>
+            </a:pPr>
+            <a:r>
+              <a:rPr lang="vi-VN" sz="1200" dirty="0"/>
+              <a:t>• </a:t>
+            </a:r>
+            <a:r>
+              <a:rPr lang="vi-VN" sz="1200" dirty="0" err="1"/>
+              <a:t>Nhóm</a:t>
+            </a:r>
+            <a:r>
+              <a:rPr lang="vi-VN" sz="1200" dirty="0"/>
+              <a:t> </a:t>
+            </a:r>
+            <a:r>
+              <a:rPr lang="vi-VN" sz="1200" dirty="0" err="1"/>
+              <a:t>thực</a:t>
+            </a:r>
+            <a:r>
+              <a:rPr lang="vi-VN" sz="1200" dirty="0"/>
+              <a:t> </a:t>
+            </a:r>
+            <a:r>
+              <a:rPr lang="vi-VN" sz="1200" dirty="0" err="1"/>
+              <a:t>hiện</a:t>
+            </a:r>
+            <a:r>
+              <a:rPr lang="vi-VN" sz="1200" dirty="0"/>
+              <a:t> </a:t>
+            </a:r>
+            <a:r>
+              <a:rPr lang="vi-VN" sz="1200" dirty="0" err="1"/>
+              <a:t>đã</a:t>
+            </a:r>
+            <a:r>
+              <a:rPr lang="vi-VN" sz="1200" dirty="0"/>
+              <a:t> </a:t>
+            </a:r>
+            <a:r>
+              <a:rPr lang="vi-VN" sz="1200" dirty="0" err="1"/>
+              <a:t>tiến</a:t>
+            </a:r>
+            <a:r>
+              <a:rPr lang="vi-VN" sz="1200" dirty="0"/>
+              <a:t> </a:t>
+            </a:r>
+            <a:r>
+              <a:rPr lang="vi-VN" sz="1200" dirty="0" err="1"/>
+              <a:t>hành</a:t>
+            </a:r>
+            <a:r>
+              <a:rPr lang="vi-VN" sz="1200" dirty="0"/>
+              <a:t> </a:t>
+            </a:r>
+            <a:r>
+              <a:rPr lang="vi-VN" sz="1200" dirty="0" err="1"/>
+              <a:t>khảo</a:t>
+            </a:r>
+            <a:r>
+              <a:rPr lang="vi-VN" sz="1200" dirty="0"/>
+              <a:t> </a:t>
+            </a:r>
+            <a:r>
+              <a:rPr lang="vi-VN" sz="1200" dirty="0" err="1"/>
+              <a:t>sát</a:t>
+            </a:r>
+            <a:r>
+              <a:rPr lang="vi-VN" sz="1200" dirty="0"/>
+              <a:t> nhu </a:t>
+            </a:r>
+            <a:r>
+              <a:rPr lang="vi-VN" sz="1200" dirty="0" err="1"/>
+              <a:t>cầu</a:t>
+            </a:r>
+            <a:r>
+              <a:rPr lang="vi-VN" sz="1200" dirty="0"/>
+              <a:t> </a:t>
+            </a:r>
+            <a:r>
+              <a:rPr lang="vi-VN" sz="1200" dirty="0" err="1"/>
+              <a:t>sử</a:t>
+            </a:r>
+            <a:r>
+              <a:rPr lang="vi-VN" sz="1200" dirty="0"/>
+              <a:t> </a:t>
+            </a:r>
+            <a:r>
+              <a:rPr lang="vi-VN" sz="1200" dirty="0" err="1"/>
+              <a:t>dụng</a:t>
+            </a:r>
+            <a:r>
+              <a:rPr lang="vi-VN" sz="1200" dirty="0"/>
+              <a:t> </a:t>
+            </a:r>
+            <a:r>
+              <a:rPr lang="vi-VN" sz="1200" dirty="0" err="1"/>
+              <a:t>ứng</a:t>
+            </a:r>
+            <a:r>
+              <a:rPr lang="vi-VN" sz="1200" dirty="0"/>
+              <a:t> </a:t>
+            </a:r>
+            <a:r>
+              <a:rPr lang="vi-VN" sz="1200" dirty="0" err="1"/>
+              <a:t>dụng</a:t>
+            </a:r>
+            <a:r>
+              <a:rPr lang="vi-VN" sz="1200" dirty="0"/>
+              <a:t> </a:t>
+            </a:r>
+            <a:r>
+              <a:rPr lang="vi-VN" sz="1200" dirty="0" err="1"/>
+              <a:t>gọi</a:t>
+            </a:r>
+            <a:r>
+              <a:rPr lang="vi-VN" sz="1200" dirty="0"/>
+              <a:t> xe </a:t>
+            </a:r>
+            <a:r>
+              <a:rPr lang="vi-VN" sz="1200" dirty="0" err="1"/>
+              <a:t>nhằm</a:t>
+            </a:r>
+            <a:r>
+              <a:rPr lang="vi-VN" sz="1200" dirty="0"/>
+              <a:t> </a:t>
+            </a:r>
+            <a:r>
+              <a:rPr lang="vi-VN" sz="1200" dirty="0" err="1"/>
+              <a:t>xác</a:t>
+            </a:r>
+            <a:r>
+              <a:rPr lang="vi-VN" sz="1200" dirty="0"/>
+              <a:t> </a:t>
+            </a:r>
+            <a:r>
+              <a:rPr lang="vi-VN" sz="1200" dirty="0" err="1"/>
+              <a:t>định</a:t>
+            </a:r>
+            <a:r>
+              <a:rPr lang="vi-VN" sz="1200" dirty="0"/>
+              <a:t> </a:t>
+            </a:r>
+            <a:r>
+              <a:rPr lang="vi-VN" sz="1200" dirty="0" err="1"/>
+              <a:t>các</a:t>
+            </a:r>
+            <a:r>
+              <a:rPr lang="vi-VN" sz="1200" dirty="0"/>
+              <a:t> </a:t>
+            </a:r>
+            <a:r>
+              <a:rPr lang="vi-VN" sz="1200" dirty="0" err="1"/>
+              <a:t>vấn</a:t>
+            </a:r>
+            <a:r>
+              <a:rPr lang="vi-VN" sz="1200" dirty="0"/>
+              <a:t> </a:t>
+            </a:r>
+            <a:r>
+              <a:rPr lang="vi-VN" sz="1200" dirty="0" err="1"/>
+              <a:t>đề</a:t>
+            </a:r>
+            <a:r>
+              <a:rPr lang="vi-VN" sz="1200" dirty="0"/>
+              <a:t> </a:t>
+            </a:r>
+            <a:r>
+              <a:rPr lang="vi-VN" sz="1200" dirty="0" err="1"/>
+              <a:t>người</a:t>
+            </a:r>
+            <a:r>
+              <a:rPr lang="vi-VN" sz="1200" dirty="0"/>
+              <a:t> </a:t>
+            </a:r>
+            <a:r>
+              <a:rPr lang="vi-VN" sz="1200" dirty="0" err="1"/>
+              <a:t>dùng</a:t>
+            </a:r>
+            <a:r>
+              <a:rPr lang="vi-VN" sz="1200" dirty="0"/>
+              <a:t> quan tâm </a:t>
+            </a:r>
+            <a:r>
+              <a:rPr lang="vi-VN" sz="1200" dirty="0" err="1"/>
+              <a:t>nhất</a:t>
+            </a:r>
+            <a:r>
+              <a:rPr lang="vi-VN" sz="1200" dirty="0"/>
+              <a:t>.</a:t>
+            </a:r>
+          </a:p>
+          <a:p>
+            <a:pPr marL="0" indent="0">
+              <a:spcAft>
+                <a:spcPts val="1000"/>
+              </a:spcAft>
+              <a:buNone/>
+              <a:defRPr sz="1900">
+                <a:solidFill>
+                  <a:srgbClr val="1E293B"/>
+                </a:solidFill>
+              </a:defRPr>
+            </a:pPr>
+            <a:r>
+              <a:rPr lang="vi-VN" sz="1200" dirty="0"/>
+              <a:t>• </a:t>
+            </a:r>
+            <a:r>
+              <a:rPr lang="vi-VN" sz="1200" dirty="0" err="1"/>
+              <a:t>Kết</a:t>
+            </a:r>
+            <a:r>
+              <a:rPr lang="vi-VN" sz="1200" dirty="0"/>
+              <a:t> </a:t>
+            </a:r>
+            <a:r>
+              <a:rPr lang="vi-VN" sz="1200" dirty="0" err="1"/>
+              <a:t>quả</a:t>
+            </a:r>
+            <a:r>
+              <a:rPr lang="vi-VN" sz="1200" dirty="0"/>
+              <a:t> </a:t>
+            </a:r>
+            <a:r>
+              <a:rPr lang="vi-VN" sz="1200" dirty="0" err="1"/>
+              <a:t>khảo</a:t>
+            </a:r>
+            <a:r>
+              <a:rPr lang="vi-VN" sz="1200" dirty="0"/>
+              <a:t> </a:t>
+            </a:r>
+            <a:r>
+              <a:rPr lang="vi-VN" sz="1200" dirty="0" err="1"/>
+              <a:t>sát</a:t>
+            </a:r>
+            <a:r>
+              <a:rPr lang="vi-VN" sz="1200" dirty="0"/>
+              <a:t> cho </a:t>
+            </a:r>
+            <a:r>
+              <a:rPr lang="vi-VN" sz="1200" dirty="0" err="1"/>
+              <a:t>thấy</a:t>
+            </a:r>
+            <a:r>
+              <a:rPr lang="vi-VN" sz="1200" dirty="0"/>
+              <a:t> </a:t>
+            </a:r>
+            <a:r>
+              <a:rPr lang="vi-VN" sz="1200" dirty="0" err="1"/>
+              <a:t>phần</a:t>
+            </a:r>
+            <a:r>
+              <a:rPr lang="vi-VN" sz="1200" dirty="0"/>
+              <a:t> </a:t>
+            </a:r>
+            <a:r>
+              <a:rPr lang="vi-VN" sz="1200" dirty="0" err="1"/>
+              <a:t>lớn</a:t>
+            </a:r>
+            <a:r>
+              <a:rPr lang="vi-VN" sz="1200" dirty="0"/>
+              <a:t> </a:t>
+            </a:r>
+            <a:r>
+              <a:rPr lang="vi-VN" sz="1200" dirty="0" err="1"/>
+              <a:t>người</a:t>
+            </a:r>
+            <a:r>
+              <a:rPr lang="vi-VN" sz="1200" dirty="0"/>
+              <a:t> </a:t>
+            </a:r>
+            <a:r>
+              <a:rPr lang="vi-VN" sz="1200" dirty="0" err="1"/>
+              <a:t>dùng</a:t>
+            </a:r>
+            <a:r>
+              <a:rPr lang="vi-VN" sz="1200" dirty="0"/>
+              <a:t> </a:t>
+            </a:r>
+            <a:r>
+              <a:rPr lang="vi-VN" sz="1200" dirty="0" err="1"/>
+              <a:t>đánh</a:t>
+            </a:r>
+            <a:r>
+              <a:rPr lang="vi-VN" sz="1200" dirty="0"/>
+              <a:t> </a:t>
+            </a:r>
+            <a:r>
+              <a:rPr lang="vi-VN" sz="1200" dirty="0" err="1"/>
+              <a:t>giá</a:t>
+            </a:r>
+            <a:r>
+              <a:rPr lang="vi-VN" sz="1200" dirty="0"/>
+              <a:t> </a:t>
+            </a:r>
+            <a:r>
+              <a:rPr lang="vi-VN" sz="1200" dirty="0" err="1"/>
+              <a:t>rất</a:t>
+            </a:r>
+            <a:r>
+              <a:rPr lang="vi-VN" sz="1200" dirty="0"/>
+              <a:t> cao </a:t>
+            </a:r>
+            <a:r>
+              <a:rPr lang="vi-VN" sz="1200" dirty="0" err="1"/>
+              <a:t>khả</a:t>
+            </a:r>
+            <a:r>
+              <a:rPr lang="vi-VN" sz="1200" dirty="0"/>
+              <a:t> năng </a:t>
+            </a:r>
+            <a:r>
+              <a:rPr lang="vi-VN" sz="1200" dirty="0" err="1"/>
+              <a:t>hiển</a:t>
+            </a:r>
+            <a:r>
+              <a:rPr lang="vi-VN" sz="1200" dirty="0"/>
+              <a:t> </a:t>
+            </a:r>
+            <a:r>
+              <a:rPr lang="vi-VN" sz="1200" dirty="0" err="1"/>
+              <a:t>thị</a:t>
+            </a:r>
+            <a:r>
+              <a:rPr lang="vi-VN" sz="1200" dirty="0"/>
+              <a:t> </a:t>
+            </a:r>
+            <a:r>
+              <a:rPr lang="vi-VN" sz="1200" dirty="0" err="1"/>
+              <a:t>giá</a:t>
+            </a:r>
+            <a:r>
+              <a:rPr lang="vi-VN" sz="1200" dirty="0"/>
+              <a:t> </a:t>
+            </a:r>
+            <a:r>
+              <a:rPr lang="vi-VN" sz="1200" dirty="0" err="1"/>
+              <a:t>cước</a:t>
+            </a:r>
+            <a:r>
+              <a:rPr lang="vi-VN" sz="1200" dirty="0"/>
+              <a:t> minh </a:t>
+            </a:r>
+            <a:r>
+              <a:rPr lang="vi-VN" sz="1200" dirty="0" err="1"/>
+              <a:t>bạch</a:t>
+            </a:r>
+            <a:r>
+              <a:rPr lang="vi-VN" sz="1200" dirty="0"/>
+              <a:t>, ETA </a:t>
+            </a:r>
+            <a:r>
+              <a:rPr lang="vi-VN" sz="1200" dirty="0" err="1"/>
+              <a:t>chính</a:t>
+            </a:r>
+            <a:r>
+              <a:rPr lang="vi-VN" sz="1200" dirty="0"/>
+              <a:t> </a:t>
+            </a:r>
+            <a:r>
+              <a:rPr lang="vi-VN" sz="1200" dirty="0" err="1"/>
+              <a:t>xác</a:t>
+            </a:r>
+            <a:r>
+              <a:rPr lang="vi-VN" sz="1200" dirty="0"/>
+              <a:t> </a:t>
+            </a:r>
+            <a:r>
+              <a:rPr lang="vi-VN" sz="1200" dirty="0" err="1"/>
+              <a:t>và</a:t>
+            </a:r>
+            <a:r>
+              <a:rPr lang="vi-VN" sz="1200" dirty="0"/>
+              <a:t> theo </a:t>
+            </a:r>
+            <a:r>
+              <a:rPr lang="vi-VN" sz="1200" dirty="0" err="1"/>
+              <a:t>dõi</a:t>
+            </a:r>
+            <a:r>
+              <a:rPr lang="vi-VN" sz="1200" dirty="0"/>
+              <a:t> </a:t>
+            </a:r>
+            <a:r>
+              <a:rPr lang="vi-VN" sz="1200" dirty="0" err="1"/>
+              <a:t>tài</a:t>
+            </a:r>
+            <a:r>
+              <a:rPr lang="vi-VN" sz="1200" dirty="0"/>
+              <a:t> </a:t>
+            </a:r>
+            <a:r>
+              <a:rPr lang="vi-VN" sz="1200" dirty="0" err="1"/>
+              <a:t>xế</a:t>
+            </a:r>
+            <a:r>
+              <a:rPr lang="vi-VN" sz="1200" dirty="0"/>
+              <a:t> </a:t>
+            </a:r>
+            <a:r>
+              <a:rPr lang="vi-VN" sz="1200" dirty="0" err="1"/>
+              <a:t>realtime</a:t>
+            </a:r>
+            <a:r>
+              <a:rPr lang="vi-VN" sz="1200" dirty="0"/>
+              <a:t>.</a:t>
+            </a:r>
+          </a:p>
+          <a:p>
+            <a:pPr marL="0" indent="0">
+              <a:spcAft>
+                <a:spcPts val="1000"/>
+              </a:spcAft>
+              <a:buNone/>
+              <a:defRPr sz="1900">
+                <a:solidFill>
+                  <a:srgbClr val="1E293B"/>
+                </a:solidFill>
+              </a:defRPr>
+            </a:pPr>
+            <a:r>
+              <a:rPr lang="vi-VN" sz="1200" dirty="0"/>
+              <a:t>• </a:t>
+            </a:r>
+            <a:r>
+              <a:rPr lang="vi-VN" sz="1200" dirty="0" err="1"/>
+              <a:t>Yếu</a:t>
+            </a:r>
+            <a:r>
+              <a:rPr lang="vi-VN" sz="1200" dirty="0"/>
+              <a:t> </a:t>
+            </a:r>
+            <a:r>
+              <a:rPr lang="vi-VN" sz="1200" dirty="0" err="1"/>
+              <a:t>tố</a:t>
+            </a:r>
+            <a:r>
+              <a:rPr lang="vi-VN" sz="1200" dirty="0"/>
+              <a:t> an </a:t>
+            </a:r>
+            <a:r>
+              <a:rPr lang="vi-VN" sz="1200" dirty="0" err="1"/>
+              <a:t>toàn</a:t>
+            </a:r>
+            <a:r>
+              <a:rPr lang="vi-VN" sz="1200" dirty="0"/>
+              <a:t>, </a:t>
+            </a:r>
+            <a:r>
+              <a:rPr lang="vi-VN" sz="1200" dirty="0" err="1"/>
+              <a:t>tốc</a:t>
+            </a:r>
+            <a:r>
+              <a:rPr lang="vi-VN" sz="1200" dirty="0"/>
+              <a:t> </a:t>
+            </a:r>
+            <a:r>
+              <a:rPr lang="vi-VN" sz="1200" dirty="0" err="1"/>
+              <a:t>độ</a:t>
+            </a:r>
+            <a:r>
+              <a:rPr lang="vi-VN" sz="1200" dirty="0"/>
+              <a:t> </a:t>
+            </a:r>
+            <a:r>
+              <a:rPr lang="vi-VN" sz="1200" dirty="0" err="1"/>
+              <a:t>matching</a:t>
+            </a:r>
+            <a:r>
+              <a:rPr lang="vi-VN" sz="1200" dirty="0"/>
+              <a:t> </a:t>
+            </a:r>
+            <a:r>
+              <a:rPr lang="vi-VN" sz="1200" dirty="0" err="1"/>
+              <a:t>tài</a:t>
+            </a:r>
+            <a:r>
+              <a:rPr lang="vi-VN" sz="1200" dirty="0"/>
+              <a:t> </a:t>
+            </a:r>
+            <a:r>
+              <a:rPr lang="vi-VN" sz="1200" dirty="0" err="1"/>
+              <a:t>xế</a:t>
+            </a:r>
+            <a:r>
+              <a:rPr lang="vi-VN" sz="1200" dirty="0"/>
+              <a:t> </a:t>
+            </a:r>
+            <a:r>
+              <a:rPr lang="vi-VN" sz="1200" dirty="0" err="1"/>
+              <a:t>và</a:t>
+            </a:r>
+            <a:r>
+              <a:rPr lang="vi-VN" sz="1200" dirty="0"/>
+              <a:t> </a:t>
+            </a:r>
+            <a:r>
+              <a:rPr lang="vi-VN" sz="1200" dirty="0" err="1"/>
+              <a:t>ổn</a:t>
+            </a:r>
+            <a:r>
+              <a:rPr lang="vi-VN" sz="1200" dirty="0"/>
+              <a:t> </a:t>
+            </a:r>
+            <a:r>
+              <a:rPr lang="vi-VN" sz="1200" dirty="0" err="1"/>
+              <a:t>định</a:t>
+            </a:r>
+            <a:r>
+              <a:rPr lang="vi-VN" sz="1200" dirty="0"/>
+              <a:t> thanh </a:t>
+            </a:r>
+            <a:r>
+              <a:rPr lang="vi-VN" sz="1200" dirty="0" err="1"/>
+              <a:t>toán</a:t>
+            </a:r>
+            <a:r>
+              <a:rPr lang="vi-VN" sz="1200" dirty="0"/>
+              <a:t> </a:t>
+            </a:r>
+            <a:r>
+              <a:rPr lang="vi-VN" sz="1200" dirty="0" err="1"/>
+              <a:t>là</a:t>
+            </a:r>
+            <a:r>
+              <a:rPr lang="vi-VN" sz="1200" dirty="0"/>
+              <a:t> </a:t>
+            </a:r>
+            <a:r>
+              <a:rPr lang="vi-VN" sz="1200" dirty="0" err="1"/>
+              <a:t>những</a:t>
+            </a:r>
+            <a:r>
+              <a:rPr lang="vi-VN" sz="1200" dirty="0"/>
+              <a:t> tiêu </a:t>
+            </a:r>
+            <a:r>
+              <a:rPr lang="vi-VN" sz="1200" dirty="0" err="1"/>
+              <a:t>chí</a:t>
+            </a:r>
+            <a:r>
+              <a:rPr lang="vi-VN" sz="1200" dirty="0"/>
+              <a:t> </a:t>
+            </a:r>
+            <a:r>
+              <a:rPr lang="vi-VN" sz="1200" dirty="0" err="1"/>
+              <a:t>được</a:t>
+            </a:r>
+            <a:r>
+              <a:rPr lang="vi-VN" sz="1200" dirty="0"/>
+              <a:t> </a:t>
+            </a:r>
+            <a:r>
+              <a:rPr lang="vi-VN" sz="1200" dirty="0" err="1"/>
+              <a:t>người</a:t>
+            </a:r>
+            <a:r>
+              <a:rPr lang="vi-VN" sz="1200" dirty="0"/>
+              <a:t> </a:t>
+            </a:r>
+            <a:r>
+              <a:rPr lang="vi-VN" sz="1200" dirty="0" err="1"/>
+              <a:t>dùng</a:t>
+            </a:r>
+            <a:r>
+              <a:rPr lang="vi-VN" sz="1200" dirty="0"/>
+              <a:t> ưu tiên </a:t>
+            </a:r>
+            <a:r>
+              <a:rPr lang="vi-VN" sz="1200" dirty="0" err="1"/>
+              <a:t>hàng</a:t>
+            </a:r>
+            <a:r>
+              <a:rPr lang="vi-VN" sz="1200" dirty="0"/>
+              <a:t> </a:t>
+            </a:r>
+            <a:r>
+              <a:rPr lang="vi-VN" sz="1200" dirty="0" err="1"/>
+              <a:t>đầu</a:t>
+            </a:r>
+            <a:r>
+              <a:rPr lang="vi-VN" sz="1200" dirty="0"/>
+              <a:t>.</a:t>
+            </a:r>
+          </a:p>
+          <a:p>
+            <a:pPr marL="0" indent="0">
+              <a:spcAft>
+                <a:spcPts val="1000"/>
+              </a:spcAft>
+              <a:buNone/>
+              <a:defRPr sz="1900">
+                <a:solidFill>
+                  <a:srgbClr val="1E293B"/>
+                </a:solidFill>
+              </a:defRPr>
+            </a:pPr>
+            <a:r>
+              <a:rPr lang="vi-VN" sz="1200" dirty="0"/>
+              <a:t>• </a:t>
+            </a:r>
+            <a:r>
+              <a:rPr lang="vi-VN" sz="1200" dirty="0" err="1"/>
+              <a:t>Ngoài</a:t>
+            </a:r>
+            <a:r>
+              <a:rPr lang="vi-VN" sz="1200" dirty="0"/>
+              <a:t> ra, </a:t>
+            </a:r>
+            <a:r>
+              <a:rPr lang="vi-VN" sz="1200" dirty="0" err="1"/>
+              <a:t>người</a:t>
+            </a:r>
+            <a:r>
+              <a:rPr lang="vi-VN" sz="1200" dirty="0"/>
+              <a:t> </a:t>
+            </a:r>
+            <a:r>
+              <a:rPr lang="vi-VN" sz="1200" dirty="0" err="1"/>
+              <a:t>dùng</a:t>
+            </a:r>
+            <a:r>
+              <a:rPr lang="vi-VN" sz="1200" dirty="0"/>
+              <a:t> </a:t>
+            </a:r>
+            <a:r>
+              <a:rPr lang="vi-VN" sz="1200" dirty="0" err="1"/>
+              <a:t>cũng</a:t>
+            </a:r>
+            <a:r>
+              <a:rPr lang="vi-VN" sz="1200" dirty="0"/>
+              <a:t> mong </a:t>
+            </a:r>
+            <a:r>
+              <a:rPr lang="vi-VN" sz="1200" dirty="0" err="1"/>
+              <a:t>muốn</a:t>
+            </a:r>
+            <a:r>
+              <a:rPr lang="vi-VN" sz="1200" dirty="0"/>
+              <a:t> </a:t>
+            </a:r>
+            <a:r>
+              <a:rPr lang="vi-VN" sz="1200" dirty="0" err="1"/>
+              <a:t>ứng</a:t>
+            </a:r>
+            <a:r>
+              <a:rPr lang="vi-VN" sz="1200" dirty="0"/>
+              <a:t> </a:t>
+            </a:r>
+            <a:r>
+              <a:rPr lang="vi-VN" sz="1200" dirty="0" err="1"/>
+              <a:t>dụng</a:t>
+            </a:r>
+            <a:r>
+              <a:rPr lang="vi-VN" sz="1200" dirty="0"/>
+              <a:t> trong tương lai </a:t>
+            </a:r>
+            <a:r>
+              <a:rPr lang="vi-VN" sz="1200" dirty="0" err="1"/>
+              <a:t>tích</a:t>
+            </a:r>
+            <a:r>
+              <a:rPr lang="vi-VN" sz="1200" dirty="0"/>
+              <a:t> </a:t>
+            </a:r>
+            <a:r>
+              <a:rPr lang="vi-VN" sz="1200" dirty="0" err="1"/>
+              <a:t>hợp</a:t>
+            </a:r>
+            <a:r>
+              <a:rPr lang="vi-VN" sz="1200" dirty="0"/>
+              <a:t> AI </a:t>
+            </a:r>
+            <a:r>
+              <a:rPr lang="vi-VN" sz="1200" dirty="0" err="1"/>
+              <a:t>hỗ</a:t>
+            </a:r>
+            <a:r>
+              <a:rPr lang="vi-VN" sz="1200" dirty="0"/>
+              <a:t> </a:t>
+            </a:r>
+            <a:r>
+              <a:rPr lang="vi-VN" sz="1200" dirty="0" err="1"/>
+              <a:t>trợ</a:t>
+            </a:r>
+            <a:r>
+              <a:rPr lang="vi-VN" sz="1200" dirty="0"/>
+              <a:t> </a:t>
+            </a:r>
+            <a:r>
+              <a:rPr lang="vi-VN" sz="1200" dirty="0" err="1"/>
+              <a:t>dự</a:t>
+            </a:r>
+            <a:r>
+              <a:rPr lang="vi-VN" sz="1200" dirty="0"/>
+              <a:t> </a:t>
+            </a:r>
+            <a:r>
+              <a:rPr lang="vi-VN" sz="1200" dirty="0" err="1"/>
+              <a:t>đoán</a:t>
+            </a:r>
+            <a:r>
+              <a:rPr lang="vi-VN" sz="1200" dirty="0"/>
+              <a:t> </a:t>
+            </a:r>
+            <a:r>
+              <a:rPr lang="vi-VN" sz="1200" dirty="0" err="1"/>
+              <a:t>giá</a:t>
+            </a:r>
+            <a:r>
+              <a:rPr lang="vi-VN" sz="1200" dirty="0"/>
+              <a:t>, </a:t>
+            </a:r>
+            <a:r>
+              <a:rPr lang="vi-VN" sz="1200" dirty="0" err="1"/>
+              <a:t>hỗ</a:t>
+            </a:r>
+            <a:r>
+              <a:rPr lang="vi-VN" sz="1200" dirty="0"/>
+              <a:t> </a:t>
+            </a:r>
+            <a:r>
+              <a:rPr lang="vi-VN" sz="1200" dirty="0" err="1"/>
+              <a:t>trợ</a:t>
+            </a:r>
+            <a:r>
+              <a:rPr lang="vi-VN" sz="1200" dirty="0"/>
+              <a:t> </a:t>
+            </a:r>
+            <a:r>
+              <a:rPr lang="vi-VN" sz="1200" dirty="0" err="1"/>
+              <a:t>chatbot</a:t>
+            </a:r>
+            <a:r>
+              <a:rPr lang="vi-VN" sz="1200" dirty="0"/>
+              <a:t> </a:t>
+            </a:r>
+            <a:r>
+              <a:rPr lang="vi-VN" sz="1200" dirty="0" err="1"/>
+              <a:t>và</a:t>
+            </a:r>
+            <a:r>
+              <a:rPr lang="vi-VN" sz="1200" dirty="0"/>
+              <a:t> </a:t>
+            </a:r>
+            <a:r>
+              <a:rPr lang="vi-VN" sz="1200" dirty="0" err="1"/>
+              <a:t>cá</a:t>
+            </a:r>
+            <a:r>
+              <a:rPr lang="vi-VN" sz="1200" dirty="0"/>
+              <a:t> nhân </a:t>
+            </a:r>
+            <a:r>
+              <a:rPr lang="vi-VN" sz="1200" dirty="0" err="1"/>
+              <a:t>hóa</a:t>
+            </a:r>
+            <a:r>
+              <a:rPr lang="vi-VN" sz="1200" dirty="0"/>
+              <a:t> </a:t>
+            </a:r>
+            <a:r>
+              <a:rPr lang="vi-VN" sz="1200" dirty="0" err="1"/>
+              <a:t>trải</a:t>
+            </a:r>
+            <a:r>
+              <a:rPr lang="vi-VN" sz="1200" dirty="0"/>
+              <a:t> </a:t>
+            </a:r>
+            <a:r>
+              <a:rPr lang="vi-VN" sz="1200" dirty="0" err="1"/>
+              <a:t>nghiệm</a:t>
+            </a:r>
+            <a:r>
+              <a:rPr lang="vi-VN" sz="1200" dirty="0"/>
+              <a:t>.</a:t>
+            </a:r>
+            <a:endParaRPr lang="en-US" sz="1200" dirty="0"/>
+          </a:p>
+          <a:p>
+            <a:pPr marL="0" indent="0">
+              <a:spcAft>
+                <a:spcPts val="1000"/>
+              </a:spcAft>
+              <a:buNone/>
+              <a:defRPr sz="1900">
+                <a:solidFill>
+                  <a:srgbClr val="1E293B"/>
+                </a:solidFill>
+              </a:defRPr>
+            </a:pPr>
+            <a:endParaRPr lang="en-US" sz="1200" dirty="0"/>
+          </a:p>
+          <a:p>
+            <a:pPr marL="0" indent="0">
+              <a:spcAft>
+                <a:spcPts val="1000"/>
+              </a:spcAft>
+              <a:buNone/>
+              <a:defRPr sz="1900">
+                <a:solidFill>
+                  <a:srgbClr val="1E293B"/>
+                </a:solidFill>
+              </a:defRPr>
+            </a:pPr>
+            <a:endParaRPr lang="vi-VN" sz="1200" dirty="0"/>
+          </a:p>
+        </p:txBody>
+      </p:sp>
+      <p:pic>
+        <p:nvPicPr>
+          <p:cNvPr id="4" name="image43.png">
+            <a:extLst>
+              <a:ext uri="{FF2B5EF4-FFF2-40B4-BE49-F238E27FC236}">
+                <a16:creationId xmlns:a16="http://schemas.microsoft.com/office/drawing/2014/main" id="{92D78E9C-2C1F-4F6D-943C-9709ADE3F63F}"/>
+              </a:ext>
+            </a:extLst>
+          </p:cNvPr>
+          <p:cNvPicPr/>
+          <p:nvPr/>
+        </p:nvPicPr>
+        <p:blipFill>
+          <a:blip r:embed="rId2"/>
+          <a:srcRect/>
+          <a:stretch>
+            <a:fillRect/>
+          </a:stretch>
+        </p:blipFill>
+        <p:spPr>
+          <a:xfrm>
+            <a:off x="1783977" y="906649"/>
+            <a:ext cx="5381886" cy="2957140"/>
+          </a:xfrm>
+          <a:prstGeom prst="rect">
+            <a:avLst/>
+          </a:prstGeom>
+          <a:ln/>
+        </p:spPr>
+      </p:pic>
+    </p:spTree>
+  </p:cSld>
+  <p:clrMapOvr>
+    <a:masterClrMapping/>
+  </p:clrMapOvr>
+</p:sld>
+</file>
+
+<file path=ppt/slides/slide40.xml><?xml version="1.0" encoding="utf-8"?>
+<p:sld xmlns:a="http://schemas.openxmlformats.org/drawingml/2006/main" xmlns:r="http://schemas.openxmlformats.org/officeDocument/2006/relationships" xmlns:p="http://schemas.openxmlformats.org/presentationml/2006/main">
+  <p:cSld>
+    <p:spTree>
+      <p:nvGrpSpPr>
+        <p:cNvPr id="1" name=""/>
+        <p:cNvGrpSpPr/>
+        <p:nvPr/>
+      </p:nvGrpSpPr>
+      <p:grpSpPr>
+        <a:xfrm>
+          <a:off x="0" y="0"/>
+          <a:ext cx="0" cy="0"/>
+          <a:chOff x="0" y="0"/>
+          <a:chExt cx="0" cy="0"/>
+        </a:xfrm>
+      </p:grpSpPr>
       <p:sp>
         <p:nvSpPr>
           <p:cNvPr id="2" name="Title 1"/>
@@ -5777,7 +10971,7 @@
         </p:nvSpPr>
         <p:spPr/>
         <p:txBody>
-          <a:bodyPr wrap="square" bIns="73152" lIns="45720"/>
+          <a:bodyPr wrap="square" lIns="45720" bIns="73152"/>
           <a:lstStyle/>
           <a:p>
             <a:pPr>
@@ -5811,8 +11005,8 @@
 </p:sld>
 </file>
 
-<file path=ppt/slides/slide4.xml><?xml version="1.0" encoding="utf-8"?>
-<p:sld xmlns:a="http://schemas.openxmlformats.org/drawingml/2006/main" xmlns:p="http://schemas.openxmlformats.org/presentationml/2006/main" xmlns:r="http://schemas.openxmlformats.org/officeDocument/2006/relationships">
+<file path=ppt/slides/slide41.xml><?xml version="1.0" encoding="utf-8"?>
+<p:sld xmlns:a="http://schemas.openxmlformats.org/drawingml/2006/main" xmlns:r="http://schemas.openxmlformats.org/officeDocument/2006/relationships" xmlns:p="http://schemas.openxmlformats.org/presentationml/2006/main">
   <p:cSld>
     <p:spTree>
       <p:nvGrpSpPr>
@@ -5820,7 +11014,847 @@
         <p:cNvGrpSpPr/>
         <p:nvPr/>
       </p:nvGrpSpPr>
-      <p:grpSpPr/>
+      <p:grpSpPr>
+        <a:xfrm>
+          <a:off x="0" y="0"/>
+          <a:ext cx="0" cy="0"/>
+          <a:chOff x="0" y="0"/>
+          <a:chExt cx="0" cy="0"/>
+        </a:xfrm>
+      </p:grpSpPr>
+      <p:sp>
+        <p:nvSpPr>
+          <p:cNvPr id="2" name="Title 1"/>
+          <p:cNvSpPr>
+            <a:spLocks noGrp="1"/>
+          </p:cNvSpPr>
+          <p:nvPr>
+            <p:ph type="ctrTitle"/>
+          </p:nvPr>
+        </p:nvSpPr>
+        <p:spPr/>
+        <p:txBody>
+          <a:bodyPr wrap="square"/>
+          <a:lstStyle/>
+          <a:p>
+            <a:pPr>
+              <a:defRPr sz="2800"/>
+            </a:pPr>
+            <a:r>
+              <a:t>Cảm ơn thầy cô và hội đồng</a:t>
+            </a:r>
+          </a:p>
+        </p:txBody>
+      </p:sp>
+      <p:sp>
+        <p:nvSpPr>
+          <p:cNvPr id="3" name="Subtitle 2"/>
+          <p:cNvSpPr>
+            <a:spLocks noGrp="1"/>
+          </p:cNvSpPr>
+          <p:nvPr>
+            <p:ph type="subTitle" idx="1"/>
+          </p:nvPr>
+        </p:nvSpPr>
+        <p:spPr/>
+        <p:txBody>
+          <a:bodyPr wrap="square"/>
+          <a:lstStyle/>
+          <a:p>
+            <a:pPr>
+              <a:defRPr sz="1400"/>
+            </a:pPr>
+            <a:r>
+              <a:t>Hỏi &amp; đáp</a:t>
+            </a:r>
+          </a:p>
+        </p:txBody>
+      </p:sp>
+    </p:spTree>
+  </p:cSld>
+  <p:clrMapOvr>
+    <a:masterClrMapping/>
+  </p:clrMapOvr>
+</p:sld>
+</file>
+
+<file path=ppt/slides/slide5.xml><?xml version="1.0" encoding="utf-8"?>
+<p:sld xmlns:a="http://schemas.openxmlformats.org/drawingml/2006/main" xmlns:r="http://schemas.openxmlformats.org/officeDocument/2006/relationships" xmlns:p="http://schemas.openxmlformats.org/presentationml/2006/main">
+  <p:cSld>
+    <p:spTree>
+      <p:nvGrpSpPr>
+        <p:cNvPr id="1" name=""/>
+        <p:cNvGrpSpPr/>
+        <p:nvPr/>
+      </p:nvGrpSpPr>
+      <p:grpSpPr>
+        <a:xfrm>
+          <a:off x="0" y="0"/>
+          <a:ext cx="0" cy="0"/>
+          <a:chOff x="0" y="0"/>
+          <a:chExt cx="0" cy="0"/>
+        </a:xfrm>
+      </p:grpSpPr>
+      <p:sp>
+        <p:nvSpPr>
+          <p:cNvPr id="2" name="Title 1"/>
+          <p:cNvSpPr>
+            <a:spLocks noGrp="1"/>
+          </p:cNvSpPr>
+          <p:nvPr>
+            <p:ph type="title"/>
+          </p:nvPr>
+        </p:nvSpPr>
+        <p:spPr>
+          <a:xfrm>
+            <a:off x="457200" y="274638"/>
+            <a:ext cx="8229600" cy="612868"/>
+          </a:xfrm>
+        </p:spPr>
+        <p:txBody>
+          <a:bodyPr wrap="square"/>
+          <a:lstStyle/>
+          <a:p>
+            <a:pPr>
+              <a:defRPr sz="2000"/>
+            </a:pPr>
+            <a:r>
+              <a:rPr lang="en-US" dirty="0" err="1"/>
+              <a:t>Bài</a:t>
+            </a:r>
+            <a:r>
+              <a:rPr lang="en-US" dirty="0"/>
+              <a:t> </a:t>
+            </a:r>
+            <a:r>
+              <a:rPr lang="en-US" dirty="0" err="1"/>
+              <a:t>toán</a:t>
+            </a:r>
+            <a:r>
+              <a:rPr lang="en-US" dirty="0"/>
+              <a:t> </a:t>
+            </a:r>
+            <a:r>
+              <a:rPr lang="en-US" dirty="0" err="1"/>
+              <a:t>thực</a:t>
+            </a:r>
+            <a:r>
+              <a:rPr lang="en-US" dirty="0"/>
+              <a:t> </a:t>
+            </a:r>
+            <a:r>
+              <a:rPr lang="en-US" dirty="0" err="1"/>
+              <a:t>tế</a:t>
+            </a:r>
+            <a:endParaRPr dirty="0"/>
+          </a:p>
+        </p:txBody>
+      </p:sp>
+      <p:sp>
+        <p:nvSpPr>
+          <p:cNvPr id="3" name="Content Placeholder 2"/>
+          <p:cNvSpPr>
+            <a:spLocks noGrp="1"/>
+          </p:cNvSpPr>
+          <p:nvPr>
+            <p:ph idx="1"/>
+          </p:nvPr>
+        </p:nvSpPr>
+        <p:spPr>
+          <a:xfrm>
+            <a:off x="636496" y="1515036"/>
+            <a:ext cx="8319246" cy="4509248"/>
+          </a:xfrm>
+        </p:spPr>
+        <p:txBody>
+          <a:bodyPr wrap="square" lIns="45720" bIns="73152">
+            <a:normAutofit/>
+          </a:bodyPr>
+          <a:lstStyle/>
+          <a:p>
+            <a:pPr marL="0" indent="0">
+              <a:spcAft>
+                <a:spcPts val="1000"/>
+              </a:spcAft>
+              <a:buNone/>
+              <a:defRPr sz="1900">
+                <a:solidFill>
+                  <a:srgbClr val="1E293B"/>
+                </a:solidFill>
+              </a:defRPr>
+            </a:pPr>
+            <a:r>
+              <a:rPr lang="vi-VN" sz="1200" dirty="0"/>
+              <a:t>• </a:t>
+            </a:r>
+            <a:r>
+              <a:rPr lang="vi-VN" sz="1200" dirty="0" err="1"/>
+              <a:t>Hệ</a:t>
+            </a:r>
+            <a:r>
+              <a:rPr lang="vi-VN" sz="1200" dirty="0"/>
+              <a:t> </a:t>
+            </a:r>
+            <a:r>
+              <a:rPr lang="vi-VN" sz="1200" dirty="0" err="1"/>
+              <a:t>thống</a:t>
+            </a:r>
+            <a:r>
+              <a:rPr lang="vi-VN" sz="1200" dirty="0"/>
+              <a:t> </a:t>
+            </a:r>
+            <a:r>
+              <a:rPr lang="vi-VN" sz="1200" dirty="0" err="1"/>
+              <a:t>gọi</a:t>
+            </a:r>
+            <a:r>
+              <a:rPr lang="vi-VN" sz="1200" dirty="0"/>
+              <a:t> xe </a:t>
+            </a:r>
+            <a:r>
+              <a:rPr lang="vi-VN" sz="1200" dirty="0" err="1"/>
+              <a:t>phải</a:t>
+            </a:r>
+            <a:r>
+              <a:rPr lang="vi-VN" sz="1200" dirty="0"/>
+              <a:t> </a:t>
+            </a:r>
+            <a:r>
+              <a:rPr lang="vi-VN" sz="1200" dirty="0" err="1"/>
+              <a:t>xử</a:t>
+            </a:r>
+            <a:r>
+              <a:rPr lang="vi-VN" sz="1200" dirty="0"/>
+              <a:t> </a:t>
+            </a:r>
+            <a:r>
+              <a:rPr lang="vi-VN" sz="1200" dirty="0" err="1"/>
+              <a:t>lý</a:t>
+            </a:r>
+            <a:r>
+              <a:rPr lang="vi-VN" sz="1200" dirty="0"/>
+              <a:t> </a:t>
+            </a:r>
+            <a:r>
+              <a:rPr lang="vi-VN" sz="1200" dirty="0" err="1"/>
+              <a:t>đồng</a:t>
+            </a:r>
+            <a:r>
+              <a:rPr lang="vi-VN" sz="1200" dirty="0"/>
+              <a:t> </a:t>
+            </a:r>
+            <a:r>
+              <a:rPr lang="vi-VN" sz="1200" dirty="0" err="1"/>
+              <a:t>thời</a:t>
+            </a:r>
+            <a:r>
+              <a:rPr lang="vi-VN" sz="1200" dirty="0"/>
+              <a:t> </a:t>
+            </a:r>
+            <a:r>
+              <a:rPr lang="vi-VN" sz="1200" dirty="0" err="1"/>
+              <a:t>nhiều</a:t>
+            </a:r>
+            <a:r>
+              <a:rPr lang="vi-VN" sz="1200" dirty="0"/>
+              <a:t> yêu </a:t>
+            </a:r>
+            <a:r>
+              <a:rPr lang="vi-VN" sz="1200" dirty="0" err="1"/>
+              <a:t>cầu</a:t>
+            </a:r>
+            <a:r>
+              <a:rPr lang="vi-VN" sz="1200" dirty="0"/>
+              <a:t> </a:t>
+            </a:r>
+            <a:r>
+              <a:rPr lang="vi-VN" sz="1200" dirty="0" err="1"/>
+              <a:t>đặt</a:t>
+            </a:r>
+            <a:r>
+              <a:rPr lang="vi-VN" sz="1200" dirty="0"/>
+              <a:t> xe trong </a:t>
+            </a:r>
+            <a:r>
+              <a:rPr lang="vi-VN" sz="1200" dirty="0" err="1"/>
+              <a:t>thời</a:t>
+            </a:r>
+            <a:r>
+              <a:rPr lang="vi-VN" sz="1200" dirty="0"/>
+              <a:t> gian </a:t>
+            </a:r>
+            <a:r>
+              <a:rPr lang="vi-VN" sz="1200" dirty="0" err="1"/>
+              <a:t>thực</a:t>
+            </a:r>
+            <a:r>
+              <a:rPr lang="vi-VN" sz="1200" dirty="0"/>
+              <a:t> </a:t>
+            </a:r>
+            <a:r>
+              <a:rPr lang="vi-VN" sz="1200" dirty="0" err="1"/>
+              <a:t>với</a:t>
+            </a:r>
+            <a:r>
+              <a:rPr lang="vi-VN" sz="1200" dirty="0"/>
+              <a:t> </a:t>
+            </a:r>
+            <a:r>
+              <a:rPr lang="vi-VN" sz="1200" dirty="0" err="1"/>
+              <a:t>độ</a:t>
+            </a:r>
+            <a:r>
+              <a:rPr lang="vi-VN" sz="1200" dirty="0"/>
+              <a:t> </a:t>
+            </a:r>
+            <a:r>
+              <a:rPr lang="vi-VN" sz="1200" dirty="0" err="1"/>
+              <a:t>trễ</a:t>
+            </a:r>
+            <a:r>
+              <a:rPr lang="vi-VN" sz="1200" dirty="0"/>
+              <a:t> </a:t>
+            </a:r>
+            <a:r>
+              <a:rPr lang="vi-VN" sz="1200" dirty="0" err="1"/>
+              <a:t>thấp</a:t>
+            </a:r>
+            <a:r>
+              <a:rPr lang="vi-VN" sz="1200" dirty="0"/>
+              <a:t>.</a:t>
+            </a:r>
+          </a:p>
+          <a:p>
+            <a:pPr marL="0" indent="0">
+              <a:spcAft>
+                <a:spcPts val="1000"/>
+              </a:spcAft>
+              <a:buNone/>
+              <a:defRPr sz="1900">
+                <a:solidFill>
+                  <a:srgbClr val="1E293B"/>
+                </a:solidFill>
+              </a:defRPr>
+            </a:pPr>
+            <a:r>
+              <a:rPr lang="vi-VN" sz="1200" dirty="0"/>
+              <a:t>• </a:t>
+            </a:r>
+            <a:r>
+              <a:rPr lang="vi-VN" sz="1200" dirty="0" err="1"/>
+              <a:t>Việc</a:t>
+            </a:r>
+            <a:r>
+              <a:rPr lang="vi-VN" sz="1200" dirty="0"/>
+              <a:t> </a:t>
+            </a:r>
+            <a:r>
+              <a:rPr lang="vi-VN" sz="1200" dirty="0" err="1"/>
+              <a:t>matching</a:t>
+            </a:r>
+            <a:r>
+              <a:rPr lang="vi-VN" sz="1200" dirty="0"/>
+              <a:t> </a:t>
+            </a:r>
+            <a:r>
+              <a:rPr lang="vi-VN" sz="1200" dirty="0" err="1"/>
+              <a:t>tài</a:t>
+            </a:r>
+            <a:r>
+              <a:rPr lang="vi-VN" sz="1200" dirty="0"/>
+              <a:t> </a:t>
+            </a:r>
+            <a:r>
+              <a:rPr lang="vi-VN" sz="1200" dirty="0" err="1"/>
+              <a:t>xế</a:t>
+            </a:r>
+            <a:r>
+              <a:rPr lang="vi-VN" sz="1200" dirty="0"/>
+              <a:t> </a:t>
+            </a:r>
+            <a:r>
+              <a:rPr lang="vi-VN" sz="1200" dirty="0" err="1"/>
+              <a:t>cần</a:t>
+            </a:r>
+            <a:r>
+              <a:rPr lang="vi-VN" sz="1200" dirty="0"/>
+              <a:t> </a:t>
+            </a:r>
+            <a:r>
+              <a:rPr lang="vi-VN" sz="1200" dirty="0" err="1"/>
+              <a:t>đảm</a:t>
+            </a:r>
+            <a:r>
+              <a:rPr lang="vi-VN" sz="1200" dirty="0"/>
+              <a:t> </a:t>
+            </a:r>
+            <a:r>
+              <a:rPr lang="vi-VN" sz="1200" dirty="0" err="1"/>
+              <a:t>bảo</a:t>
+            </a:r>
+            <a:r>
+              <a:rPr lang="vi-VN" sz="1200" dirty="0"/>
+              <a:t> </a:t>
+            </a:r>
+            <a:r>
+              <a:rPr lang="vi-VN" sz="1200" dirty="0" err="1"/>
+              <a:t>yếu</a:t>
+            </a:r>
+            <a:r>
+              <a:rPr lang="vi-VN" sz="1200" dirty="0"/>
+              <a:t> </a:t>
+            </a:r>
+            <a:r>
+              <a:rPr lang="vi-VN" sz="1200" dirty="0" err="1"/>
+              <a:t>tố</a:t>
+            </a:r>
+            <a:r>
+              <a:rPr lang="vi-VN" sz="1200" dirty="0"/>
+              <a:t> </a:t>
+            </a:r>
+            <a:r>
+              <a:rPr lang="vi-VN" sz="1200" dirty="0" err="1"/>
+              <a:t>khoảng</a:t>
+            </a:r>
+            <a:r>
+              <a:rPr lang="vi-VN" sz="1200" dirty="0"/>
+              <a:t> </a:t>
+            </a:r>
+            <a:r>
+              <a:rPr lang="vi-VN" sz="1200" dirty="0" err="1"/>
+              <a:t>cách</a:t>
+            </a:r>
+            <a:r>
+              <a:rPr lang="vi-VN" sz="1200" dirty="0"/>
+              <a:t>, </a:t>
+            </a:r>
+            <a:r>
+              <a:rPr lang="vi-VN" sz="1200" dirty="0" err="1"/>
+              <a:t>tỷ</a:t>
+            </a:r>
+            <a:r>
+              <a:rPr lang="vi-VN" sz="1200" dirty="0"/>
+              <a:t> </a:t>
+            </a:r>
+            <a:r>
+              <a:rPr lang="vi-VN" sz="1200" dirty="0" err="1"/>
+              <a:t>lệ</a:t>
+            </a:r>
+            <a:r>
+              <a:rPr lang="vi-VN" sz="1200" dirty="0"/>
+              <a:t> </a:t>
+            </a:r>
+            <a:r>
+              <a:rPr lang="vi-VN" sz="1200" dirty="0" err="1"/>
+              <a:t>chấp</a:t>
+            </a:r>
+            <a:r>
+              <a:rPr lang="vi-VN" sz="1200" dirty="0"/>
+              <a:t> </a:t>
+            </a:r>
+            <a:r>
+              <a:rPr lang="vi-VN" sz="1200" dirty="0" err="1"/>
+              <a:t>nhận</a:t>
+            </a:r>
+            <a:r>
+              <a:rPr lang="vi-VN" sz="1200" dirty="0"/>
+              <a:t> </a:t>
+            </a:r>
+            <a:r>
+              <a:rPr lang="vi-VN" sz="1200" dirty="0" err="1"/>
+              <a:t>chuyến</a:t>
+            </a:r>
+            <a:r>
+              <a:rPr lang="vi-VN" sz="1200" dirty="0"/>
+              <a:t> </a:t>
+            </a:r>
+            <a:r>
+              <a:rPr lang="vi-VN" sz="1200" dirty="0" err="1"/>
+              <a:t>và</a:t>
+            </a:r>
+            <a:r>
+              <a:rPr lang="vi-VN" sz="1200" dirty="0"/>
+              <a:t> </a:t>
+            </a:r>
+            <a:r>
+              <a:rPr lang="vi-VN" sz="1200" dirty="0" err="1"/>
+              <a:t>trạng</a:t>
+            </a:r>
+            <a:r>
+              <a:rPr lang="vi-VN" sz="1200" dirty="0"/>
+              <a:t> </a:t>
+            </a:r>
+            <a:r>
+              <a:rPr lang="vi-VN" sz="1200" dirty="0" err="1"/>
+              <a:t>thái</a:t>
+            </a:r>
+            <a:r>
+              <a:rPr lang="vi-VN" sz="1200" dirty="0"/>
+              <a:t> </a:t>
+            </a:r>
+            <a:r>
+              <a:rPr lang="vi-VN" sz="1200" dirty="0" err="1"/>
+              <a:t>hoạt</a:t>
+            </a:r>
+            <a:r>
+              <a:rPr lang="vi-VN" sz="1200" dirty="0"/>
+              <a:t> </a:t>
+            </a:r>
+            <a:r>
+              <a:rPr lang="vi-VN" sz="1200" dirty="0" err="1"/>
+              <a:t>động</a:t>
+            </a:r>
+            <a:r>
+              <a:rPr lang="vi-VN" sz="1200" dirty="0"/>
+              <a:t> </a:t>
+            </a:r>
+            <a:r>
+              <a:rPr lang="vi-VN" sz="1200" dirty="0" err="1"/>
+              <a:t>của</a:t>
+            </a:r>
+            <a:r>
+              <a:rPr lang="vi-VN" sz="1200" dirty="0"/>
+              <a:t> </a:t>
+            </a:r>
+            <a:r>
+              <a:rPr lang="vi-VN" sz="1200" dirty="0" err="1"/>
+              <a:t>tài</a:t>
+            </a:r>
+            <a:r>
+              <a:rPr lang="vi-VN" sz="1200" dirty="0"/>
+              <a:t> </a:t>
+            </a:r>
+            <a:r>
+              <a:rPr lang="vi-VN" sz="1200" dirty="0" err="1"/>
+              <a:t>xế</a:t>
+            </a:r>
+            <a:r>
+              <a:rPr lang="vi-VN" sz="1200" dirty="0"/>
+              <a:t>.</a:t>
+            </a:r>
+          </a:p>
+          <a:p>
+            <a:pPr marL="0" indent="0">
+              <a:spcAft>
+                <a:spcPts val="1000"/>
+              </a:spcAft>
+              <a:buNone/>
+              <a:defRPr sz="1900">
+                <a:solidFill>
+                  <a:srgbClr val="1E293B"/>
+                </a:solidFill>
+              </a:defRPr>
+            </a:pPr>
+            <a:r>
+              <a:rPr lang="vi-VN" sz="1200" dirty="0"/>
+              <a:t>• </a:t>
+            </a:r>
+            <a:r>
+              <a:rPr lang="vi-VN" sz="1200" dirty="0" err="1"/>
+              <a:t>Hệ</a:t>
+            </a:r>
+            <a:r>
+              <a:rPr lang="vi-VN" sz="1200" dirty="0"/>
+              <a:t> </a:t>
+            </a:r>
+            <a:r>
+              <a:rPr lang="vi-VN" sz="1200" dirty="0" err="1"/>
+              <a:t>thống</a:t>
+            </a:r>
+            <a:r>
+              <a:rPr lang="vi-VN" sz="1200" dirty="0"/>
+              <a:t> thanh </a:t>
+            </a:r>
+            <a:r>
+              <a:rPr lang="vi-VN" sz="1200" dirty="0" err="1"/>
+              <a:t>toán</a:t>
+            </a:r>
+            <a:r>
+              <a:rPr lang="vi-VN" sz="1200" dirty="0"/>
+              <a:t> </a:t>
+            </a:r>
+            <a:r>
+              <a:rPr lang="vi-VN" sz="1200" dirty="0" err="1"/>
+              <a:t>cần</a:t>
+            </a:r>
+            <a:r>
+              <a:rPr lang="vi-VN" sz="1200" dirty="0"/>
+              <a:t> </a:t>
+            </a:r>
+            <a:r>
+              <a:rPr lang="vi-VN" sz="1200" dirty="0" err="1"/>
+              <a:t>đảm</a:t>
+            </a:r>
+            <a:r>
+              <a:rPr lang="vi-VN" sz="1200" dirty="0"/>
+              <a:t> </a:t>
+            </a:r>
+            <a:r>
+              <a:rPr lang="vi-VN" sz="1200" dirty="0" err="1"/>
+              <a:t>bảo</a:t>
+            </a:r>
+            <a:r>
+              <a:rPr lang="vi-VN" sz="1200" dirty="0"/>
+              <a:t> </a:t>
+            </a:r>
+            <a:r>
+              <a:rPr lang="vi-VN" sz="1200" dirty="0" err="1"/>
+              <a:t>tính</a:t>
+            </a:r>
+            <a:r>
+              <a:rPr lang="vi-VN" sz="1200" dirty="0"/>
+              <a:t> </a:t>
+            </a:r>
+            <a:r>
+              <a:rPr lang="vi-VN" sz="1200" dirty="0" err="1"/>
+              <a:t>nhất</a:t>
+            </a:r>
+            <a:r>
+              <a:rPr lang="vi-VN" sz="1200" dirty="0"/>
+              <a:t> </a:t>
+            </a:r>
+            <a:r>
+              <a:rPr lang="vi-VN" sz="1200" dirty="0" err="1"/>
+              <a:t>quán</a:t>
+            </a:r>
+            <a:r>
+              <a:rPr lang="vi-VN" sz="1200" dirty="0"/>
+              <a:t> </a:t>
+            </a:r>
+            <a:r>
+              <a:rPr lang="vi-VN" sz="1200" dirty="0" err="1"/>
+              <a:t>dữ</a:t>
+            </a:r>
+            <a:r>
+              <a:rPr lang="vi-VN" sz="1200" dirty="0"/>
+              <a:t> </a:t>
+            </a:r>
+            <a:r>
+              <a:rPr lang="vi-VN" sz="1200" dirty="0" err="1"/>
+              <a:t>liệu</a:t>
+            </a:r>
+            <a:r>
+              <a:rPr lang="vi-VN" sz="1200" dirty="0"/>
+              <a:t> </a:t>
+            </a:r>
+            <a:r>
+              <a:rPr lang="vi-VN" sz="1200" dirty="0" err="1"/>
+              <a:t>và</a:t>
+            </a:r>
+            <a:r>
+              <a:rPr lang="vi-VN" sz="1200" dirty="0"/>
+              <a:t> </a:t>
+            </a:r>
+            <a:r>
+              <a:rPr lang="vi-VN" sz="1200" dirty="0" err="1"/>
+              <a:t>chống</a:t>
+            </a:r>
+            <a:r>
+              <a:rPr lang="vi-VN" sz="1200" dirty="0"/>
+              <a:t> </a:t>
+            </a:r>
+            <a:r>
+              <a:rPr lang="vi-VN" sz="1200" dirty="0" err="1"/>
+              <a:t>trùng</a:t>
+            </a:r>
+            <a:r>
+              <a:rPr lang="vi-VN" sz="1200" dirty="0"/>
+              <a:t> </a:t>
+            </a:r>
+            <a:r>
+              <a:rPr lang="vi-VN" sz="1200" dirty="0" err="1"/>
+              <a:t>lặp</a:t>
+            </a:r>
+            <a:r>
+              <a:rPr lang="vi-VN" sz="1200" dirty="0"/>
+              <a:t> giao </a:t>
+            </a:r>
+            <a:r>
+              <a:rPr lang="vi-VN" sz="1200" dirty="0" err="1"/>
+              <a:t>dịch</a:t>
+            </a:r>
+            <a:r>
+              <a:rPr lang="vi-VN" sz="1200" dirty="0"/>
+              <a:t>.</a:t>
+            </a:r>
+          </a:p>
+          <a:p>
+            <a:pPr marL="0" indent="0">
+              <a:spcAft>
+                <a:spcPts val="1000"/>
+              </a:spcAft>
+              <a:buNone/>
+              <a:defRPr sz="1900">
+                <a:solidFill>
+                  <a:srgbClr val="1E293B"/>
+                </a:solidFill>
+              </a:defRPr>
+            </a:pPr>
+            <a:r>
+              <a:rPr lang="vi-VN" sz="1200" dirty="0"/>
+              <a:t>• </a:t>
+            </a:r>
+            <a:r>
+              <a:rPr lang="vi-VN" sz="1200" dirty="0" err="1"/>
+              <a:t>Ngoài</a:t>
+            </a:r>
+            <a:r>
+              <a:rPr lang="vi-VN" sz="1200" dirty="0"/>
+              <a:t> ra, </a:t>
+            </a:r>
+            <a:r>
+              <a:rPr lang="vi-VN" sz="1200" dirty="0" err="1"/>
+              <a:t>nền</a:t>
+            </a:r>
+            <a:r>
+              <a:rPr lang="vi-VN" sz="1200" dirty="0"/>
+              <a:t> </a:t>
+            </a:r>
+            <a:r>
+              <a:rPr lang="vi-VN" sz="1200" dirty="0" err="1"/>
+              <a:t>tảng</a:t>
+            </a:r>
+            <a:r>
+              <a:rPr lang="vi-VN" sz="1200" dirty="0"/>
+              <a:t> </a:t>
+            </a:r>
+            <a:r>
+              <a:rPr lang="vi-VN" sz="1200" dirty="0" err="1"/>
+              <a:t>còn</a:t>
+            </a:r>
+            <a:r>
+              <a:rPr lang="vi-VN" sz="1200" dirty="0"/>
+              <a:t> </a:t>
+            </a:r>
+            <a:r>
+              <a:rPr lang="vi-VN" sz="1200" dirty="0" err="1"/>
+              <a:t>cần</a:t>
+            </a:r>
+            <a:r>
+              <a:rPr lang="vi-VN" sz="1200" dirty="0"/>
+              <a:t> </a:t>
+            </a:r>
+            <a:r>
+              <a:rPr lang="vi-VN" sz="1200" dirty="0" err="1"/>
+              <a:t>monitoring</a:t>
+            </a:r>
+            <a:r>
+              <a:rPr lang="vi-VN" sz="1200" dirty="0"/>
+              <a:t>, </a:t>
+            </a:r>
+            <a:r>
+              <a:rPr lang="vi-VN" sz="1200" dirty="0" err="1"/>
+              <a:t>logging</a:t>
+            </a:r>
+            <a:r>
+              <a:rPr lang="vi-VN" sz="1200" dirty="0"/>
+              <a:t>, </a:t>
+            </a:r>
+            <a:r>
+              <a:rPr lang="vi-VN" sz="1200" dirty="0" err="1"/>
+              <a:t>fault</a:t>
+            </a:r>
+            <a:r>
+              <a:rPr lang="vi-VN" sz="1200" dirty="0"/>
+              <a:t> </a:t>
+            </a:r>
+            <a:r>
+              <a:rPr lang="vi-VN" sz="1200" dirty="0" err="1"/>
+              <a:t>tolerance</a:t>
+            </a:r>
+            <a:r>
+              <a:rPr lang="vi-VN" sz="1200" dirty="0"/>
+              <a:t> </a:t>
+            </a:r>
+            <a:r>
+              <a:rPr lang="vi-VN" sz="1200" dirty="0" err="1"/>
+              <a:t>và</a:t>
+            </a:r>
+            <a:r>
+              <a:rPr lang="vi-VN" sz="1200" dirty="0"/>
+              <a:t> </a:t>
+            </a:r>
+            <a:r>
+              <a:rPr lang="vi-VN" sz="1200" dirty="0" err="1"/>
+              <a:t>khả</a:t>
+            </a:r>
+            <a:r>
+              <a:rPr lang="vi-VN" sz="1200" dirty="0"/>
+              <a:t> năng </a:t>
+            </a:r>
+            <a:r>
+              <a:rPr lang="vi-VN" sz="1200" dirty="0" err="1"/>
+              <a:t>scale</a:t>
+            </a:r>
+            <a:r>
+              <a:rPr lang="vi-VN" sz="1200" dirty="0"/>
+              <a:t> ngang khi </a:t>
+            </a:r>
+            <a:r>
+              <a:rPr lang="vi-VN" sz="1200" dirty="0" err="1"/>
+              <a:t>lượng</a:t>
+            </a:r>
+            <a:r>
+              <a:rPr lang="vi-VN" sz="1200" dirty="0"/>
+              <a:t> </a:t>
+            </a:r>
+            <a:r>
+              <a:rPr lang="vi-VN" sz="1200" dirty="0" err="1"/>
+              <a:t>người</a:t>
+            </a:r>
+            <a:r>
+              <a:rPr lang="vi-VN" sz="1200" dirty="0"/>
+              <a:t> </a:t>
+            </a:r>
+            <a:r>
+              <a:rPr lang="vi-VN" sz="1200" dirty="0" err="1"/>
+              <a:t>dùng</a:t>
+            </a:r>
+            <a:r>
+              <a:rPr lang="vi-VN" sz="1200" dirty="0"/>
+              <a:t> tăng </a:t>
+            </a:r>
+            <a:r>
+              <a:rPr lang="vi-VN" sz="1200" dirty="0" err="1"/>
+              <a:t>mạnh</a:t>
+            </a:r>
+            <a:r>
+              <a:rPr lang="vi-VN" sz="1200" dirty="0"/>
+              <a:t>.</a:t>
+            </a:r>
+          </a:p>
+        </p:txBody>
+      </p:sp>
+    </p:spTree>
+    <p:extLst>
+      <p:ext uri="{BB962C8B-B14F-4D97-AF65-F5344CB8AC3E}">
+        <p14:creationId xmlns:p14="http://schemas.microsoft.com/office/powerpoint/2010/main" val="3085113564"/>
+      </p:ext>
+    </p:extLst>
+  </p:cSld>
+  <p:clrMapOvr>
+    <a:masterClrMapping/>
+  </p:clrMapOvr>
+</p:sld>
+</file>
+
+<file path=ppt/slides/slide6.xml><?xml version="1.0" encoding="utf-8"?>
+<p:sld xmlns:a="http://schemas.openxmlformats.org/drawingml/2006/main" xmlns:r="http://schemas.openxmlformats.org/officeDocument/2006/relationships" xmlns:p="http://schemas.openxmlformats.org/presentationml/2006/main">
+  <p:cSld>
+    <p:spTree>
+      <p:nvGrpSpPr>
+        <p:cNvPr id="1" name=""/>
+        <p:cNvGrpSpPr/>
+        <p:nvPr/>
+      </p:nvGrpSpPr>
+      <p:grpSpPr>
+        <a:xfrm>
+          <a:off x="0" y="0"/>
+          <a:ext cx="0" cy="0"/>
+          <a:chOff x="0" y="0"/>
+          <a:chExt cx="0" cy="0"/>
+        </a:xfrm>
+      </p:grpSpPr>
       <p:sp>
         <p:nvSpPr>
           <p:cNvPr id="2" name="TextBox 1"/>
@@ -5854,7 +11888,13 @@
       </p:sp>
       <p:pic>
         <p:nvPicPr>
-          <p:cNvPr id="3" name="Picture 2" descr="overview_arch_system.png"/>
+          <p:cNvPr id="5" name="Picture 4">
+            <a:extLst>
+              <a:ext uri="{FF2B5EF4-FFF2-40B4-BE49-F238E27FC236}">
+                <a16:creationId xmlns:a16="http://schemas.microsoft.com/office/drawing/2014/main" id="{727737CD-DFEC-42D5-BFD4-2832F37036E6}"/>
+              </a:ext>
+            </a:extLst>
+          </p:cNvPr>
           <p:cNvPicPr>
             <a:picLocks noChangeAspect="1"/>
           </p:cNvPicPr>
@@ -5868,8 +11908,8 @@
         </p:blipFill>
         <p:spPr>
           <a:xfrm>
-            <a:off x="411480" y="2231716"/>
-            <a:ext cx="8321040" cy="2787759"/>
+            <a:off x="0" y="694943"/>
+            <a:ext cx="9144000" cy="5822397"/>
           </a:xfrm>
           <a:prstGeom prst="rect">
             <a:avLst/>
@@ -5884,8 +11924,8 @@
 </p:sld>
 </file>
 
-<file path=ppt/slides/slide40.xml><?xml version="1.0" encoding="utf-8"?>
-<p:sld xmlns:a="http://schemas.openxmlformats.org/drawingml/2006/main" xmlns:p="http://schemas.openxmlformats.org/presentationml/2006/main" xmlns:r="http://schemas.openxmlformats.org/officeDocument/2006/relationships">
+<file path=ppt/slides/slide7.xml><?xml version="1.0" encoding="utf-8"?>
+<p:sld xmlns:a="http://schemas.openxmlformats.org/drawingml/2006/main" xmlns:r="http://schemas.openxmlformats.org/officeDocument/2006/relationships" xmlns:p="http://schemas.openxmlformats.org/presentationml/2006/main">
   <p:cSld>
     <p:spTree>
       <p:nvGrpSpPr>
@@ -5893,281 +11933,14 @@
         <p:cNvGrpSpPr/>
         <p:nvPr/>
       </p:nvGrpSpPr>
-      <p:grpSpPr/>
-      <p:sp>
-        <p:nvSpPr>
-          <p:cNvPr id="2" name="TextBox 1"/>
-          <p:cNvSpPr txBox="1"/>
-          <p:nvPr/>
-        </p:nvSpPr>
-        <p:spPr>
-          <a:xfrm>
-            <a:off x="411480" y="164592"/>
-            <a:ext cx="8321040" cy="530352"/>
-          </a:xfrm>
-          <a:prstGeom prst="rect">
-            <a:avLst/>
-          </a:prstGeom>
-          <a:noFill/>
-        </p:spPr>
-        <p:txBody>
-          <a:bodyPr wrap="square">
-            <a:spAutoFit/>
-          </a:bodyPr>
-          <a:lstStyle/>
-          <a:p>
-            <a:pPr>
-              <a:defRPr sz="1400" b="1"/>
-            </a:pPr>
-            <a:r>
-              <a:t>Minh họa: act booking end to end</a:t>
-            </a:r>
-          </a:p>
-        </p:txBody>
-      </p:sp>
-      <p:pic>
-        <p:nvPicPr>
-          <p:cNvPr id="3" name="Picture 2" descr="act_booking_end_to_end.png"/>
-          <p:cNvPicPr>
-            <a:picLocks noChangeAspect="1"/>
-          </p:cNvPicPr>
-          <p:nvPr/>
-        </p:nvPicPr>
-        <p:blipFill>
-          <a:blip r:embed="rId2"/>
-          <a:stretch>
-            <a:fillRect/>
-          </a:stretch>
-        </p:blipFill>
-        <p:spPr>
-          <a:xfrm>
-            <a:off x="3966744" y="804672"/>
-            <a:ext cx="1210511" cy="5641848"/>
-          </a:xfrm>
-          <a:prstGeom prst="rect">
-            <a:avLst/>
-          </a:prstGeom>
-        </p:spPr>
-      </p:pic>
-    </p:spTree>
-  </p:cSld>
-  <p:clrMapOvr>
-    <a:masterClrMapping/>
-  </p:clrMapOvr>
-</p:sld>
-</file>
-
-<file path=ppt/slides/slide41.xml><?xml version="1.0" encoding="utf-8"?>
-<p:sld xmlns:a="http://schemas.openxmlformats.org/drawingml/2006/main" xmlns:p="http://schemas.openxmlformats.org/presentationml/2006/main" xmlns:r="http://schemas.openxmlformats.org/officeDocument/2006/relationships">
-  <p:cSld>
-    <p:spTree>
-      <p:nvGrpSpPr>
-        <p:cNvPr id="1" name=""/>
-        <p:cNvGrpSpPr/>
-        <p:nvPr/>
-      </p:nvGrpSpPr>
-      <p:grpSpPr/>
-      <p:sp>
-        <p:nvSpPr>
-          <p:cNvPr id="2" name="Title 1"/>
-          <p:cNvSpPr>
-            <a:spLocks noGrp="1"/>
-          </p:cNvSpPr>
-          <p:nvPr>
-            <p:ph type="ctrTitle"/>
-          </p:nvPr>
-        </p:nvSpPr>
-        <p:spPr/>
-        <p:txBody>
-          <a:bodyPr wrap="square"/>
-          <a:lstStyle/>
-          <a:p>
-            <a:pPr>
-              <a:defRPr sz="2800"/>
-            </a:pPr>
-            <a:r>
-              <a:t>Cảm ơn thầy cô và hội đồng</a:t>
-            </a:r>
-          </a:p>
-        </p:txBody>
-      </p:sp>
-      <p:sp>
-        <p:nvSpPr>
-          <p:cNvPr id="3" name="Subtitle 2"/>
-          <p:cNvSpPr>
-            <a:spLocks noGrp="1"/>
-          </p:cNvSpPr>
-          <p:nvPr>
-            <p:ph type="subTitle" idx="1"/>
-          </p:nvPr>
-        </p:nvSpPr>
-        <p:spPr/>
-        <p:txBody>
-          <a:bodyPr wrap="square"/>
-          <a:lstStyle/>
-          <a:p>
-            <a:pPr>
-              <a:defRPr sz="1400"/>
-            </a:pPr>
-            <a:r>
-              <a:t>Hỏi &amp; đáp</a:t>
-            </a:r>
-          </a:p>
-        </p:txBody>
-      </p:sp>
-    </p:spTree>
-  </p:cSld>
-  <p:clrMapOvr>
-    <a:masterClrMapping/>
-  </p:clrMapOvr>
-</p:sld>
-</file>
-
-<file path=ppt/slides/slide5.xml><?xml version="1.0" encoding="utf-8"?>
-<p:sld xmlns:a="http://schemas.openxmlformats.org/drawingml/2006/main" xmlns:p="http://schemas.openxmlformats.org/presentationml/2006/main" xmlns:r="http://schemas.openxmlformats.org/officeDocument/2006/relationships">
-  <p:cSld>
-    <p:spTree>
-      <p:nvGrpSpPr>
-        <p:cNvPr id="1" name=""/>
-        <p:cNvGrpSpPr/>
-        <p:nvPr/>
-      </p:nvGrpSpPr>
-      <p:grpSpPr/>
-      <p:sp>
-        <p:nvSpPr>
-          <p:cNvPr id="2" name="Title 1"/>
-          <p:cNvSpPr>
-            <a:spLocks noGrp="1"/>
-          </p:cNvSpPr>
-          <p:nvPr>
-            <p:ph type="title"/>
-          </p:nvPr>
-        </p:nvSpPr>
-        <p:spPr/>
-        <p:txBody>
-          <a:bodyPr wrap="square"/>
-          <a:lstStyle/>
-          <a:p>
-            <a:pPr>
-              <a:defRPr sz="2000"/>
-            </a:pPr>
-            <a:r>
-              <a:t>2. Thu thập yêu cầu và khảo sát nghiệp vụ (Requirement and survey)</a:t>
-            </a:r>
-          </a:p>
-        </p:txBody>
-      </p:sp>
-      <p:sp>
-        <p:nvSpPr>
-          <p:cNvPr id="3" name="Content Placeholder 2"/>
-          <p:cNvSpPr>
-            <a:spLocks noGrp="1"/>
-          </p:cNvSpPr>
-          <p:nvPr>
-            <p:ph idx="1"/>
-          </p:nvPr>
-        </p:nvSpPr>
-        <p:spPr/>
-        <p:txBody>
-          <a:bodyPr wrap="square" bIns="73152" lIns="45720"/>
-          <a:lstStyle/>
-          <a:p>
-            <a:pPr>
-              <a:spcAft>
-                <a:spcPts val="300"/>
-              </a:spcAft>
-              <a:defRPr sz="1100"/>
-            </a:pPr>
-            <a:r>
-              <a:t>(fresher level)</a:t>
-            </a:r>
-          </a:p>
-          <a:p>
-            <a:pPr>
-              <a:spcAft>
-                <a:spcPts val="300"/>
-              </a:spcAft>
-              <a:defRPr sz="1100"/>
-            </a:pPr>
-            <a:r>
-              <a:t>Thu thập yêu cầu từ khách hàng.</a:t>
-            </a:r>
-          </a:p>
-          <a:p>
-            <a:pPr>
-              <a:spcAft>
-                <a:spcPts val="300"/>
-              </a:spcAft>
-              <a:defRPr sz="1100"/>
-            </a:pPr>
-            <a:r>
-              <a:t>Khảo sát các hệ thống thực tế điển hình: nên dùng hình ảnh biểu đồ phân tích dữ liệu và tự thuyết minh diễn giải — từ đó thể hiện kinh nghiệm người làm dự án.</a:t>
-            </a:r>
-          </a:p>
-          <a:p>
-            <a:pPr>
-              <a:spcAft>
-                <a:spcPts val="300"/>
-              </a:spcAft>
-              <a:defRPr sz="1100"/>
-            </a:pPr>
-            <a:r>
-              <a:t>Cách đọc biểu đồ phân tích.</a:t>
-            </a:r>
-          </a:p>
-          <a:p>
-            <a:pPr>
-              <a:spcAft>
-                <a:spcPts val="300"/>
-              </a:spcAft>
-              <a:defRPr sz="1100"/>
-            </a:pPr>
-            <a:r>
-              <a:t>Câu hỏi muốn giải quyết là gì?</a:t>
-            </a:r>
-          </a:p>
-          <a:p>
-            <a:pPr>
-              <a:spcAft>
-                <a:spcPts val="300"/>
-              </a:spcAft>
-              <a:defRPr sz="1100"/>
-            </a:pPr>
-            <a:r>
-              <a:t>Số liệu biểu đồ cho thấy thông tin gì?</a:t>
-            </a:r>
-          </a:p>
-          <a:p>
-            <a:pPr>
-              <a:spcAft>
-                <a:spcPts val="300"/>
-              </a:spcAft>
-              <a:defRPr sz="1100"/>
-            </a:pPr>
-            <a:r>
-              <a:t>Rút ra kết luận gì áp dụng cho dự án?</a:t>
-            </a:r>
-          </a:p>
-        </p:txBody>
-      </p:sp>
-    </p:spTree>
-  </p:cSld>
-  <p:clrMapOvr>
-    <a:masterClrMapping/>
-  </p:clrMapOvr>
-</p:sld>
-</file>
-
-<file path=ppt/slides/slide6.xml><?xml version="1.0" encoding="utf-8"?>
-<p:sld xmlns:a="http://schemas.openxmlformats.org/drawingml/2006/main" xmlns:p="http://schemas.openxmlformats.org/presentationml/2006/main" xmlns:r="http://schemas.openxmlformats.org/officeDocument/2006/relationships">
-  <p:cSld>
-    <p:spTree>
-      <p:nvGrpSpPr>
-        <p:cNvPr id="1" name=""/>
-        <p:cNvGrpSpPr/>
-        <p:nvPr/>
-      </p:nvGrpSpPr>
-      <p:grpSpPr/>
+      <p:grpSpPr>
+        <a:xfrm>
+          <a:off x="0" y="0"/>
+          <a:ext cx="0" cy="0"/>
+          <a:chOff x="0" y="0"/>
+          <a:chExt cx="0" cy="0"/>
+        </a:xfrm>
+      </p:grpSpPr>
       <p:sp>
         <p:nvSpPr>
           <p:cNvPr id="2" name="TextBox 1"/>
@@ -6231,8 +12004,8 @@
 </p:sld>
 </file>
 
-<file path=ppt/slides/slide7.xml><?xml version="1.0" encoding="utf-8"?>
-<p:sld xmlns:a="http://schemas.openxmlformats.org/drawingml/2006/main" xmlns:p="http://schemas.openxmlformats.org/presentationml/2006/main" xmlns:r="http://schemas.openxmlformats.org/officeDocument/2006/relationships">
+<file path=ppt/slides/slide8.xml><?xml version="1.0" encoding="utf-8"?>
+<p:sld xmlns:a="http://schemas.openxmlformats.org/drawingml/2006/main" xmlns:r="http://schemas.openxmlformats.org/officeDocument/2006/relationships" xmlns:p="http://schemas.openxmlformats.org/presentationml/2006/main">
   <p:cSld>
     <p:spTree>
       <p:nvGrpSpPr>
@@ -6240,7 +12013,14 @@
         <p:cNvGrpSpPr/>
         <p:nvPr/>
       </p:nvGrpSpPr>
-      <p:grpSpPr/>
+      <p:grpSpPr>
+        <a:xfrm>
+          <a:off x="0" y="0"/>
+          <a:ext cx="0" cy="0"/>
+          <a:chOff x="0" y="0"/>
+          <a:chExt cx="0" cy="0"/>
+        </a:xfrm>
+      </p:grpSpPr>
       <p:sp>
         <p:nvSpPr>
           <p:cNvPr id="2" name="Title 1"/>
@@ -6277,28 +12057,159 @@
         </p:nvSpPr>
         <p:spPr/>
         <p:txBody>
-          <a:bodyPr wrap="square" bIns="73152" lIns="45720"/>
+          <a:bodyPr wrap="square" lIns="45720" bIns="73152"/>
           <a:lstStyle/>
           <a:p>
-            <a:pPr>
+            <a:pPr marL="0" indent="0">
               <a:spcAft>
                 <a:spcPts val="300"/>
               </a:spcAft>
+              <a:buNone/>
               <a:defRPr sz="1100"/>
             </a:pPr>
             <a:r>
-              <a:t>(fresher level)</a:t>
-            </a:r>
-          </a:p>
-          <a:p>
-            <a:pPr>
-              <a:spcAft>
-                <a:spcPts val="300"/>
-              </a:spcAft>
-              <a:defRPr sz="1100"/>
-            </a:pPr>
-            <a:r>
-              <a:t>Nên dùng hình ảnh tự vẽ theo hệ thống của dự án và tự thuyết minh diễn giải.</a:t>
+              <a:rPr dirty="0" err="1"/>
+              <a:t>Nên</a:t>
+            </a:r>
+            <a:r>
+              <a:rPr dirty="0"/>
+              <a:t> </a:t>
+            </a:r>
+            <a:r>
+              <a:rPr dirty="0" err="1"/>
+              <a:t>dùng</a:t>
+            </a:r>
+            <a:r>
+              <a:rPr dirty="0"/>
+              <a:t> </a:t>
+            </a:r>
+            <a:r>
+              <a:rPr dirty="0" err="1"/>
+              <a:t>hình</a:t>
+            </a:r>
+            <a:r>
+              <a:rPr dirty="0"/>
+              <a:t> </a:t>
+            </a:r>
+            <a:r>
+              <a:rPr dirty="0" err="1"/>
+              <a:t>ảnh</a:t>
+            </a:r>
+            <a:r>
+              <a:rPr dirty="0"/>
+              <a:t> </a:t>
+            </a:r>
+            <a:r>
+              <a:rPr dirty="0" err="1"/>
+              <a:t>tự</a:t>
+            </a:r>
+            <a:r>
+              <a:rPr dirty="0"/>
+              <a:t> </a:t>
+            </a:r>
+            <a:r>
+              <a:rPr dirty="0" err="1"/>
+              <a:t>vẽ</a:t>
+            </a:r>
+            <a:r>
+              <a:rPr dirty="0"/>
+              <a:t> </a:t>
+            </a:r>
+            <a:r>
+              <a:rPr dirty="0" err="1"/>
+              <a:t>theo</a:t>
+            </a:r>
+            <a:r>
+              <a:rPr dirty="0"/>
+              <a:t> </a:t>
+            </a:r>
+            <a:r>
+              <a:rPr dirty="0" err="1"/>
+              <a:t>hệ</a:t>
+            </a:r>
+            <a:r>
+              <a:rPr dirty="0"/>
+              <a:t> </a:t>
+            </a:r>
+            <a:r>
+              <a:rPr dirty="0" err="1"/>
+              <a:t>thống</a:t>
+            </a:r>
+            <a:r>
+              <a:rPr dirty="0"/>
+              <a:t> </a:t>
+            </a:r>
+            <a:r>
+              <a:rPr dirty="0" err="1"/>
+              <a:t>của</a:t>
+            </a:r>
+            <a:r>
+              <a:rPr dirty="0"/>
+              <a:t> </a:t>
+            </a:r>
+            <a:r>
+              <a:rPr dirty="0" err="1"/>
+              <a:t>dự</a:t>
+            </a:r>
+            <a:r>
+              <a:rPr dirty="0"/>
+              <a:t> </a:t>
+            </a:r>
+            <a:r>
+              <a:rPr dirty="0" err="1"/>
+              <a:t>án</a:t>
+            </a:r>
+            <a:r>
+              <a:rPr dirty="0"/>
+              <a:t> </a:t>
+            </a:r>
+            <a:r>
+              <a:rPr dirty="0" err="1"/>
+              <a:t>và</a:t>
+            </a:r>
+            <a:r>
+              <a:rPr dirty="0"/>
+              <a:t> </a:t>
+            </a:r>
+            <a:r>
+              <a:rPr dirty="0" err="1"/>
+              <a:t>tự</a:t>
+            </a:r>
+            <a:r>
+              <a:rPr dirty="0"/>
+              <a:t> </a:t>
+            </a:r>
+            <a:r>
+              <a:rPr dirty="0" err="1"/>
+              <a:t>thuyết</a:t>
+            </a:r>
+            <a:r>
+              <a:rPr dirty="0"/>
+              <a:t> </a:t>
+            </a:r>
+            <a:r>
+              <a:rPr dirty="0" err="1"/>
+              <a:t>minh</a:t>
+            </a:r>
+            <a:r>
+              <a:rPr dirty="0"/>
+              <a:t> </a:t>
+            </a:r>
+            <a:r>
+              <a:rPr dirty="0" err="1"/>
+              <a:t>diễn</a:t>
+            </a:r>
+            <a:r>
+              <a:rPr dirty="0"/>
+              <a:t> </a:t>
+            </a:r>
+            <a:r>
+              <a:rPr dirty="0" err="1"/>
+              <a:t>giải</a:t>
+            </a:r>
+            <a:r>
+              <a:rPr dirty="0"/>
+              <a:t>.</a:t>
             </a:r>
           </a:p>
         </p:txBody>
@@ -6311,8 +12222,8 @@
 </p:sld>
 </file>
 
-<file path=ppt/slides/slide8.xml><?xml version="1.0" encoding="utf-8"?>
-<p:sld xmlns:a="http://schemas.openxmlformats.org/drawingml/2006/main" xmlns:p="http://schemas.openxmlformats.org/presentationml/2006/main" xmlns:r="http://schemas.openxmlformats.org/officeDocument/2006/relationships">
+<file path=ppt/slides/slide9.xml><?xml version="1.0" encoding="utf-8"?>
+<p:sld xmlns:a="http://schemas.openxmlformats.org/drawingml/2006/main" xmlns:r="http://schemas.openxmlformats.org/officeDocument/2006/relationships" xmlns:p="http://schemas.openxmlformats.org/presentationml/2006/main">
   <p:cSld>
     <p:spTree>
       <p:nvGrpSpPr>
@@ -6320,7 +12231,14 @@
         <p:cNvGrpSpPr/>
         <p:nvPr/>
       </p:nvGrpSpPr>
-      <p:grpSpPr/>
+      <p:grpSpPr>
+        <a:xfrm>
+          <a:off x="0" y="0"/>
+          <a:ext cx="0" cy="0"/>
+          <a:chOff x="0" y="0"/>
+          <a:chExt cx="0" cy="0"/>
+        </a:xfrm>
+      </p:grpSpPr>
       <p:sp>
         <p:nvSpPr>
           <p:cNvPr id="2" name="TextBox 1"/>
@@ -6370,79 +12288,6 @@
           <a:xfrm>
             <a:off x="803290" y="804672"/>
             <a:ext cx="7537419" cy="5641848"/>
-          </a:xfrm>
-          <a:prstGeom prst="rect">
-            <a:avLst/>
-          </a:prstGeom>
-        </p:spPr>
-      </p:pic>
-    </p:spTree>
-  </p:cSld>
-  <p:clrMapOvr>
-    <a:masterClrMapping/>
-  </p:clrMapOvr>
-</p:sld>
-</file>
-
-<file path=ppt/slides/slide9.xml><?xml version="1.0" encoding="utf-8"?>
-<p:sld xmlns:a="http://schemas.openxmlformats.org/drawingml/2006/main" xmlns:p="http://schemas.openxmlformats.org/presentationml/2006/main" xmlns:r="http://schemas.openxmlformats.org/officeDocument/2006/relationships">
-  <p:cSld>
-    <p:spTree>
-      <p:nvGrpSpPr>
-        <p:cNvPr id="1" name=""/>
-        <p:cNvGrpSpPr/>
-        <p:nvPr/>
-      </p:nvGrpSpPr>
-      <p:grpSpPr/>
-      <p:sp>
-        <p:nvSpPr>
-          <p:cNvPr id="2" name="TextBox 1"/>
-          <p:cNvSpPr txBox="1"/>
-          <p:nvPr/>
-        </p:nvSpPr>
-        <p:spPr>
-          <a:xfrm>
-            <a:off x="411480" y="164592"/>
-            <a:ext cx="8321040" cy="530352"/>
-          </a:xfrm>
-          <a:prstGeom prst="rect">
-            <a:avLst/>
-          </a:prstGeom>
-          <a:noFill/>
-        </p:spPr>
-        <p:txBody>
-          <a:bodyPr wrap="square">
-            <a:spAutoFit/>
-          </a:bodyPr>
-          <a:lstStyle/>
-          <a:p>
-            <a:pPr>
-              <a:defRPr sz="1400" b="1"/>
-            </a:pPr>
-            <a:r>
-              <a:t>Minh họa: ddd bc service map</a:t>
-            </a:r>
-          </a:p>
-        </p:txBody>
-      </p:sp>
-      <p:pic>
-        <p:nvPicPr>
-          <p:cNvPr id="3" name="Picture 2" descr="ddd_bc_service_map.png"/>
-          <p:cNvPicPr>
-            <a:picLocks noChangeAspect="1"/>
-          </p:cNvPicPr>
-          <p:nvPr/>
-        </p:nvPicPr>
-        <p:blipFill>
-          <a:blip r:embed="rId2"/>
-          <a:stretch>
-            <a:fillRect/>
-          </a:stretch>
-        </p:blipFill>
-        <p:spPr>
-          <a:xfrm>
-            <a:off x="411480" y="1969681"/>
-            <a:ext cx="8321040" cy="3311829"/>
           </a:xfrm>
           <a:prstGeom prst="rect">
             <a:avLst/>
